--- a/sample/sample01_generated.pptx
+++ b/sample/sample01_generated.pptx
@@ -5,22 +5,22 @@
     <p:sldMasterId id="2147483648" r:id="rId1"/>
   </p:sldMasterIdLst>
   <p:sldIdLst>
-    <p:sldId id="256" r:id="rId7"/>
-    <p:sldId id="257" r:id="rId8"/>
-    <p:sldId id="258" r:id="rId9"/>
-    <p:sldId id="259" r:id="rId10"/>
-    <p:sldId id="260" r:id="rId11"/>
-    <p:sldId id="261" r:id="rId12"/>
-    <p:sldId id="262" r:id="rId13"/>
-    <p:sldId id="263" r:id="rId14"/>
-    <p:sldId id="264" r:id="rId15"/>
-    <p:sldId id="265" r:id="rId16"/>
-    <p:sldId id="266" r:id="rId17"/>
-    <p:sldId id="267" r:id="rId18"/>
-    <p:sldId id="268" r:id="rId19"/>
-    <p:sldId id="269" r:id="rId20"/>
+    <p:sldId id="256" r:id="rId2"/>
+    <p:sldId id="257" r:id="rId3"/>
+    <p:sldId id="258" r:id="rId4"/>
+    <p:sldId id="259" r:id="rId5"/>
+    <p:sldId id="260" r:id="rId6"/>
+    <p:sldId id="261" r:id="rId7"/>
+    <p:sldId id="262" r:id="rId8"/>
+    <p:sldId id="263" r:id="rId9"/>
+    <p:sldId id="264" r:id="rId10"/>
+    <p:sldId id="265" r:id="rId11"/>
+    <p:sldId id="266" r:id="rId12"/>
+    <p:sldId id="267" r:id="rId13"/>
+    <p:sldId id="268" r:id="rId14"/>
+    <p:sldId id="269" r:id="rId15"/>
   </p:sldIdLst>
-  <p:sldSz cx="6858000" cy="12193200" type="screen4x3"/>
+  <p:sldSz cx="6858000" cy="12193588"/>
   <p:notesSz cx="6858000" cy="9144000"/>
   <p:defaultTextStyle>
     <a:defPPr>
@@ -117,6 +117,22 @@
       </a:defRPr>
     </a:lvl9pPr>
   </p:defaultTextStyle>
+  <p:extLst>
+    <p:ext uri="{EFAFB233-063F-42B5-8137-9DF3F51BA10A}">
+      <p15:sldGuideLst xmlns:p15="http://schemas.microsoft.com/office/powerpoint/2012/main">
+        <p15:guide id="1" orient="horz" pos="2160">
+          <p15:clr>
+            <a:srgbClr val="A4A3A4"/>
+          </p15:clr>
+        </p15:guide>
+        <p15:guide id="2" pos="2880">
+          <p15:clr>
+            <a:srgbClr val="A4A3A4"/>
+          </p15:clr>
+        </p15:guide>
+      </p15:sldGuideLst>
+    </p:ext>
+  </p:extLst>
 </p:presentation>
 </file>
 
@@ -158,10 +174,9 @@
           <a:lstStyle/>
           <a:p>
             <a:r>
-              <a:rPr lang="en-US" smtClean="0"/>
+              <a:rPr lang="en-US"/>
               <a:t>Click to edit Master title style</a:t>
             </a:r>
-            <a:endParaRPr lang="en-US"/>
           </a:p>
         </p:txBody>
       </p:sp>
@@ -277,10 +292,9 @@
           </a:lstStyle>
           <a:p>
             <a:r>
-              <a:rPr lang="en-US" smtClean="0"/>
+              <a:rPr lang="en-US"/>
               <a:t>Click to edit Master subtitle style</a:t>
             </a:r>
-            <a:endParaRPr lang="en-US"/>
           </a:p>
         </p:txBody>
       </p:sp>
@@ -301,7 +315,7 @@
           <a:p>
             <a:fld id="{5BCAD085-E8A6-8845-BD4E-CB4CCA059FC4}" type="datetimeFigureOut">
               <a:rPr lang="en-US" smtClean="0"/>
-              <a:t>1/27/13</a:t>
+              <a:t>5/25/2026</a:t>
             </a:fld>
             <a:endParaRPr lang="en-US"/>
           </a:p>
@@ -395,10 +409,9 @@
           <a:lstStyle/>
           <a:p>
             <a:r>
-              <a:rPr lang="en-US" smtClean="0"/>
+              <a:rPr lang="en-US"/>
               <a:t>Click to edit Master title style</a:t>
             </a:r>
-            <a:endParaRPr lang="en-US"/>
           </a:p>
         </p:txBody>
       </p:sp>
@@ -419,38 +432,37 @@
           <a:p>
             <a:pPr lvl="0"/>
             <a:r>
-              <a:rPr lang="en-US" smtClean="0"/>
+              <a:rPr lang="en-US"/>
               <a:t>Click to edit Master text styles</a:t>
             </a:r>
           </a:p>
           <a:p>
             <a:pPr lvl="1"/>
             <a:r>
-              <a:rPr lang="en-US" smtClean="0"/>
+              <a:rPr lang="en-US"/>
               <a:t>Second level</a:t>
             </a:r>
           </a:p>
           <a:p>
             <a:pPr lvl="2"/>
             <a:r>
-              <a:rPr lang="en-US" smtClean="0"/>
+              <a:rPr lang="en-US"/>
               <a:t>Third level</a:t>
             </a:r>
           </a:p>
           <a:p>
             <a:pPr lvl="3"/>
             <a:r>
-              <a:rPr lang="en-US" smtClean="0"/>
+              <a:rPr lang="en-US"/>
               <a:t>Fourth level</a:t>
             </a:r>
           </a:p>
           <a:p>
             <a:pPr lvl="4"/>
             <a:r>
-              <a:rPr lang="en-US" smtClean="0"/>
+              <a:rPr lang="en-US"/>
               <a:t>Fifth level</a:t>
             </a:r>
-            <a:endParaRPr lang="en-US"/>
           </a:p>
         </p:txBody>
       </p:sp>
@@ -471,7 +483,7 @@
           <a:p>
             <a:fld id="{5BCAD085-E8A6-8845-BD4E-CB4CCA059FC4}" type="datetimeFigureOut">
               <a:rPr lang="en-US" smtClean="0"/>
-              <a:t>1/27/13</a:t>
+              <a:t>5/25/2026</a:t>
             </a:fld>
             <a:endParaRPr lang="en-US"/>
           </a:p>
@@ -570,10 +582,9 @@
           <a:lstStyle/>
           <a:p>
             <a:r>
-              <a:rPr lang="en-US" smtClean="0"/>
+              <a:rPr lang="en-US"/>
               <a:t>Click to edit Master title style</a:t>
             </a:r>
-            <a:endParaRPr lang="en-US"/>
           </a:p>
         </p:txBody>
       </p:sp>
@@ -599,38 +610,37 @@
           <a:p>
             <a:pPr lvl="0"/>
             <a:r>
-              <a:rPr lang="en-US" smtClean="0"/>
+              <a:rPr lang="en-US"/>
               <a:t>Click to edit Master text styles</a:t>
             </a:r>
           </a:p>
           <a:p>
             <a:pPr lvl="1"/>
             <a:r>
-              <a:rPr lang="en-US" smtClean="0"/>
+              <a:rPr lang="en-US"/>
               <a:t>Second level</a:t>
             </a:r>
           </a:p>
           <a:p>
             <a:pPr lvl="2"/>
             <a:r>
-              <a:rPr lang="en-US" smtClean="0"/>
+              <a:rPr lang="en-US"/>
               <a:t>Third level</a:t>
             </a:r>
           </a:p>
           <a:p>
             <a:pPr lvl="3"/>
             <a:r>
-              <a:rPr lang="en-US" smtClean="0"/>
+              <a:rPr lang="en-US"/>
               <a:t>Fourth level</a:t>
             </a:r>
           </a:p>
           <a:p>
             <a:pPr lvl="4"/>
             <a:r>
-              <a:rPr lang="en-US" smtClean="0"/>
+              <a:rPr lang="en-US"/>
               <a:t>Fifth level</a:t>
             </a:r>
-            <a:endParaRPr lang="en-US"/>
           </a:p>
         </p:txBody>
       </p:sp>
@@ -651,7 +661,7 @@
           <a:p>
             <a:fld id="{5BCAD085-E8A6-8845-BD4E-CB4CCA059FC4}" type="datetimeFigureOut">
               <a:rPr lang="en-US" smtClean="0"/>
-              <a:t>1/27/13</a:t>
+              <a:t>5/25/2026</a:t>
             </a:fld>
             <a:endParaRPr lang="en-US"/>
           </a:p>
@@ -745,10 +755,9 @@
           <a:lstStyle/>
           <a:p>
             <a:r>
-              <a:rPr lang="en-US" smtClean="0"/>
+              <a:rPr lang="en-US"/>
               <a:t>Click to edit Master title style</a:t>
             </a:r>
-            <a:endParaRPr lang="en-US"/>
           </a:p>
         </p:txBody>
       </p:sp>
@@ -769,38 +778,37 @@
           <a:p>
             <a:pPr lvl="0"/>
             <a:r>
-              <a:rPr lang="en-US" smtClean="0"/>
+              <a:rPr lang="en-US"/>
               <a:t>Click to edit Master text styles</a:t>
             </a:r>
           </a:p>
           <a:p>
             <a:pPr lvl="1"/>
             <a:r>
-              <a:rPr lang="en-US" smtClean="0"/>
+              <a:rPr lang="en-US"/>
               <a:t>Second level</a:t>
             </a:r>
           </a:p>
           <a:p>
             <a:pPr lvl="2"/>
             <a:r>
-              <a:rPr lang="en-US" smtClean="0"/>
+              <a:rPr lang="en-US"/>
               <a:t>Third level</a:t>
             </a:r>
           </a:p>
           <a:p>
             <a:pPr lvl="3"/>
             <a:r>
-              <a:rPr lang="en-US" smtClean="0"/>
+              <a:rPr lang="en-US"/>
               <a:t>Fourth level</a:t>
             </a:r>
           </a:p>
           <a:p>
             <a:pPr lvl="4"/>
             <a:r>
-              <a:rPr lang="en-US" smtClean="0"/>
+              <a:rPr lang="en-US"/>
               <a:t>Fifth level</a:t>
             </a:r>
-            <a:endParaRPr lang="en-US"/>
           </a:p>
         </p:txBody>
       </p:sp>
@@ -821,7 +829,7 @@
           <a:p>
             <a:fld id="{5BCAD085-E8A6-8845-BD4E-CB4CCA059FC4}" type="datetimeFigureOut">
               <a:rPr lang="en-US" smtClean="0"/>
-              <a:t>1/27/13</a:t>
+              <a:t>5/25/2026</a:t>
             </a:fld>
             <a:endParaRPr lang="en-US"/>
           </a:p>
@@ -924,10 +932,9 @@
           </a:lstStyle>
           <a:p>
             <a:r>
-              <a:rPr lang="en-US" smtClean="0"/>
+              <a:rPr lang="en-US"/>
               <a:t>Click to edit Master title style</a:t>
             </a:r>
-            <a:endParaRPr lang="en-US"/>
           </a:p>
         </p:txBody>
       </p:sp>
@@ -1044,7 +1051,7 @@
           <a:p>
             <a:pPr lvl="0"/>
             <a:r>
-              <a:rPr lang="en-US" smtClean="0"/>
+              <a:rPr lang="en-US"/>
               <a:t>Click to edit Master text styles</a:t>
             </a:r>
           </a:p>
@@ -1067,7 +1074,7 @@
           <a:p>
             <a:fld id="{5BCAD085-E8A6-8845-BD4E-CB4CCA059FC4}" type="datetimeFigureOut">
               <a:rPr lang="en-US" smtClean="0"/>
-              <a:t>1/27/13</a:t>
+              <a:t>5/25/2026</a:t>
             </a:fld>
             <a:endParaRPr lang="en-US"/>
           </a:p>
@@ -1161,10 +1168,9 @@
           <a:lstStyle/>
           <a:p>
             <a:r>
-              <a:rPr lang="en-US" smtClean="0"/>
+              <a:rPr lang="en-US"/>
               <a:t>Click to edit Master title style</a:t>
             </a:r>
-            <a:endParaRPr lang="en-US"/>
           </a:p>
         </p:txBody>
       </p:sp>
@@ -1218,38 +1224,37 @@
           <a:p>
             <a:pPr lvl="0"/>
             <a:r>
-              <a:rPr lang="en-US" smtClean="0"/>
+              <a:rPr lang="en-US"/>
               <a:t>Click to edit Master text styles</a:t>
             </a:r>
           </a:p>
           <a:p>
             <a:pPr lvl="1"/>
             <a:r>
-              <a:rPr lang="en-US" smtClean="0"/>
+              <a:rPr lang="en-US"/>
               <a:t>Second level</a:t>
             </a:r>
           </a:p>
           <a:p>
             <a:pPr lvl="2"/>
             <a:r>
-              <a:rPr lang="en-US" smtClean="0"/>
+              <a:rPr lang="en-US"/>
               <a:t>Third level</a:t>
             </a:r>
           </a:p>
           <a:p>
             <a:pPr lvl="3"/>
             <a:r>
-              <a:rPr lang="en-US" smtClean="0"/>
+              <a:rPr lang="en-US"/>
               <a:t>Fourth level</a:t>
             </a:r>
           </a:p>
           <a:p>
             <a:pPr lvl="4"/>
             <a:r>
-              <a:rPr lang="en-US" smtClean="0"/>
+              <a:rPr lang="en-US"/>
               <a:t>Fifth level</a:t>
             </a:r>
-            <a:endParaRPr lang="en-US"/>
           </a:p>
         </p:txBody>
       </p:sp>
@@ -1303,38 +1308,37 @@
           <a:p>
             <a:pPr lvl="0"/>
             <a:r>
-              <a:rPr lang="en-US" smtClean="0"/>
+              <a:rPr lang="en-US"/>
               <a:t>Click to edit Master text styles</a:t>
             </a:r>
           </a:p>
           <a:p>
             <a:pPr lvl="1"/>
             <a:r>
-              <a:rPr lang="en-US" smtClean="0"/>
+              <a:rPr lang="en-US"/>
               <a:t>Second level</a:t>
             </a:r>
           </a:p>
           <a:p>
             <a:pPr lvl="2"/>
             <a:r>
-              <a:rPr lang="en-US" smtClean="0"/>
+              <a:rPr lang="en-US"/>
               <a:t>Third level</a:t>
             </a:r>
           </a:p>
           <a:p>
             <a:pPr lvl="3"/>
             <a:r>
-              <a:rPr lang="en-US" smtClean="0"/>
+              <a:rPr lang="en-US"/>
               <a:t>Fourth level</a:t>
             </a:r>
           </a:p>
           <a:p>
             <a:pPr lvl="4"/>
             <a:r>
-              <a:rPr lang="en-US" smtClean="0"/>
+              <a:rPr lang="en-US"/>
               <a:t>Fifth level</a:t>
             </a:r>
-            <a:endParaRPr lang="en-US"/>
           </a:p>
         </p:txBody>
       </p:sp>
@@ -1355,7 +1359,7 @@
           <a:p>
             <a:fld id="{5BCAD085-E8A6-8845-BD4E-CB4CCA059FC4}" type="datetimeFigureOut">
               <a:rPr lang="en-US" smtClean="0"/>
-              <a:t>1/27/13</a:t>
+              <a:t>5/25/2026</a:t>
             </a:fld>
             <a:endParaRPr lang="en-US"/>
           </a:p>
@@ -1453,10 +1457,9 @@
           </a:lstStyle>
           <a:p>
             <a:r>
-              <a:rPr lang="en-US" smtClean="0"/>
+              <a:rPr lang="en-US"/>
               <a:t>Click to edit Master title style</a:t>
             </a:r>
-            <a:endParaRPr lang="en-US"/>
           </a:p>
         </p:txBody>
       </p:sp>
@@ -1519,7 +1522,7 @@
           <a:p>
             <a:pPr lvl="0"/>
             <a:r>
-              <a:rPr lang="en-US" smtClean="0"/>
+              <a:rPr lang="en-US"/>
               <a:t>Click to edit Master text styles</a:t>
             </a:r>
           </a:p>
@@ -1575,38 +1578,37 @@
           <a:p>
             <a:pPr lvl="0"/>
             <a:r>
-              <a:rPr lang="en-US" smtClean="0"/>
+              <a:rPr lang="en-US"/>
               <a:t>Click to edit Master text styles</a:t>
             </a:r>
           </a:p>
           <a:p>
             <a:pPr lvl="1"/>
             <a:r>
-              <a:rPr lang="en-US" smtClean="0"/>
+              <a:rPr lang="en-US"/>
               <a:t>Second level</a:t>
             </a:r>
           </a:p>
           <a:p>
             <a:pPr lvl="2"/>
             <a:r>
-              <a:rPr lang="en-US" smtClean="0"/>
+              <a:rPr lang="en-US"/>
               <a:t>Third level</a:t>
             </a:r>
           </a:p>
           <a:p>
             <a:pPr lvl="3"/>
             <a:r>
-              <a:rPr lang="en-US" smtClean="0"/>
+              <a:rPr lang="en-US"/>
               <a:t>Fourth level</a:t>
             </a:r>
           </a:p>
           <a:p>
             <a:pPr lvl="4"/>
             <a:r>
-              <a:rPr lang="en-US" smtClean="0"/>
+              <a:rPr lang="en-US"/>
               <a:t>Fifth level</a:t>
             </a:r>
-            <a:endParaRPr lang="en-US"/>
           </a:p>
         </p:txBody>
       </p:sp>
@@ -1669,7 +1671,7 @@
           <a:p>
             <a:pPr lvl="0"/>
             <a:r>
-              <a:rPr lang="en-US" smtClean="0"/>
+              <a:rPr lang="en-US"/>
               <a:t>Click to edit Master text styles</a:t>
             </a:r>
           </a:p>
@@ -1725,38 +1727,37 @@
           <a:p>
             <a:pPr lvl="0"/>
             <a:r>
-              <a:rPr lang="en-US" smtClean="0"/>
+              <a:rPr lang="en-US"/>
               <a:t>Click to edit Master text styles</a:t>
             </a:r>
           </a:p>
           <a:p>
             <a:pPr lvl="1"/>
             <a:r>
-              <a:rPr lang="en-US" smtClean="0"/>
+              <a:rPr lang="en-US"/>
               <a:t>Second level</a:t>
             </a:r>
           </a:p>
           <a:p>
             <a:pPr lvl="2"/>
             <a:r>
-              <a:rPr lang="en-US" smtClean="0"/>
+              <a:rPr lang="en-US"/>
               <a:t>Third level</a:t>
             </a:r>
           </a:p>
           <a:p>
             <a:pPr lvl="3"/>
             <a:r>
-              <a:rPr lang="en-US" smtClean="0"/>
+              <a:rPr lang="en-US"/>
               <a:t>Fourth level</a:t>
             </a:r>
           </a:p>
           <a:p>
             <a:pPr lvl="4"/>
             <a:r>
-              <a:rPr lang="en-US" smtClean="0"/>
+              <a:rPr lang="en-US"/>
               <a:t>Fifth level</a:t>
             </a:r>
-            <a:endParaRPr lang="en-US"/>
           </a:p>
         </p:txBody>
       </p:sp>
@@ -1777,7 +1778,7 @@
           <a:p>
             <a:fld id="{5BCAD085-E8A6-8845-BD4E-CB4CCA059FC4}" type="datetimeFigureOut">
               <a:rPr lang="en-US" smtClean="0"/>
-              <a:t>1/27/13</a:t>
+              <a:t>5/25/2026</a:t>
             </a:fld>
             <a:endParaRPr lang="en-US"/>
           </a:p>
@@ -1871,10 +1872,9 @@
           <a:lstStyle/>
           <a:p>
             <a:r>
-              <a:rPr lang="en-US" smtClean="0"/>
+              <a:rPr lang="en-US"/>
               <a:t>Click to edit Master title style</a:t>
             </a:r>
-            <a:endParaRPr lang="en-US"/>
           </a:p>
         </p:txBody>
       </p:sp>
@@ -1895,7 +1895,7 @@
           <a:p>
             <a:fld id="{5BCAD085-E8A6-8845-BD4E-CB4CCA059FC4}" type="datetimeFigureOut">
               <a:rPr lang="en-US" smtClean="0"/>
-              <a:t>1/27/13</a:t>
+              <a:t>5/25/2026</a:t>
             </a:fld>
             <a:endParaRPr lang="en-US"/>
           </a:p>
@@ -1990,7 +1990,7 @@
           <a:p>
             <a:fld id="{5BCAD085-E8A6-8845-BD4E-CB4CCA059FC4}" type="datetimeFigureOut">
               <a:rPr lang="en-US" smtClean="0"/>
-              <a:t>1/27/13</a:t>
+              <a:t>5/25/2026</a:t>
             </a:fld>
             <a:endParaRPr lang="en-US"/>
           </a:p>
@@ -2093,10 +2093,9 @@
           </a:lstStyle>
           <a:p>
             <a:r>
-              <a:rPr lang="en-US" smtClean="0"/>
+              <a:rPr lang="en-US"/>
               <a:t>Click to edit Master title style</a:t>
             </a:r>
-            <a:endParaRPr lang="en-US"/>
           </a:p>
         </p:txBody>
       </p:sp>
@@ -2150,38 +2149,37 @@
           <a:p>
             <a:pPr lvl="0"/>
             <a:r>
-              <a:rPr lang="en-US" smtClean="0"/>
+              <a:rPr lang="en-US"/>
               <a:t>Click to edit Master text styles</a:t>
             </a:r>
           </a:p>
           <a:p>
             <a:pPr lvl="1"/>
             <a:r>
-              <a:rPr lang="en-US" smtClean="0"/>
+              <a:rPr lang="en-US"/>
               <a:t>Second level</a:t>
             </a:r>
           </a:p>
           <a:p>
             <a:pPr lvl="2"/>
             <a:r>
-              <a:rPr lang="en-US" smtClean="0"/>
+              <a:rPr lang="en-US"/>
               <a:t>Third level</a:t>
             </a:r>
           </a:p>
           <a:p>
             <a:pPr lvl="3"/>
             <a:r>
-              <a:rPr lang="en-US" smtClean="0"/>
+              <a:rPr lang="en-US"/>
               <a:t>Fourth level</a:t>
             </a:r>
           </a:p>
           <a:p>
             <a:pPr lvl="4"/>
             <a:r>
-              <a:rPr lang="en-US" smtClean="0"/>
+              <a:rPr lang="en-US"/>
               <a:t>Fifth level</a:t>
             </a:r>
-            <a:endParaRPr lang="en-US"/>
           </a:p>
         </p:txBody>
       </p:sp>
@@ -2244,7 +2242,7 @@
           <a:p>
             <a:pPr lvl="0"/>
             <a:r>
-              <a:rPr lang="en-US" smtClean="0"/>
+              <a:rPr lang="en-US"/>
               <a:t>Click to edit Master text styles</a:t>
             </a:r>
           </a:p>
@@ -2267,7 +2265,7 @@
           <a:p>
             <a:fld id="{5BCAD085-E8A6-8845-BD4E-CB4CCA059FC4}" type="datetimeFigureOut">
               <a:rPr lang="en-US" smtClean="0"/>
-              <a:t>1/27/13</a:t>
+              <a:t>5/25/2026</a:t>
             </a:fld>
             <a:endParaRPr lang="en-US"/>
           </a:p>
@@ -2370,10 +2368,9 @@
           </a:lstStyle>
           <a:p>
             <a:r>
-              <a:rPr lang="en-US" smtClean="0"/>
+              <a:rPr lang="en-US"/>
               <a:t>Click to edit Master title style</a:t>
             </a:r>
-            <a:endParaRPr lang="en-US"/>
           </a:p>
         </p:txBody>
       </p:sp>
@@ -2497,7 +2494,7 @@
           <a:p>
             <a:pPr lvl="0"/>
             <a:r>
-              <a:rPr lang="en-US" smtClean="0"/>
+              <a:rPr lang="en-US"/>
               <a:t>Click to edit Master text styles</a:t>
             </a:r>
           </a:p>
@@ -2520,7 +2517,7 @@
           <a:p>
             <a:fld id="{5BCAD085-E8A6-8845-BD4E-CB4CCA059FC4}" type="datetimeFigureOut">
               <a:rPr lang="en-US" smtClean="0"/>
-              <a:t>1/27/13</a:t>
+              <a:t>5/25/2026</a:t>
             </a:fld>
             <a:endParaRPr lang="en-US"/>
           </a:p>
@@ -2629,10 +2626,9 @@
           <a:lstStyle/>
           <a:p>
             <a:r>
-              <a:rPr lang="en-US" smtClean="0"/>
+              <a:rPr lang="en-US"/>
               <a:t>Click to edit Master title style</a:t>
             </a:r>
-            <a:endParaRPr lang="en-US"/>
           </a:p>
         </p:txBody>
       </p:sp>
@@ -2663,38 +2659,37 @@
           <a:p>
             <a:pPr lvl="0"/>
             <a:r>
-              <a:rPr lang="en-US" smtClean="0"/>
+              <a:rPr lang="en-US"/>
               <a:t>Click to edit Master text styles</a:t>
             </a:r>
           </a:p>
           <a:p>
             <a:pPr lvl="1"/>
             <a:r>
-              <a:rPr lang="en-US" smtClean="0"/>
+              <a:rPr lang="en-US"/>
               <a:t>Second level</a:t>
             </a:r>
           </a:p>
           <a:p>
             <a:pPr lvl="2"/>
             <a:r>
-              <a:rPr lang="en-US" smtClean="0"/>
+              <a:rPr lang="en-US"/>
               <a:t>Third level</a:t>
             </a:r>
           </a:p>
           <a:p>
             <a:pPr lvl="3"/>
             <a:r>
-              <a:rPr lang="en-US" smtClean="0"/>
+              <a:rPr lang="en-US"/>
               <a:t>Fourth level</a:t>
             </a:r>
           </a:p>
           <a:p>
             <a:pPr lvl="4"/>
             <a:r>
-              <a:rPr lang="en-US" smtClean="0"/>
+              <a:rPr lang="en-US"/>
               <a:t>Fifth level</a:t>
             </a:r>
-            <a:endParaRPr lang="en-US"/>
           </a:p>
         </p:txBody>
       </p:sp>
@@ -2733,7 +2728,7 @@
           <a:p>
             <a:fld id="{5BCAD085-E8A6-8845-BD4E-CB4CCA059FC4}" type="datetimeFigureOut">
               <a:rPr lang="en-US" smtClean="0"/>
-              <a:t>1/27/13</a:t>
+              <a:t>5/25/2026</a:t>
             </a:fld>
             <a:endParaRPr lang="en-US"/>
           </a:p>
@@ -3092,7 +3087,7 @@
 </file>
 
 <file path=ppt/slides/slide1.xml><?xml version="1.0" encoding="utf-8"?>
-<p:sld xmlns:a="http://schemas.openxmlformats.org/drawingml/2006/main" xmlns:p="http://schemas.openxmlformats.org/presentationml/2006/main" xmlns:r="http://schemas.openxmlformats.org/officeDocument/2006/relationships">
+<p:sld xmlns:a="http://schemas.openxmlformats.org/drawingml/2006/main" xmlns:r="http://schemas.openxmlformats.org/officeDocument/2006/relationships" xmlns:p="http://schemas.openxmlformats.org/presentationml/2006/main">
   <p:cSld>
     <p:spTree>
       <p:nvGrpSpPr>
@@ -3100,7 +3095,14 @@
         <p:cNvGrpSpPr/>
         <p:nvPr/>
       </p:nvGrpSpPr>
-      <p:grpSpPr/>
+      <p:grpSpPr>
+        <a:xfrm>
+          <a:off x="0" y="0"/>
+          <a:ext cx="0" cy="0"/>
+          <a:chOff x="0" y="0"/>
+          <a:chExt cx="0" cy="0"/>
+        </a:xfrm>
+      </p:grpSpPr>
       <p:pic>
         <p:nvPicPr>
           <p:cNvPr id="2" name="Picture 1" descr="image.jpg"/>
@@ -3134,21 +3136,21 @@
         <p:spPr>
           <a:xfrm>
             <a:off x="914400" y="5682479"/>
-            <a:ext cx="9360000" cy="883920"/>
-          </a:xfrm>
-          <a:prstGeom prst="rect">
-            <a:avLst/>
-          </a:prstGeom>
-          <a:noFill/>
-        </p:spPr>
-        <p:txBody>
-          <a:bodyPr wrap="none">
-            <a:noAutofit/>
-          </a:bodyPr>
-          <a:lstStyle/>
-          <a:p>
-            <a:r>
-              <a:rPr sz="4800">
+            <a:ext cx="5760000" cy="883920"/>
+          </a:xfrm>
+          <a:prstGeom prst="rect">
+            <a:avLst/>
+          </a:prstGeom>
+          <a:noFill/>
+        </p:spPr>
+        <p:txBody>
+          <a:bodyPr wrap="none">
+            <a:noAutofit/>
+          </a:bodyPr>
+          <a:lstStyle/>
+          <a:p>
+            <a:r>
+              <a:rPr sz="4800" dirty="0" err="1">
                 <a:solidFill>
                   <a:srgbClr val="FF6B35"/>
                 </a:solidFill>
@@ -3157,11 +3159,14 @@
               <a:t>张爱玲</a:t>
             </a:r>
             <a:r>
-              <a:rPr sz="4800">
+              <a:rPr sz="4800" dirty="0" err="1">
                 <a:latin typeface="华康少女文字W5(P)"/>
               </a:rPr>
               <a:t>有一句话</a:t>
             </a:r>
+            <a:endParaRPr sz="4800" dirty="0">
+              <a:latin typeface="华康少女文字W5(P)"/>
+            </a:endParaRPr>
           </a:p>
         </p:txBody>
       </p:sp>
@@ -3174,7 +3179,7 @@
 </file>
 
 <file path=ppt/slides/slide10.xml><?xml version="1.0" encoding="utf-8"?>
-<p:sld xmlns:a="http://schemas.openxmlformats.org/drawingml/2006/main" xmlns:p="http://schemas.openxmlformats.org/presentationml/2006/main" xmlns:r="http://schemas.openxmlformats.org/officeDocument/2006/relationships">
+<p:sld xmlns:a="http://schemas.openxmlformats.org/drawingml/2006/main" xmlns:r="http://schemas.openxmlformats.org/officeDocument/2006/relationships" xmlns:p="http://schemas.openxmlformats.org/presentationml/2006/main">
   <p:cSld>
     <p:spTree>
       <p:nvGrpSpPr>
@@ -3182,7 +3187,14 @@
         <p:cNvGrpSpPr/>
         <p:nvPr/>
       </p:nvGrpSpPr>
-      <p:grpSpPr/>
+      <p:grpSpPr>
+        <a:xfrm>
+          <a:off x="0" y="0"/>
+          <a:ext cx="0" cy="0"/>
+          <a:chOff x="0" y="0"/>
+          <a:chExt cx="0" cy="0"/>
+        </a:xfrm>
+      </p:grpSpPr>
       <p:pic>
         <p:nvPicPr>
           <p:cNvPr id="2" name="Picture 1" descr="image.jpg"/>
@@ -3216,7 +3228,7 @@
         <p:spPr>
           <a:xfrm>
             <a:off x="914400" y="5682479"/>
-            <a:ext cx="9360000" cy="883920"/>
+            <a:ext cx="5760000" cy="883920"/>
           </a:xfrm>
           <a:prstGeom prst="rect">
             <a:avLst/>
@@ -3233,27 +3245,258 @@
               <a:rPr sz="4800">
                 <a:latin typeface="华康少女文字W5(P)"/>
               </a:rPr>
-              <a:t>最高</a:t>
-            </a:r>
+              <a:t>最高的境界了</a:t>
+            </a:r>
+          </a:p>
+        </p:txBody>
+      </p:sp>
+      <p:sp>
+        <p:nvSpPr>
+          <p:cNvPr id="4" name="TextBox 3"/>
+          <p:cNvSpPr txBox="1"/>
+          <p:nvPr/>
+        </p:nvSpPr>
+        <p:spPr>
+          <a:xfrm>
+            <a:off x="914400" y="4831665"/>
+            <a:ext cx="5760000" cy="724814"/>
+          </a:xfrm>
+          <a:prstGeom prst="rect">
+            <a:avLst/>
+          </a:prstGeom>
+          <a:noFill/>
+        </p:spPr>
+        <p:txBody>
+          <a:bodyPr wrap="none">
+            <a:noAutofit/>
+          </a:bodyPr>
+          <a:lstStyle/>
+          <a:p>
+            <a:r>
+              <a:rPr sz="3936">
+                <a:latin typeface="华康少女文字W5(P)"/>
+              </a:rPr>
+              <a:t>不讲道理已经到了</a:t>
+            </a:r>
+          </a:p>
+        </p:txBody>
+      </p:sp>
+      <p:sp>
+        <p:nvSpPr>
+          <p:cNvPr id="5" name="TextBox 4"/>
+          <p:cNvSpPr txBox="1"/>
+          <p:nvPr/>
+        </p:nvSpPr>
+        <p:spPr>
+          <a:xfrm>
+            <a:off x="914400" y="4111317"/>
+            <a:ext cx="5760000" cy="594347"/>
+          </a:xfrm>
+          <a:prstGeom prst="rect">
+            <a:avLst/>
+          </a:prstGeom>
+          <a:noFill/>
+        </p:spPr>
+        <p:txBody>
+          <a:bodyPr wrap="none">
+            <a:noAutofit/>
+          </a:bodyPr>
+          <a:lstStyle/>
+          <a:p>
+            <a:r>
+              <a:rPr sz="3227">
+                <a:latin typeface="华康少女文字W5(P)"/>
+              </a:rPr>
+              <a:t>我们家里那个</a:t>
+            </a:r>
+          </a:p>
+        </p:txBody>
+      </p:sp>
+      <p:sp>
+        <p:nvSpPr>
+          <p:cNvPr id="13" name="TextBox 3">
+            <a:extLst>
+              <a:ext uri="{FF2B5EF4-FFF2-40B4-BE49-F238E27FC236}">
+                <a16:creationId xmlns:a16="http://schemas.microsoft.com/office/drawing/2014/main" id="{E76203DA-D2E0-A09D-F2D8-B97EB63A2983}"/>
+              </a:ext>
+            </a:extLst>
+          </p:cNvPr>
+          <p:cNvSpPr txBox="1"/>
+          <p:nvPr/>
+        </p:nvSpPr>
+        <p:spPr>
+          <a:xfrm rot="5400000">
+            <a:off x="1101003" y="3994127"/>
+            <a:ext cx="5760000" cy="883920"/>
+          </a:xfrm>
+          <a:prstGeom prst="rect">
+            <a:avLst/>
+          </a:prstGeom>
+          <a:noFill/>
+        </p:spPr>
+        <p:txBody>
+          <a:bodyPr wrap="none">
+            <a:noAutofit/>
+          </a:bodyPr>
+          <a:lstStyle/>
+          <a:p>
+            <a:r>
+              <a:rPr sz="4800" dirty="0" err="1">
+                <a:latin typeface="华康少女文字W5(P)"/>
+              </a:rPr>
+              <a:t>谁占上风</a:t>
+            </a:r>
+            <a:endParaRPr sz="4800" dirty="0">
+              <a:latin typeface="华康少女文字W5(P)"/>
+            </a:endParaRPr>
+          </a:p>
+        </p:txBody>
+      </p:sp>
+      <p:sp>
+        <p:nvSpPr>
+          <p:cNvPr id="14" name="TextBox 4">
+            <a:extLst>
+              <a:ext uri="{FF2B5EF4-FFF2-40B4-BE49-F238E27FC236}">
+                <a16:creationId xmlns:a16="http://schemas.microsoft.com/office/drawing/2014/main" id="{346081B1-6EC3-5EC3-20B3-229BB51AC55B}"/>
+              </a:ext>
+            </a:extLst>
+          </p:cNvPr>
+          <p:cNvSpPr txBox="1"/>
+          <p:nvPr/>
+        </p:nvSpPr>
+        <p:spPr>
+          <a:xfrm rot="5400000">
+            <a:off x="1905370" y="4073679"/>
+            <a:ext cx="5760000" cy="724814"/>
+          </a:xfrm>
+          <a:prstGeom prst="rect">
+            <a:avLst/>
+          </a:prstGeom>
+          <a:noFill/>
+        </p:spPr>
+        <p:txBody>
+          <a:bodyPr wrap="none">
+            <a:noAutofit/>
+          </a:bodyPr>
+          <a:lstStyle/>
+          <a:p>
+            <a:r>
+              <a:rPr sz="3936" dirty="0" err="1">
+                <a:latin typeface="华康少女文字W5(P)"/>
+              </a:rPr>
+              <a:t>谁</a:t>
+            </a:r>
+            <a:r>
+              <a:rPr sz="3936" dirty="0" err="1">
+                <a:solidFill>
+                  <a:srgbClr val="FF0000"/>
+                </a:solidFill>
+                <a:latin typeface="文鼎霹雳体"/>
+              </a:rPr>
+              <a:t>不讲道理</a:t>
+            </a:r>
+            <a:endParaRPr sz="3936" dirty="0">
+              <a:solidFill>
+                <a:srgbClr val="FF0000"/>
+              </a:solidFill>
+              <a:latin typeface="文鼎霹雳体"/>
+            </a:endParaRPr>
+          </a:p>
+        </p:txBody>
+      </p:sp>
+      <p:sp>
+        <p:nvSpPr>
+          <p:cNvPr id="15" name="TextBox 5">
+            <a:extLst>
+              <a:ext uri="{FF2B5EF4-FFF2-40B4-BE49-F238E27FC236}">
+                <a16:creationId xmlns:a16="http://schemas.microsoft.com/office/drawing/2014/main" id="{09D79740-8638-B27B-8B50-0CF1F3B1DD29}"/>
+              </a:ext>
+            </a:extLst>
+          </p:cNvPr>
+          <p:cNvSpPr txBox="1"/>
+          <p:nvPr/>
+        </p:nvSpPr>
+        <p:spPr>
+          <a:xfrm rot="5400000">
+            <a:off x="2564951" y="4138913"/>
+            <a:ext cx="5760000" cy="594347"/>
+          </a:xfrm>
+          <a:prstGeom prst="rect">
+            <a:avLst/>
+          </a:prstGeom>
+          <a:noFill/>
+        </p:spPr>
+        <p:txBody>
+          <a:bodyPr wrap="none">
+            <a:noAutofit/>
+          </a:bodyPr>
+          <a:lstStyle/>
+          <a:p>
+            <a:r>
+              <a:rPr sz="3227" dirty="0" err="1">
+                <a:latin typeface="华康少女文字W5(P)"/>
+              </a:rPr>
+              <a:t>结婚之后嘛</a:t>
+            </a:r>
+            <a:endParaRPr sz="3227" dirty="0">
+              <a:latin typeface="华康少女文字W5(P)"/>
+            </a:endParaRPr>
+          </a:p>
+        </p:txBody>
+      </p:sp>
+      <p:sp>
+        <p:nvSpPr>
+          <p:cNvPr id="16" name="TextBox 6">
+            <a:extLst>
+              <a:ext uri="{FF2B5EF4-FFF2-40B4-BE49-F238E27FC236}">
+                <a16:creationId xmlns:a16="http://schemas.microsoft.com/office/drawing/2014/main" id="{D3826D44-8FB0-C3C1-9692-A5D52DD53E76}"/>
+              </a:ext>
+            </a:extLst>
+          </p:cNvPr>
+          <p:cNvSpPr txBox="1"/>
+          <p:nvPr/>
+        </p:nvSpPr>
+        <p:spPr>
+          <a:xfrm>
+            <a:off x="5611185" y="780570"/>
+            <a:ext cx="5760000" cy="883920"/>
+          </a:xfrm>
+          <a:prstGeom prst="rect">
+            <a:avLst/>
+          </a:prstGeom>
+          <a:noFill/>
+        </p:spPr>
+        <p:txBody>
+          <a:bodyPr wrap="none">
+            <a:noAutofit/>
+          </a:bodyPr>
+          <a:lstStyle/>
+          <a:p>
             <a:r>
               <a:rPr sz="4800">
                 <a:latin typeface="华康少女文字W5(P)"/>
               </a:rPr>
-              <a:t>的境界了</a:t>
-            </a:r>
-          </a:p>
-        </p:txBody>
-      </p:sp>
-      <p:sp>
-        <p:nvSpPr>
-          <p:cNvPr id="4" name="TextBox 3"/>
-          <p:cNvSpPr txBox="1"/>
-          <p:nvPr/>
-        </p:nvSpPr>
-        <p:spPr>
-          <a:xfrm>
-            <a:off x="914400" y="4831665"/>
-            <a:ext cx="9360000" cy="724814"/>
+              <a:t>她说</a:t>
+            </a:r>
+          </a:p>
+        </p:txBody>
+      </p:sp>
+      <p:sp>
+        <p:nvSpPr>
+          <p:cNvPr id="17" name="TextBox 7">
+            <a:extLst>
+              <a:ext uri="{FF2B5EF4-FFF2-40B4-BE49-F238E27FC236}">
+                <a16:creationId xmlns:a16="http://schemas.microsoft.com/office/drawing/2014/main" id="{A0263DF6-67D1-1FF4-C9D3-050909F348D4}"/>
+              </a:ext>
+            </a:extLst>
+          </p:cNvPr>
+          <p:cNvSpPr txBox="1"/>
+          <p:nvPr/>
+        </p:nvSpPr>
+        <p:spPr>
+          <a:xfrm>
+            <a:off x="5611185" y="-70244"/>
+            <a:ext cx="5760000" cy="724814"/>
           </a:xfrm>
           <a:prstGeom prst="rect">
             <a:avLst/>
@@ -3270,198 +3513,6 @@
               <a:rPr sz="3936">
                 <a:latin typeface="华康少女文字W5(P)"/>
               </a:rPr>
-              <a:t>不讲道理已经到了</a:t>
-            </a:r>
-          </a:p>
-        </p:txBody>
-      </p:sp>
-      <p:sp>
-        <p:nvSpPr>
-          <p:cNvPr id="5" name="TextBox 4"/>
-          <p:cNvSpPr txBox="1"/>
-          <p:nvPr/>
-        </p:nvSpPr>
-        <p:spPr>
-          <a:xfrm>
-            <a:off x="914400" y="4111317"/>
-            <a:ext cx="9360000" cy="594347"/>
-          </a:xfrm>
-          <a:prstGeom prst="rect">
-            <a:avLst/>
-          </a:prstGeom>
-          <a:noFill/>
-        </p:spPr>
-        <p:txBody>
-          <a:bodyPr wrap="none">
-            <a:noAutofit/>
-          </a:bodyPr>
-          <a:lstStyle/>
-          <a:p>
-            <a:r>
-              <a:rPr sz="3227">
-                <a:latin typeface="华康少女文字W5(P)"/>
-              </a:rPr>
-              <a:t>我们家里那个</a:t>
-            </a:r>
-          </a:p>
-        </p:txBody>
-      </p:sp>
-      <p:sp>
-        <p:nvSpPr>
-          <p:cNvPr id="6" name="TextBox 5"/>
-          <p:cNvSpPr txBox="1"/>
-          <p:nvPr/>
-        </p:nvSpPr>
-        <p:spPr>
-          <a:xfrm rot="5400000">
-            <a:off x="2619960" y="5654640"/>
-            <a:ext cx="9360000" cy="883920"/>
-          </a:xfrm>
-          <a:prstGeom prst="rect">
-            <a:avLst/>
-          </a:prstGeom>
-          <a:noFill/>
-        </p:spPr>
-        <p:txBody>
-          <a:bodyPr wrap="none">
-            <a:noAutofit/>
-          </a:bodyPr>
-          <a:lstStyle/>
-          <a:p>
-            <a:r>
-              <a:rPr sz="4800">
-                <a:latin typeface="华康少女文字W5(P)"/>
-              </a:rPr>
-              <a:t>谁占上风</a:t>
-            </a:r>
-          </a:p>
-        </p:txBody>
-      </p:sp>
-      <p:sp>
-        <p:nvSpPr>
-          <p:cNvPr id="7" name="TextBox 6"/>
-          <p:cNvSpPr txBox="1"/>
-          <p:nvPr/>
-        </p:nvSpPr>
-        <p:spPr>
-          <a:xfrm rot="5400000">
-            <a:off x="3424327" y="5734192"/>
-            <a:ext cx="9360000" cy="724814"/>
-          </a:xfrm>
-          <a:prstGeom prst="rect">
-            <a:avLst/>
-          </a:prstGeom>
-          <a:noFill/>
-        </p:spPr>
-        <p:txBody>
-          <a:bodyPr wrap="none">
-            <a:noAutofit/>
-          </a:bodyPr>
-          <a:lstStyle/>
-          <a:p>
-            <a:r>
-              <a:rPr sz="3936">
-                <a:latin typeface="华康少女文字W5(P)"/>
-              </a:rPr>
-              <a:t>谁</a:t>
-            </a:r>
-            <a:r>
-              <a:rPr sz="3936">
-                <a:latin typeface="文鼎霹雳体"/>
-              </a:rPr>
-              <a:t>不讲道理</a:t>
-            </a:r>
-          </a:p>
-        </p:txBody>
-      </p:sp>
-      <p:sp>
-        <p:nvSpPr>
-          <p:cNvPr id="8" name="TextBox 7"/>
-          <p:cNvSpPr txBox="1"/>
-          <p:nvPr/>
-        </p:nvSpPr>
-        <p:spPr>
-          <a:xfrm rot="5400000">
-            <a:off x="4083908" y="5799426"/>
-            <a:ext cx="9360000" cy="594347"/>
-          </a:xfrm>
-          <a:prstGeom prst="rect">
-            <a:avLst/>
-          </a:prstGeom>
-          <a:noFill/>
-        </p:spPr>
-        <p:txBody>
-          <a:bodyPr wrap="none">
-            <a:noAutofit/>
-          </a:bodyPr>
-          <a:lstStyle/>
-          <a:p>
-            <a:r>
-              <a:rPr sz="3227">
-                <a:latin typeface="华康少女文字W5(P)"/>
-              </a:rPr>
-              <a:t>结婚之后嘛</a:t>
-            </a:r>
-          </a:p>
-        </p:txBody>
-      </p:sp>
-      <p:sp>
-        <p:nvSpPr>
-          <p:cNvPr id="9" name="TextBox 8"/>
-          <p:cNvSpPr txBox="1"/>
-          <p:nvPr/>
-        </p:nvSpPr>
-        <p:spPr>
-          <a:xfrm>
-            <a:off x="9061082" y="5682479"/>
-            <a:ext cx="9360000" cy="883920"/>
-          </a:xfrm>
-          <a:prstGeom prst="rect">
-            <a:avLst/>
-          </a:prstGeom>
-          <a:noFill/>
-        </p:spPr>
-        <p:txBody>
-          <a:bodyPr wrap="none">
-            <a:noAutofit/>
-          </a:bodyPr>
-          <a:lstStyle/>
-          <a:p>
-            <a:r>
-              <a:rPr sz="4800">
-                <a:latin typeface="华康少女文字W5(P)"/>
-              </a:rPr>
-              <a:t>她说</a:t>
-            </a:r>
-          </a:p>
-        </p:txBody>
-      </p:sp>
-      <p:sp>
-        <p:nvSpPr>
-          <p:cNvPr id="10" name="TextBox 9"/>
-          <p:cNvSpPr txBox="1"/>
-          <p:nvPr/>
-        </p:nvSpPr>
-        <p:spPr>
-          <a:xfrm>
-            <a:off x="9061082" y="4831665"/>
-            <a:ext cx="9360000" cy="724814"/>
-          </a:xfrm>
-          <a:prstGeom prst="rect">
-            <a:avLst/>
-          </a:prstGeom>
-          <a:noFill/>
-        </p:spPr>
-        <p:txBody>
-          <a:bodyPr wrap="none">
-            <a:noAutofit/>
-          </a:bodyPr>
-          <a:lstStyle/>
-          <a:p>
-            <a:r>
-              <a:rPr sz="3936">
-                <a:latin typeface="华康少女文字W5(P)"/>
-              </a:rPr>
               <a:t>我觉得</a:t>
             </a:r>
           </a:p>
@@ -3469,59 +3520,74 @@
       </p:sp>
       <p:sp>
         <p:nvSpPr>
-          <p:cNvPr id="11" name="TextBox 10"/>
-          <p:cNvSpPr txBox="1"/>
-          <p:nvPr/>
-        </p:nvSpPr>
-        <p:spPr>
-          <a:xfrm>
-            <a:off x="9061082" y="4111317"/>
-            <a:ext cx="9360000" cy="594347"/>
-          </a:xfrm>
-          <a:prstGeom prst="rect">
-            <a:avLst/>
-          </a:prstGeom>
-          <a:noFill/>
-        </p:spPr>
-        <p:txBody>
-          <a:bodyPr wrap="none">
-            <a:noAutofit/>
-          </a:bodyPr>
-          <a:lstStyle/>
-          <a:p>
-            <a:r>
-              <a:rPr sz="3227">
+          <p:cNvPr id="18" name="TextBox 8">
+            <a:extLst>
+              <a:ext uri="{FF2B5EF4-FFF2-40B4-BE49-F238E27FC236}">
+                <a16:creationId xmlns:a16="http://schemas.microsoft.com/office/drawing/2014/main" id="{94718D60-5815-680A-CEFC-9571B78F1909}"/>
+              </a:ext>
+            </a:extLst>
+          </p:cNvPr>
+          <p:cNvSpPr txBox="1"/>
+          <p:nvPr/>
+        </p:nvSpPr>
+        <p:spPr>
+          <a:xfrm>
+            <a:off x="5611185" y="-790592"/>
+            <a:ext cx="5760000" cy="594347"/>
+          </a:xfrm>
+          <a:prstGeom prst="rect">
+            <a:avLst/>
+          </a:prstGeom>
+          <a:noFill/>
+        </p:spPr>
+        <p:txBody>
+          <a:bodyPr wrap="none">
+            <a:noAutofit/>
+          </a:bodyPr>
+          <a:lstStyle/>
+          <a:p>
+            <a:r>
+              <a:rPr sz="3227" dirty="0" err="1">
                 <a:latin typeface="华康少女文字W5(P)"/>
               </a:rPr>
               <a:t>讲得很对的</a:t>
             </a:r>
-          </a:p>
-        </p:txBody>
-      </p:sp>
-      <p:sp>
-        <p:nvSpPr>
-          <p:cNvPr id="12" name="TextBox 11"/>
-          <p:cNvSpPr txBox="1"/>
-          <p:nvPr/>
-        </p:nvSpPr>
-        <p:spPr>
-          <a:xfrm>
-            <a:off x="9061082" y="3497952"/>
-            <a:ext cx="9360000" cy="487365"/>
-          </a:xfrm>
-          <a:prstGeom prst="rect">
-            <a:avLst/>
-          </a:prstGeom>
-          <a:noFill/>
-        </p:spPr>
-        <p:txBody>
-          <a:bodyPr wrap="none">
-            <a:noAutofit/>
-          </a:bodyPr>
-          <a:lstStyle/>
-          <a:p>
-            <a:r>
-              <a:rPr sz="2646">
+            <a:endParaRPr sz="3227" dirty="0">
+              <a:latin typeface="华康少女文字W5(P)"/>
+            </a:endParaRPr>
+          </a:p>
+        </p:txBody>
+      </p:sp>
+      <p:sp>
+        <p:nvSpPr>
+          <p:cNvPr id="19" name="TextBox 9">
+            <a:extLst>
+              <a:ext uri="{FF2B5EF4-FFF2-40B4-BE49-F238E27FC236}">
+                <a16:creationId xmlns:a16="http://schemas.microsoft.com/office/drawing/2014/main" id="{275D41C1-9AA0-E23D-9DE6-7EAFE15D9F30}"/>
+              </a:ext>
+            </a:extLst>
+          </p:cNvPr>
+          <p:cNvSpPr txBox="1"/>
+          <p:nvPr/>
+        </p:nvSpPr>
+        <p:spPr>
+          <a:xfrm>
+            <a:off x="5611184" y="-1403957"/>
+            <a:ext cx="5760000" cy="487365"/>
+          </a:xfrm>
+          <a:prstGeom prst="rect">
+            <a:avLst/>
+          </a:prstGeom>
+          <a:noFill/>
+        </p:spPr>
+        <p:txBody>
+          <a:bodyPr wrap="none">
+            <a:noAutofit/>
+          </a:bodyPr>
+          <a:lstStyle/>
+          <a:p>
+            <a:r>
+              <a:rPr sz="2646" dirty="0" err="1">
                 <a:solidFill>
                   <a:srgbClr val="FF6B35"/>
                 </a:solidFill>
@@ -3530,11 +3596,14 @@
               <a:t>张爱玲</a:t>
             </a:r>
             <a:r>
-              <a:rPr sz="2646">
+              <a:rPr sz="2646" dirty="0" err="1">
                 <a:latin typeface="华康少女文字W5(P)"/>
               </a:rPr>
               <a:t>有一句话</a:t>
             </a:r>
+            <a:endParaRPr sz="2646" dirty="0">
+              <a:latin typeface="华康少女文字W5(P)"/>
+            </a:endParaRPr>
           </a:p>
         </p:txBody>
       </p:sp>
@@ -3547,7 +3616,7 @@
 </file>
 
 <file path=ppt/slides/slide11.xml><?xml version="1.0" encoding="utf-8"?>
-<p:sld xmlns:a="http://schemas.openxmlformats.org/drawingml/2006/main" xmlns:p="http://schemas.openxmlformats.org/presentationml/2006/main" xmlns:r="http://schemas.openxmlformats.org/officeDocument/2006/relationships">
+<p:sld xmlns:a="http://schemas.openxmlformats.org/drawingml/2006/main" xmlns:r="http://schemas.openxmlformats.org/officeDocument/2006/relationships" xmlns:p="http://schemas.openxmlformats.org/presentationml/2006/main">
   <p:cSld>
     <p:spTree>
       <p:nvGrpSpPr>
@@ -3555,7 +3624,14 @@
         <p:cNvGrpSpPr/>
         <p:nvPr/>
       </p:nvGrpSpPr>
-      <p:grpSpPr/>
+      <p:grpSpPr>
+        <a:xfrm>
+          <a:off x="0" y="0"/>
+          <a:ext cx="0" cy="0"/>
+          <a:chOff x="0" y="0"/>
+          <a:chExt cx="0" cy="0"/>
+        </a:xfrm>
+      </p:grpSpPr>
       <p:pic>
         <p:nvPicPr>
           <p:cNvPr id="2" name="Picture 1" descr="image.jpg"/>
@@ -3589,7 +3665,7 @@
         <p:spPr>
           <a:xfrm>
             <a:off x="914400" y="5682479"/>
-            <a:ext cx="9360000" cy="883920"/>
+            <a:ext cx="5760000" cy="883920"/>
           </a:xfrm>
           <a:prstGeom prst="rect">
             <a:avLst/>
@@ -3620,7 +3696,7 @@
         <p:spPr>
           <a:xfrm>
             <a:off x="914400" y="4831665"/>
-            <a:ext cx="9360000" cy="724814"/>
+            <a:ext cx="5760000" cy="724814"/>
           </a:xfrm>
           <a:prstGeom prst="rect">
             <a:avLst/>
@@ -3637,13 +3713,7 @@
               <a:rPr sz="3936">
                 <a:latin typeface="华康少女文字W5(P)"/>
               </a:rPr>
-              <a:t>最高</a:t>
-            </a:r>
-            <a:r>
-              <a:rPr sz="3936">
-                <a:latin typeface="华康少女文字W5(P)"/>
-              </a:rPr>
-              <a:t>的境界了</a:t>
+              <a:t>最高的境界了</a:t>
             </a:r>
           </a:p>
         </p:txBody>
@@ -3657,7 +3727,7 @@
         <p:spPr>
           <a:xfrm>
             <a:off x="914400" y="4111317"/>
-            <a:ext cx="9360000" cy="594347"/>
+            <a:ext cx="5760000" cy="594347"/>
           </a:xfrm>
           <a:prstGeom prst="rect">
             <a:avLst/>
@@ -3688,151 +3758,193 @@
         <p:spPr>
           <a:xfrm>
             <a:off x="914400" y="3497952"/>
-            <a:ext cx="9360000" cy="487365"/>
-          </a:xfrm>
-          <a:prstGeom prst="rect">
-            <a:avLst/>
-          </a:prstGeom>
-          <a:noFill/>
-        </p:spPr>
-        <p:txBody>
-          <a:bodyPr wrap="none">
-            <a:noAutofit/>
-          </a:bodyPr>
-          <a:lstStyle/>
-          <a:p>
-            <a:r>
-              <a:rPr sz="2646">
+            <a:ext cx="5760000" cy="487365"/>
+          </a:xfrm>
+          <a:prstGeom prst="rect">
+            <a:avLst/>
+          </a:prstGeom>
+          <a:noFill/>
+        </p:spPr>
+        <p:txBody>
+          <a:bodyPr wrap="none">
+            <a:noAutofit/>
+          </a:bodyPr>
+          <a:lstStyle/>
+          <a:p>
+            <a:r>
+              <a:rPr sz="2646" dirty="0" err="1">
                 <a:latin typeface="华康少女文字W5(P)"/>
               </a:rPr>
               <a:t>我们家里那个</a:t>
             </a:r>
-          </a:p>
-        </p:txBody>
-      </p:sp>
-      <p:sp>
-        <p:nvSpPr>
-          <p:cNvPr id="7" name="TextBox 6"/>
+            <a:endParaRPr sz="2646" dirty="0">
+              <a:latin typeface="华康少女文字W5(P)"/>
+            </a:endParaRPr>
+          </a:p>
+        </p:txBody>
+      </p:sp>
+      <p:sp>
+        <p:nvSpPr>
+          <p:cNvPr id="14" name="TextBox 3">
+            <a:extLst>
+              <a:ext uri="{FF2B5EF4-FFF2-40B4-BE49-F238E27FC236}">
+                <a16:creationId xmlns:a16="http://schemas.microsoft.com/office/drawing/2014/main" id="{128A34D3-7DBD-2986-DFD8-E382D2C9BAB5}"/>
+              </a:ext>
+            </a:extLst>
+          </p:cNvPr>
           <p:cNvSpPr txBox="1"/>
           <p:nvPr/>
         </p:nvSpPr>
         <p:spPr>
           <a:xfrm rot="5400000">
-            <a:off x="2619960" y="5654640"/>
-            <a:ext cx="9360000" cy="883920"/>
-          </a:xfrm>
-          <a:prstGeom prst="rect">
-            <a:avLst/>
-          </a:prstGeom>
-          <a:noFill/>
-        </p:spPr>
-        <p:txBody>
-          <a:bodyPr wrap="none">
-            <a:noAutofit/>
-          </a:bodyPr>
-          <a:lstStyle/>
-          <a:p>
-            <a:r>
-              <a:rPr sz="4800">
+            <a:off x="475364" y="3729434"/>
+            <a:ext cx="5760000" cy="883920"/>
+          </a:xfrm>
+          <a:prstGeom prst="rect">
+            <a:avLst/>
+          </a:prstGeom>
+          <a:noFill/>
+        </p:spPr>
+        <p:txBody>
+          <a:bodyPr wrap="none">
+            <a:noAutofit/>
+          </a:bodyPr>
+          <a:lstStyle/>
+          <a:p>
+            <a:r>
+              <a:rPr sz="4400" dirty="0" err="1">
                 <a:latin typeface="华康少女文字W5(P)"/>
               </a:rPr>
               <a:t>谁占上风</a:t>
             </a:r>
-          </a:p>
-        </p:txBody>
-      </p:sp>
-      <p:sp>
-        <p:nvSpPr>
-          <p:cNvPr id="8" name="TextBox 7"/>
+            <a:endParaRPr sz="4400" dirty="0">
+              <a:latin typeface="华康少女文字W5(P)"/>
+            </a:endParaRPr>
+          </a:p>
+        </p:txBody>
+      </p:sp>
+      <p:sp>
+        <p:nvSpPr>
+          <p:cNvPr id="15" name="TextBox 4">
+            <a:extLst>
+              <a:ext uri="{FF2B5EF4-FFF2-40B4-BE49-F238E27FC236}">
+                <a16:creationId xmlns:a16="http://schemas.microsoft.com/office/drawing/2014/main" id="{DC136954-08E1-D4D3-1534-4098F631E030}"/>
+              </a:ext>
+            </a:extLst>
+          </p:cNvPr>
           <p:cNvSpPr txBox="1"/>
           <p:nvPr/>
         </p:nvSpPr>
         <p:spPr>
           <a:xfrm rot="5400000">
-            <a:off x="3424327" y="5734192"/>
-            <a:ext cx="9360000" cy="724814"/>
-          </a:xfrm>
-          <a:prstGeom prst="rect">
-            <a:avLst/>
-          </a:prstGeom>
-          <a:noFill/>
-        </p:spPr>
-        <p:txBody>
-          <a:bodyPr wrap="none">
-            <a:noAutofit/>
-          </a:bodyPr>
-          <a:lstStyle/>
-          <a:p>
-            <a:r>
-              <a:rPr sz="3936">
+            <a:off x="1279731" y="3808986"/>
+            <a:ext cx="5760000" cy="724814"/>
+          </a:xfrm>
+          <a:prstGeom prst="rect">
+            <a:avLst/>
+          </a:prstGeom>
+          <a:noFill/>
+        </p:spPr>
+        <p:txBody>
+          <a:bodyPr wrap="none">
+            <a:noAutofit/>
+          </a:bodyPr>
+          <a:lstStyle/>
+          <a:p>
+            <a:r>
+              <a:rPr sz="3600" dirty="0" err="1">
                 <a:latin typeface="华康少女文字W5(P)"/>
               </a:rPr>
               <a:t>谁</a:t>
             </a:r>
             <a:r>
-              <a:rPr sz="3936">
+              <a:rPr sz="3600" dirty="0" err="1">
+                <a:solidFill>
+                  <a:srgbClr val="FF0000"/>
+                </a:solidFill>
                 <a:latin typeface="文鼎霹雳体"/>
               </a:rPr>
               <a:t>不讲道理</a:t>
             </a:r>
-          </a:p>
-        </p:txBody>
-      </p:sp>
-      <p:sp>
-        <p:nvSpPr>
-          <p:cNvPr id="9" name="TextBox 8"/>
+            <a:endParaRPr sz="3600" dirty="0">
+              <a:solidFill>
+                <a:srgbClr val="FF0000"/>
+              </a:solidFill>
+              <a:latin typeface="文鼎霹雳体"/>
+            </a:endParaRPr>
+          </a:p>
+        </p:txBody>
+      </p:sp>
+      <p:sp>
+        <p:nvSpPr>
+          <p:cNvPr id="16" name="TextBox 5">
+            <a:extLst>
+              <a:ext uri="{FF2B5EF4-FFF2-40B4-BE49-F238E27FC236}">
+                <a16:creationId xmlns:a16="http://schemas.microsoft.com/office/drawing/2014/main" id="{06EE16C9-AF83-4909-1F89-EB7907B9D897}"/>
+              </a:ext>
+            </a:extLst>
+          </p:cNvPr>
           <p:cNvSpPr txBox="1"/>
           <p:nvPr/>
         </p:nvSpPr>
         <p:spPr>
           <a:xfrm rot="5400000">
-            <a:off x="4083908" y="5799426"/>
-            <a:ext cx="9360000" cy="594347"/>
-          </a:xfrm>
-          <a:prstGeom prst="rect">
-            <a:avLst/>
-          </a:prstGeom>
-          <a:noFill/>
-        </p:spPr>
-        <p:txBody>
-          <a:bodyPr wrap="none">
-            <a:noAutofit/>
-          </a:bodyPr>
-          <a:lstStyle/>
-          <a:p>
-            <a:r>
-              <a:rPr sz="3227">
+            <a:off x="1939312" y="3874220"/>
+            <a:ext cx="5760000" cy="594347"/>
+          </a:xfrm>
+          <a:prstGeom prst="rect">
+            <a:avLst/>
+          </a:prstGeom>
+          <a:noFill/>
+        </p:spPr>
+        <p:txBody>
+          <a:bodyPr wrap="none">
+            <a:noAutofit/>
+          </a:bodyPr>
+          <a:lstStyle/>
+          <a:p>
+            <a:r>
+              <a:rPr sz="3200" dirty="0" err="1">
                 <a:latin typeface="华康少女文字W5(P)"/>
               </a:rPr>
               <a:t>结婚之后嘛</a:t>
             </a:r>
-          </a:p>
-        </p:txBody>
-      </p:sp>
-      <p:sp>
-        <p:nvSpPr>
-          <p:cNvPr id="10" name="TextBox 9"/>
-          <p:cNvSpPr txBox="1"/>
-          <p:nvPr/>
-        </p:nvSpPr>
-        <p:spPr>
-          <a:xfrm>
-            <a:off x="9061082" y="5682479"/>
-            <a:ext cx="9360000" cy="883920"/>
-          </a:xfrm>
-          <a:prstGeom prst="rect">
-            <a:avLst/>
-          </a:prstGeom>
-          <a:noFill/>
-        </p:spPr>
-        <p:txBody>
-          <a:bodyPr wrap="none">
-            <a:noAutofit/>
-          </a:bodyPr>
-          <a:lstStyle/>
-          <a:p>
-            <a:r>
-              <a:rPr sz="4800">
+            <a:endParaRPr sz="3200" dirty="0">
+              <a:latin typeface="华康少女文字W5(P)"/>
+            </a:endParaRPr>
+          </a:p>
+        </p:txBody>
+      </p:sp>
+      <p:sp>
+        <p:nvSpPr>
+          <p:cNvPr id="17" name="TextBox 6">
+            <a:extLst>
+              <a:ext uri="{FF2B5EF4-FFF2-40B4-BE49-F238E27FC236}">
+                <a16:creationId xmlns:a16="http://schemas.microsoft.com/office/drawing/2014/main" id="{A1682E79-39D5-3A07-1DD2-F41DA305DD81}"/>
+              </a:ext>
+            </a:extLst>
+          </p:cNvPr>
+          <p:cNvSpPr txBox="1"/>
+          <p:nvPr/>
+        </p:nvSpPr>
+        <p:spPr>
+          <a:xfrm>
+            <a:off x="4985546" y="515877"/>
+            <a:ext cx="5760000" cy="883920"/>
+          </a:xfrm>
+          <a:prstGeom prst="rect">
+            <a:avLst/>
+          </a:prstGeom>
+          <a:noFill/>
+        </p:spPr>
+        <p:txBody>
+          <a:bodyPr wrap="none">
+            <a:noAutofit/>
+          </a:bodyPr>
+          <a:lstStyle/>
+          <a:p>
+            <a:r>
+              <a:rPr sz="4400">
                 <a:latin typeface="华康少女文字W5(P)"/>
               </a:rPr>
               <a:t>她说</a:t>
@@ -3842,28 +3954,34 @@
       </p:sp>
       <p:sp>
         <p:nvSpPr>
-          <p:cNvPr id="11" name="TextBox 10"/>
-          <p:cNvSpPr txBox="1"/>
-          <p:nvPr/>
-        </p:nvSpPr>
-        <p:spPr>
-          <a:xfrm>
-            <a:off x="9061082" y="4831665"/>
-            <a:ext cx="9360000" cy="724814"/>
-          </a:xfrm>
-          <a:prstGeom prst="rect">
-            <a:avLst/>
-          </a:prstGeom>
-          <a:noFill/>
-        </p:spPr>
-        <p:txBody>
-          <a:bodyPr wrap="none">
-            <a:noAutofit/>
-          </a:bodyPr>
-          <a:lstStyle/>
-          <a:p>
-            <a:r>
-              <a:rPr sz="3936">
+          <p:cNvPr id="18" name="TextBox 7">
+            <a:extLst>
+              <a:ext uri="{FF2B5EF4-FFF2-40B4-BE49-F238E27FC236}">
+                <a16:creationId xmlns:a16="http://schemas.microsoft.com/office/drawing/2014/main" id="{5B3C4CBC-04F3-A5CC-A01C-FBA4C21354B6}"/>
+              </a:ext>
+            </a:extLst>
+          </p:cNvPr>
+          <p:cNvSpPr txBox="1"/>
+          <p:nvPr/>
+        </p:nvSpPr>
+        <p:spPr>
+          <a:xfrm>
+            <a:off x="4985546" y="-334937"/>
+            <a:ext cx="5760000" cy="724814"/>
+          </a:xfrm>
+          <a:prstGeom prst="rect">
+            <a:avLst/>
+          </a:prstGeom>
+          <a:noFill/>
+        </p:spPr>
+        <p:txBody>
+          <a:bodyPr wrap="none">
+            <a:noAutofit/>
+          </a:bodyPr>
+          <a:lstStyle/>
+          <a:p>
+            <a:r>
+              <a:rPr sz="3600">
                 <a:latin typeface="华康少女文字W5(P)"/>
               </a:rPr>
               <a:t>我觉得</a:t>
@@ -3873,59 +3991,74 @@
       </p:sp>
       <p:sp>
         <p:nvSpPr>
-          <p:cNvPr id="12" name="TextBox 11"/>
-          <p:cNvSpPr txBox="1"/>
-          <p:nvPr/>
-        </p:nvSpPr>
-        <p:spPr>
-          <a:xfrm>
-            <a:off x="9061082" y="4111317"/>
-            <a:ext cx="9360000" cy="594347"/>
-          </a:xfrm>
-          <a:prstGeom prst="rect">
-            <a:avLst/>
-          </a:prstGeom>
-          <a:noFill/>
-        </p:spPr>
-        <p:txBody>
-          <a:bodyPr wrap="none">
-            <a:noAutofit/>
-          </a:bodyPr>
-          <a:lstStyle/>
-          <a:p>
-            <a:r>
-              <a:rPr sz="3227">
+          <p:cNvPr id="19" name="TextBox 8">
+            <a:extLst>
+              <a:ext uri="{FF2B5EF4-FFF2-40B4-BE49-F238E27FC236}">
+                <a16:creationId xmlns:a16="http://schemas.microsoft.com/office/drawing/2014/main" id="{E9E76D1D-A4C3-53D6-8AB4-CF1270E3DBF0}"/>
+              </a:ext>
+            </a:extLst>
+          </p:cNvPr>
+          <p:cNvSpPr txBox="1"/>
+          <p:nvPr/>
+        </p:nvSpPr>
+        <p:spPr>
+          <a:xfrm>
+            <a:off x="4985546" y="-1055285"/>
+            <a:ext cx="5760000" cy="594347"/>
+          </a:xfrm>
+          <a:prstGeom prst="rect">
+            <a:avLst/>
+          </a:prstGeom>
+          <a:noFill/>
+        </p:spPr>
+        <p:txBody>
+          <a:bodyPr wrap="none">
+            <a:noAutofit/>
+          </a:bodyPr>
+          <a:lstStyle/>
+          <a:p>
+            <a:r>
+              <a:rPr sz="3200" dirty="0" err="1">
                 <a:latin typeface="华康少女文字W5(P)"/>
               </a:rPr>
               <a:t>讲得很对的</a:t>
             </a:r>
-          </a:p>
-        </p:txBody>
-      </p:sp>
-      <p:sp>
-        <p:nvSpPr>
-          <p:cNvPr id="13" name="TextBox 12"/>
-          <p:cNvSpPr txBox="1"/>
-          <p:nvPr/>
-        </p:nvSpPr>
-        <p:spPr>
-          <a:xfrm>
-            <a:off x="9061082" y="3497952"/>
-            <a:ext cx="9360000" cy="487365"/>
-          </a:xfrm>
-          <a:prstGeom prst="rect">
-            <a:avLst/>
-          </a:prstGeom>
-          <a:noFill/>
-        </p:spPr>
-        <p:txBody>
-          <a:bodyPr wrap="none">
-            <a:noAutofit/>
-          </a:bodyPr>
-          <a:lstStyle/>
-          <a:p>
-            <a:r>
-              <a:rPr sz="2646">
+            <a:endParaRPr sz="3200" dirty="0">
+              <a:latin typeface="华康少女文字W5(P)"/>
+            </a:endParaRPr>
+          </a:p>
+        </p:txBody>
+      </p:sp>
+      <p:sp>
+        <p:nvSpPr>
+          <p:cNvPr id="20" name="TextBox 9">
+            <a:extLst>
+              <a:ext uri="{FF2B5EF4-FFF2-40B4-BE49-F238E27FC236}">
+                <a16:creationId xmlns:a16="http://schemas.microsoft.com/office/drawing/2014/main" id="{0DE2A9B6-120A-8F6C-EDAE-9A22407C81F7}"/>
+              </a:ext>
+            </a:extLst>
+          </p:cNvPr>
+          <p:cNvSpPr txBox="1"/>
+          <p:nvPr/>
+        </p:nvSpPr>
+        <p:spPr>
+          <a:xfrm>
+            <a:off x="4985545" y="-1668650"/>
+            <a:ext cx="5760000" cy="487365"/>
+          </a:xfrm>
+          <a:prstGeom prst="rect">
+            <a:avLst/>
+          </a:prstGeom>
+          <a:noFill/>
+        </p:spPr>
+        <p:txBody>
+          <a:bodyPr wrap="none">
+            <a:noAutofit/>
+          </a:bodyPr>
+          <a:lstStyle/>
+          <a:p>
+            <a:r>
+              <a:rPr sz="2400" dirty="0" err="1">
                 <a:solidFill>
                   <a:srgbClr val="FF6B35"/>
                 </a:solidFill>
@@ -3934,11 +4067,14 @@
               <a:t>张爱玲</a:t>
             </a:r>
             <a:r>
-              <a:rPr sz="2646">
+              <a:rPr sz="2400" dirty="0" err="1">
                 <a:latin typeface="华康少女文字W5(P)"/>
               </a:rPr>
               <a:t>有一句话</a:t>
             </a:r>
+            <a:endParaRPr sz="2400" dirty="0">
+              <a:latin typeface="华康少女文字W5(P)"/>
+            </a:endParaRPr>
           </a:p>
         </p:txBody>
       </p:sp>
@@ -3951,7 +4087,7 @@
 </file>
 
 <file path=ppt/slides/slide12.xml><?xml version="1.0" encoding="utf-8"?>
-<p:sld xmlns:a="http://schemas.openxmlformats.org/drawingml/2006/main" xmlns:p="http://schemas.openxmlformats.org/presentationml/2006/main" xmlns:r="http://schemas.openxmlformats.org/officeDocument/2006/relationships">
+<p:sld xmlns:a="http://schemas.openxmlformats.org/drawingml/2006/main" xmlns:r="http://schemas.openxmlformats.org/officeDocument/2006/relationships" xmlns:p="http://schemas.openxmlformats.org/presentationml/2006/main">
   <p:cSld>
     <p:spTree>
       <p:nvGrpSpPr>
@@ -3959,7 +4095,14 @@
         <p:cNvGrpSpPr/>
         <p:nvPr/>
       </p:nvGrpSpPr>
-      <p:grpSpPr/>
+      <p:grpSpPr>
+        <a:xfrm>
+          <a:off x="0" y="0"/>
+          <a:ext cx="0" cy="0"/>
+          <a:chOff x="0" y="0"/>
+          <a:chExt cx="0" cy="0"/>
+        </a:xfrm>
+      </p:grpSpPr>
       <p:pic>
         <p:nvPicPr>
           <p:cNvPr id="2" name="Picture 1" descr="image.jpg"/>
@@ -3993,7 +4136,47 @@
         <p:spPr>
           <a:xfrm>
             <a:off x="914400" y="5682479"/>
-            <a:ext cx="9360000" cy="883920"/>
+            <a:ext cx="5760000" cy="883920"/>
+          </a:xfrm>
+          <a:prstGeom prst="rect">
+            <a:avLst/>
+          </a:prstGeom>
+          <a:noFill/>
+        </p:spPr>
+        <p:txBody>
+          <a:bodyPr wrap="none">
+            <a:noAutofit/>
+          </a:bodyPr>
+          <a:lstStyle/>
+          <a:p>
+            <a:r>
+              <a:rPr sz="4800" dirty="0" err="1">
+                <a:latin typeface="华康少女文字W5(P)"/>
+              </a:rPr>
+              <a:t>他就是拿一双</a:t>
+            </a:r>
+            <a:endParaRPr sz="4800" dirty="0">
+              <a:latin typeface="华康少女文字W5(P)"/>
+            </a:endParaRPr>
+          </a:p>
+        </p:txBody>
+      </p:sp>
+      <p:sp>
+        <p:nvSpPr>
+          <p:cNvPr id="15" name="TextBox 2">
+            <a:extLst>
+              <a:ext uri="{FF2B5EF4-FFF2-40B4-BE49-F238E27FC236}">
+                <a16:creationId xmlns:a16="http://schemas.microsoft.com/office/drawing/2014/main" id="{00B3CBB6-7083-67EC-3F37-55D3F048BA63}"/>
+              </a:ext>
+            </a:extLst>
+          </p:cNvPr>
+          <p:cNvSpPr txBox="1"/>
+          <p:nvPr/>
+        </p:nvSpPr>
+        <p:spPr>
+          <a:xfrm rot="16200000">
+            <a:off x="-2259743" y="2545440"/>
+            <a:ext cx="5760000" cy="883920"/>
           </a:xfrm>
           <a:prstGeom prst="rect">
             <a:avLst/>
@@ -4010,370 +4193,260 @@
               <a:rPr sz="4800">
                 <a:latin typeface="华康少女文字W5(P)"/>
               </a:rPr>
-              <a:t>他就是拿一双</a:t>
-            </a:r>
-          </a:p>
-        </p:txBody>
-      </p:sp>
-      <p:sp>
-        <p:nvSpPr>
-          <p:cNvPr id="4" name="TextBox 3"/>
+              <a:t>他连话都不讲</a:t>
+            </a:r>
+          </a:p>
+        </p:txBody>
+      </p:sp>
+      <p:sp>
+        <p:nvSpPr>
+          <p:cNvPr id="16" name="TextBox 3">
+            <a:extLst>
+              <a:ext uri="{FF2B5EF4-FFF2-40B4-BE49-F238E27FC236}">
+                <a16:creationId xmlns:a16="http://schemas.microsoft.com/office/drawing/2014/main" id="{94EBAA75-F146-CA30-C6AB-E4758A84DDEB}"/>
+              </a:ext>
+            </a:extLst>
+          </p:cNvPr>
           <p:cNvSpPr txBox="1"/>
           <p:nvPr/>
         </p:nvSpPr>
         <p:spPr>
           <a:xfrm rot="16200000">
-            <a:off x="-5121960" y="5654640"/>
-            <a:ext cx="9360000" cy="883920"/>
-          </a:xfrm>
-          <a:prstGeom prst="rect">
-            <a:avLst/>
-          </a:prstGeom>
-          <a:noFill/>
-        </p:spPr>
-        <p:txBody>
-          <a:bodyPr wrap="none">
-            <a:noAutofit/>
-          </a:bodyPr>
-          <a:lstStyle/>
-          <a:p>
-            <a:r>
-              <a:rPr sz="4800">
-                <a:latin typeface="华康少女文字W5(P)"/>
-              </a:rPr>
-              <a:t>他连话都不讲</a:t>
-            </a:r>
-          </a:p>
-        </p:txBody>
-      </p:sp>
-      <p:sp>
-        <p:nvSpPr>
-          <p:cNvPr id="5" name="TextBox 4"/>
+            <a:off x="-3075225" y="2630029"/>
+            <a:ext cx="5760000" cy="724814"/>
+          </a:xfrm>
+          <a:prstGeom prst="rect">
+            <a:avLst/>
+          </a:prstGeom>
+          <a:noFill/>
+        </p:spPr>
+        <p:txBody>
+          <a:bodyPr wrap="none">
+            <a:noAutofit/>
+          </a:bodyPr>
+          <a:lstStyle/>
+          <a:p>
+            <a:r>
+              <a:rPr sz="3936" dirty="0" err="1">
+                <a:latin typeface="华康少女文字W5(P)"/>
+              </a:rPr>
+              <a:t>最高的境界了</a:t>
+            </a:r>
+            <a:endParaRPr sz="3936" dirty="0">
+              <a:latin typeface="华康少女文字W5(P)"/>
+            </a:endParaRPr>
+          </a:p>
+        </p:txBody>
+      </p:sp>
+      <p:sp>
+        <p:nvSpPr>
+          <p:cNvPr id="17" name="TextBox 4">
+            <a:extLst>
+              <a:ext uri="{FF2B5EF4-FFF2-40B4-BE49-F238E27FC236}">
+                <a16:creationId xmlns:a16="http://schemas.microsoft.com/office/drawing/2014/main" id="{9C7B8255-A7A4-B9B3-D7C5-94EB197E9632}"/>
+              </a:ext>
+            </a:extLst>
+          </p:cNvPr>
           <p:cNvSpPr txBox="1"/>
           <p:nvPr/>
         </p:nvSpPr>
         <p:spPr>
           <a:xfrm rot="16200000">
-            <a:off x="-5926327" y="5734192"/>
-            <a:ext cx="9360000" cy="724814"/>
-          </a:xfrm>
-          <a:prstGeom prst="rect">
-            <a:avLst/>
-          </a:prstGeom>
-          <a:noFill/>
-        </p:spPr>
-        <p:txBody>
-          <a:bodyPr wrap="none">
-            <a:noAutofit/>
-          </a:bodyPr>
-          <a:lstStyle/>
-          <a:p>
-            <a:r>
-              <a:rPr sz="3936">
-                <a:latin typeface="华康少女文字W5(P)"/>
-              </a:rPr>
-              <a:t>最高</a:t>
-            </a:r>
-            <a:r>
-              <a:rPr sz="3936">
-                <a:latin typeface="华康少女文字W5(P)"/>
-              </a:rPr>
-              <a:t>的境界了</a:t>
-            </a:r>
-          </a:p>
-        </p:txBody>
-      </p:sp>
-      <p:sp>
-        <p:nvSpPr>
-          <p:cNvPr id="6" name="TextBox 5"/>
+            <a:off x="-3734806" y="2695263"/>
+            <a:ext cx="5760000" cy="594347"/>
+          </a:xfrm>
+          <a:prstGeom prst="rect">
+            <a:avLst/>
+          </a:prstGeom>
+          <a:noFill/>
+        </p:spPr>
+        <p:txBody>
+          <a:bodyPr wrap="none">
+            <a:noAutofit/>
+          </a:bodyPr>
+          <a:lstStyle/>
+          <a:p>
+            <a:r>
+              <a:rPr sz="3227" dirty="0" err="1">
+                <a:latin typeface="华康少女文字W5(P)"/>
+              </a:rPr>
+              <a:t>不讲道理已经到了</a:t>
+            </a:r>
+            <a:endParaRPr sz="3227" dirty="0">
+              <a:latin typeface="华康少女文字W5(P)"/>
+            </a:endParaRPr>
+          </a:p>
+        </p:txBody>
+      </p:sp>
+      <p:sp>
+        <p:nvSpPr>
+          <p:cNvPr id="18" name="TextBox 5">
+            <a:extLst>
+              <a:ext uri="{FF2B5EF4-FFF2-40B4-BE49-F238E27FC236}">
+                <a16:creationId xmlns:a16="http://schemas.microsoft.com/office/drawing/2014/main" id="{5B71AF67-A200-3728-0A40-4CCDDCE27B44}"/>
+              </a:ext>
+            </a:extLst>
+          </p:cNvPr>
           <p:cNvSpPr txBox="1"/>
           <p:nvPr/>
         </p:nvSpPr>
         <p:spPr>
           <a:xfrm rot="16200000">
-            <a:off x="-6585908" y="5799426"/>
-            <a:ext cx="9360000" cy="594347"/>
-          </a:xfrm>
-          <a:prstGeom prst="rect">
-            <a:avLst/>
-          </a:prstGeom>
-          <a:noFill/>
-        </p:spPr>
-        <p:txBody>
-          <a:bodyPr wrap="none">
-            <a:noAutofit/>
-          </a:bodyPr>
-          <a:lstStyle/>
-          <a:p>
-            <a:r>
-              <a:rPr sz="3227">
-                <a:latin typeface="华康少女文字W5(P)"/>
-              </a:rPr>
-              <a:t>不讲道理已经到了</a:t>
-            </a:r>
-          </a:p>
-        </p:txBody>
-      </p:sp>
-      <p:sp>
-        <p:nvSpPr>
-          <p:cNvPr id="7" name="TextBox 6"/>
-          <p:cNvSpPr txBox="1"/>
-          <p:nvPr/>
-        </p:nvSpPr>
-        <p:spPr>
-          <a:xfrm rot="16200000">
-            <a:off x="-7126764" y="5852917"/>
-            <a:ext cx="9360000" cy="487365"/>
-          </a:xfrm>
-          <a:prstGeom prst="rect">
-            <a:avLst/>
-          </a:prstGeom>
-          <a:noFill/>
-        </p:spPr>
-        <p:txBody>
-          <a:bodyPr wrap="none">
-            <a:noAutofit/>
-          </a:bodyPr>
-          <a:lstStyle/>
-          <a:p>
-            <a:r>
-              <a:rPr sz="2646">
+            <a:off x="-4275663" y="2748754"/>
+            <a:ext cx="5760000" cy="487365"/>
+          </a:xfrm>
+          <a:prstGeom prst="rect">
+            <a:avLst/>
+          </a:prstGeom>
+          <a:noFill/>
+        </p:spPr>
+        <p:txBody>
+          <a:bodyPr wrap="none">
+            <a:noAutofit/>
+          </a:bodyPr>
+          <a:lstStyle/>
+          <a:p>
+            <a:r>
+              <a:rPr sz="2646" dirty="0" err="1">
                 <a:latin typeface="华康少女文字W5(P)"/>
               </a:rPr>
               <a:t>我们家里那个</a:t>
             </a:r>
-          </a:p>
-        </p:txBody>
-      </p:sp>
-      <p:sp>
-        <p:nvSpPr>
-          <p:cNvPr id="8" name="TextBox 7"/>
-          <p:cNvSpPr txBox="1"/>
-          <p:nvPr/>
-        </p:nvSpPr>
-        <p:spPr>
-          <a:xfrm>
-            <a:off x="-12050447" y="5682479"/>
-            <a:ext cx="9360000" cy="883920"/>
-          </a:xfrm>
-          <a:prstGeom prst="rect">
-            <a:avLst/>
-          </a:prstGeom>
-          <a:noFill/>
-        </p:spPr>
-        <p:txBody>
-          <a:bodyPr wrap="none">
-            <a:noAutofit/>
-          </a:bodyPr>
-          <a:lstStyle/>
-          <a:p>
-            <a:r>
-              <a:rPr sz="4800">
+            <a:endParaRPr sz="2646" dirty="0">
+              <a:latin typeface="华康少女文字W5(P)"/>
+            </a:endParaRPr>
+          </a:p>
+        </p:txBody>
+      </p:sp>
+      <p:sp>
+        <p:nvSpPr>
+          <p:cNvPr id="19" name="TextBox 3">
+            <a:extLst>
+              <a:ext uri="{FF2B5EF4-FFF2-40B4-BE49-F238E27FC236}">
+                <a16:creationId xmlns:a16="http://schemas.microsoft.com/office/drawing/2014/main" id="{4853C02E-44FE-12AD-7032-9730824FF076}"/>
+              </a:ext>
+            </a:extLst>
+          </p:cNvPr>
+          <p:cNvSpPr txBox="1"/>
+          <p:nvPr/>
+        </p:nvSpPr>
+        <p:spPr>
+          <a:xfrm>
+            <a:off x="-3893059" y="2910477"/>
+            <a:ext cx="5760000" cy="883920"/>
+          </a:xfrm>
+          <a:prstGeom prst="rect">
+            <a:avLst/>
+          </a:prstGeom>
+          <a:noFill/>
+        </p:spPr>
+        <p:txBody>
+          <a:bodyPr wrap="none">
+            <a:noAutofit/>
+          </a:bodyPr>
+          <a:lstStyle/>
+          <a:p>
+            <a:r>
+              <a:rPr sz="4400" dirty="0" err="1">
                 <a:latin typeface="华康少女文字W5(P)"/>
               </a:rPr>
               <a:t>谁占上风</a:t>
             </a:r>
-          </a:p>
-        </p:txBody>
-      </p:sp>
-      <p:sp>
-        <p:nvSpPr>
-          <p:cNvPr id="9" name="TextBox 8"/>
-          <p:cNvSpPr txBox="1"/>
-          <p:nvPr/>
-        </p:nvSpPr>
-        <p:spPr>
-          <a:xfrm>
-            <a:off x="-12050447" y="4831665"/>
-            <a:ext cx="9360000" cy="724814"/>
-          </a:xfrm>
-          <a:prstGeom prst="rect">
-            <a:avLst/>
-          </a:prstGeom>
-          <a:noFill/>
-        </p:spPr>
-        <p:txBody>
-          <a:bodyPr wrap="none">
-            <a:noAutofit/>
-          </a:bodyPr>
-          <a:lstStyle/>
-          <a:p>
-            <a:r>
-              <a:rPr sz="3936">
+            <a:endParaRPr sz="4400" dirty="0">
+              <a:latin typeface="华康少女文字W5(P)"/>
+            </a:endParaRPr>
+          </a:p>
+        </p:txBody>
+      </p:sp>
+      <p:sp>
+        <p:nvSpPr>
+          <p:cNvPr id="20" name="TextBox 4">
+            <a:extLst>
+              <a:ext uri="{FF2B5EF4-FFF2-40B4-BE49-F238E27FC236}">
+                <a16:creationId xmlns:a16="http://schemas.microsoft.com/office/drawing/2014/main" id="{035C6DBF-2813-9242-573A-7035CD5637B2}"/>
+              </a:ext>
+            </a:extLst>
+          </p:cNvPr>
+          <p:cNvSpPr txBox="1"/>
+          <p:nvPr/>
+        </p:nvSpPr>
+        <p:spPr>
+          <a:xfrm>
+            <a:off x="-3893059" y="2185663"/>
+            <a:ext cx="5760000" cy="724814"/>
+          </a:xfrm>
+          <a:prstGeom prst="rect">
+            <a:avLst/>
+          </a:prstGeom>
+          <a:noFill/>
+        </p:spPr>
+        <p:txBody>
+          <a:bodyPr wrap="none">
+            <a:noAutofit/>
+          </a:bodyPr>
+          <a:lstStyle/>
+          <a:p>
+            <a:r>
+              <a:rPr sz="3600" dirty="0" err="1">
                 <a:latin typeface="华康少女文字W5(P)"/>
               </a:rPr>
               <a:t>谁</a:t>
             </a:r>
             <a:r>
-              <a:rPr sz="3936">
+              <a:rPr sz="3600" dirty="0" err="1">
+                <a:solidFill>
+                  <a:srgbClr val="FF0000"/>
+                </a:solidFill>
                 <a:latin typeface="文鼎霹雳体"/>
               </a:rPr>
               <a:t>不讲道理</a:t>
             </a:r>
-          </a:p>
-        </p:txBody>
-      </p:sp>
-      <p:sp>
-        <p:nvSpPr>
-          <p:cNvPr id="10" name="TextBox 9"/>
-          <p:cNvSpPr txBox="1"/>
-          <p:nvPr/>
-        </p:nvSpPr>
-        <p:spPr>
-          <a:xfrm>
-            <a:off x="-12050447" y="4111317"/>
-            <a:ext cx="9360000" cy="594347"/>
-          </a:xfrm>
-          <a:prstGeom prst="rect">
-            <a:avLst/>
-          </a:prstGeom>
-          <a:noFill/>
-        </p:spPr>
-        <p:txBody>
-          <a:bodyPr wrap="none">
-            <a:noAutofit/>
-          </a:bodyPr>
-          <a:lstStyle/>
-          <a:p>
-            <a:r>
-              <a:rPr sz="3227">
+            <a:endParaRPr sz="3600" dirty="0">
+              <a:solidFill>
+                <a:srgbClr val="FF0000"/>
+              </a:solidFill>
+              <a:latin typeface="文鼎霹雳体"/>
+            </a:endParaRPr>
+          </a:p>
+        </p:txBody>
+      </p:sp>
+      <p:sp>
+        <p:nvSpPr>
+          <p:cNvPr id="21" name="TextBox 5">
+            <a:extLst>
+              <a:ext uri="{FF2B5EF4-FFF2-40B4-BE49-F238E27FC236}">
+                <a16:creationId xmlns:a16="http://schemas.microsoft.com/office/drawing/2014/main" id="{540D4A1E-AEA3-6FBD-7DD8-1416A4D3AC82}"/>
+              </a:ext>
+            </a:extLst>
+          </p:cNvPr>
+          <p:cNvSpPr txBox="1"/>
+          <p:nvPr/>
+        </p:nvSpPr>
+        <p:spPr>
+          <a:xfrm>
+            <a:off x="-3898231" y="1591316"/>
+            <a:ext cx="5760000" cy="594347"/>
+          </a:xfrm>
+          <a:prstGeom prst="rect">
+            <a:avLst/>
+          </a:prstGeom>
+          <a:noFill/>
+        </p:spPr>
+        <p:txBody>
+          <a:bodyPr wrap="none">
+            <a:noAutofit/>
+          </a:bodyPr>
+          <a:lstStyle/>
+          <a:p>
+            <a:r>
+              <a:rPr sz="3200" dirty="0" err="1">
                 <a:latin typeface="华康少女文字W5(P)"/>
               </a:rPr>
               <a:t>结婚之后嘛</a:t>
             </a:r>
-          </a:p>
-        </p:txBody>
-      </p:sp>
-      <p:sp>
-        <p:nvSpPr>
-          <p:cNvPr id="11" name="TextBox 10"/>
-          <p:cNvSpPr txBox="1"/>
-          <p:nvPr/>
-        </p:nvSpPr>
-        <p:spPr>
-          <a:xfrm rot="16200000">
-            <a:off x="-17172407" y="5654640"/>
-            <a:ext cx="9360000" cy="883920"/>
-          </a:xfrm>
-          <a:prstGeom prst="rect">
-            <a:avLst/>
-          </a:prstGeom>
-          <a:noFill/>
-        </p:spPr>
-        <p:txBody>
-          <a:bodyPr wrap="none">
-            <a:noAutofit/>
-          </a:bodyPr>
-          <a:lstStyle/>
-          <a:p>
-            <a:r>
-              <a:rPr sz="4800">
-                <a:latin typeface="华康少女文字W5(P)"/>
-              </a:rPr>
-              <a:t>她说</a:t>
-            </a:r>
-          </a:p>
-        </p:txBody>
-      </p:sp>
-      <p:sp>
-        <p:nvSpPr>
-          <p:cNvPr id="12" name="TextBox 11"/>
-          <p:cNvSpPr txBox="1"/>
-          <p:nvPr/>
-        </p:nvSpPr>
-        <p:spPr>
-          <a:xfrm rot="16200000">
-            <a:off x="-17976774" y="5734192"/>
-            <a:ext cx="9360000" cy="724814"/>
-          </a:xfrm>
-          <a:prstGeom prst="rect">
-            <a:avLst/>
-          </a:prstGeom>
-          <a:noFill/>
-        </p:spPr>
-        <p:txBody>
-          <a:bodyPr wrap="none">
-            <a:noAutofit/>
-          </a:bodyPr>
-          <a:lstStyle/>
-          <a:p>
-            <a:r>
-              <a:rPr sz="3936">
-                <a:latin typeface="华康少女文字W5(P)"/>
-              </a:rPr>
-              <a:t>我觉得</a:t>
-            </a:r>
-          </a:p>
-        </p:txBody>
-      </p:sp>
-      <p:sp>
-        <p:nvSpPr>
-          <p:cNvPr id="13" name="TextBox 12"/>
-          <p:cNvSpPr txBox="1"/>
-          <p:nvPr/>
-        </p:nvSpPr>
-        <p:spPr>
-          <a:xfrm rot="16200000">
-            <a:off x="-18636355" y="5799426"/>
-            <a:ext cx="9360000" cy="594347"/>
-          </a:xfrm>
-          <a:prstGeom prst="rect">
-            <a:avLst/>
-          </a:prstGeom>
-          <a:noFill/>
-        </p:spPr>
-        <p:txBody>
-          <a:bodyPr wrap="none">
-            <a:noAutofit/>
-          </a:bodyPr>
-          <a:lstStyle/>
-          <a:p>
-            <a:r>
-              <a:rPr sz="3227">
-                <a:latin typeface="华康少女文字W5(P)"/>
-              </a:rPr>
-              <a:t>讲得很对的</a:t>
-            </a:r>
-          </a:p>
-        </p:txBody>
-      </p:sp>
-      <p:sp>
-        <p:nvSpPr>
-          <p:cNvPr id="14" name="TextBox 13"/>
-          <p:cNvSpPr txBox="1"/>
-          <p:nvPr/>
-        </p:nvSpPr>
-        <p:spPr>
-          <a:xfrm rot="16200000">
-            <a:off x="-19177212" y="5852917"/>
-            <a:ext cx="9360000" cy="487365"/>
-          </a:xfrm>
-          <a:prstGeom prst="rect">
-            <a:avLst/>
-          </a:prstGeom>
-          <a:noFill/>
-        </p:spPr>
-        <p:txBody>
-          <a:bodyPr wrap="none">
-            <a:noAutofit/>
-          </a:bodyPr>
-          <a:lstStyle/>
-          <a:p>
-            <a:r>
-              <a:rPr sz="2646">
-                <a:solidFill>
-                  <a:srgbClr val="FF6B35"/>
-                </a:solidFill>
-                <a:latin typeface="华文行楷"/>
-              </a:rPr>
-              <a:t>张爱玲</a:t>
-            </a:r>
-            <a:r>
-              <a:rPr sz="2646">
-                <a:latin typeface="华康少女文字W5(P)"/>
-              </a:rPr>
-              <a:t>有一句话</a:t>
-            </a:r>
+            <a:endParaRPr sz="3200" dirty="0">
+              <a:latin typeface="华康少女文字W5(P)"/>
+            </a:endParaRPr>
           </a:p>
         </p:txBody>
       </p:sp>
@@ -4386,7 +4459,7 @@
 </file>
 
 <file path=ppt/slides/slide13.xml><?xml version="1.0" encoding="utf-8"?>
-<p:sld xmlns:a="http://schemas.openxmlformats.org/drawingml/2006/main" xmlns:p="http://schemas.openxmlformats.org/presentationml/2006/main" xmlns:r="http://schemas.openxmlformats.org/officeDocument/2006/relationships">
+<p:sld xmlns:a="http://schemas.openxmlformats.org/drawingml/2006/main" xmlns:r="http://schemas.openxmlformats.org/officeDocument/2006/relationships" xmlns:p="http://schemas.openxmlformats.org/presentationml/2006/main">
   <p:cSld>
     <p:spTree>
       <p:nvGrpSpPr>
@@ -4394,7 +4467,14 @@
         <p:cNvGrpSpPr/>
         <p:nvPr/>
       </p:nvGrpSpPr>
-      <p:grpSpPr/>
+      <p:grpSpPr>
+        <a:xfrm>
+          <a:off x="0" y="0"/>
+          <a:ext cx="0" cy="0"/>
+          <a:chOff x="0" y="0"/>
+          <a:chExt cx="0" cy="0"/>
+        </a:xfrm>
+      </p:grpSpPr>
       <p:pic>
         <p:nvPicPr>
           <p:cNvPr id="2" name="Picture 1" descr="image.jpg"/>
@@ -4428,7 +4508,81 @@
         <p:spPr>
           <a:xfrm>
             <a:off x="914400" y="5682479"/>
-            <a:ext cx="9360000" cy="883920"/>
+            <a:ext cx="5760000" cy="883920"/>
+          </a:xfrm>
+          <a:prstGeom prst="rect">
+            <a:avLst/>
+          </a:prstGeom>
+          <a:noFill/>
+        </p:spPr>
+        <p:txBody>
+          <a:bodyPr wrap="none">
+            <a:noAutofit/>
+          </a:bodyPr>
+          <a:lstStyle/>
+          <a:p>
+            <a:r>
+              <a:rPr sz="4800" dirty="0" err="1">
+                <a:latin typeface="华康少女文字W5(P)"/>
+              </a:rPr>
+              <a:t>很忧郁的眼睛看着你</a:t>
+            </a:r>
+            <a:endParaRPr sz="4800" dirty="0">
+              <a:latin typeface="华康少女文字W5(P)"/>
+            </a:endParaRPr>
+          </a:p>
+        </p:txBody>
+      </p:sp>
+      <p:sp>
+        <p:nvSpPr>
+          <p:cNvPr id="4" name="TextBox 3"/>
+          <p:cNvSpPr txBox="1"/>
+          <p:nvPr/>
+        </p:nvSpPr>
+        <p:spPr>
+          <a:xfrm>
+            <a:off x="914400" y="4831665"/>
+            <a:ext cx="5760000" cy="724814"/>
+          </a:xfrm>
+          <a:prstGeom prst="rect">
+            <a:avLst/>
+          </a:prstGeom>
+          <a:noFill/>
+        </p:spPr>
+        <p:txBody>
+          <a:bodyPr wrap="none">
+            <a:noAutofit/>
+          </a:bodyPr>
+          <a:lstStyle/>
+          <a:p>
+            <a:r>
+              <a:rPr sz="3936" dirty="0" err="1">
+                <a:latin typeface="华康少女文字W5(P)"/>
+              </a:rPr>
+              <a:t>他就是拿一双</a:t>
+            </a:r>
+            <a:endParaRPr sz="3936" dirty="0">
+              <a:latin typeface="华康少女文字W5(P)"/>
+            </a:endParaRPr>
+          </a:p>
+        </p:txBody>
+      </p:sp>
+      <p:sp>
+        <p:nvSpPr>
+          <p:cNvPr id="16" name="TextBox 2">
+            <a:extLst>
+              <a:ext uri="{FF2B5EF4-FFF2-40B4-BE49-F238E27FC236}">
+                <a16:creationId xmlns:a16="http://schemas.microsoft.com/office/drawing/2014/main" id="{B71A864B-3EA5-1F17-939B-B76D13C9B5EF}"/>
+              </a:ext>
+            </a:extLst>
+          </p:cNvPr>
+          <p:cNvSpPr txBox="1"/>
+          <p:nvPr/>
+        </p:nvSpPr>
+        <p:spPr>
+          <a:xfrm rot="16200000">
+            <a:off x="-2235680" y="1582916"/>
+            <a:ext cx="5760000" cy="883920"/>
           </a:xfrm>
           <a:prstGeom prst="rect">
             <a:avLst/>
@@ -4445,401 +4599,260 @@
               <a:rPr sz="4800">
                 <a:latin typeface="华康少女文字W5(P)"/>
               </a:rPr>
-              <a:t>很忧郁的眼睛看着你</a:t>
-            </a:r>
-          </a:p>
-        </p:txBody>
-      </p:sp>
-      <p:sp>
-        <p:nvSpPr>
-          <p:cNvPr id="4" name="TextBox 3"/>
-          <p:cNvSpPr txBox="1"/>
-          <p:nvPr/>
-        </p:nvSpPr>
-        <p:spPr>
-          <a:xfrm>
-            <a:off x="914400" y="4831665"/>
-            <a:ext cx="9360000" cy="724814"/>
-          </a:xfrm>
-          <a:prstGeom prst="rect">
-            <a:avLst/>
-          </a:prstGeom>
-          <a:noFill/>
-        </p:spPr>
-        <p:txBody>
-          <a:bodyPr wrap="none">
-            <a:noAutofit/>
-          </a:bodyPr>
-          <a:lstStyle/>
-          <a:p>
-            <a:r>
-              <a:rPr sz="3936">
-                <a:latin typeface="华康少女文字W5(P)"/>
-              </a:rPr>
-              <a:t>他就是拿一双</a:t>
-            </a:r>
-          </a:p>
-        </p:txBody>
-      </p:sp>
-      <p:sp>
-        <p:nvSpPr>
-          <p:cNvPr id="5" name="TextBox 4"/>
+              <a:t>他连话都不讲</a:t>
+            </a:r>
+          </a:p>
+        </p:txBody>
+      </p:sp>
+      <p:sp>
+        <p:nvSpPr>
+          <p:cNvPr id="17" name="TextBox 3">
+            <a:extLst>
+              <a:ext uri="{FF2B5EF4-FFF2-40B4-BE49-F238E27FC236}">
+                <a16:creationId xmlns:a16="http://schemas.microsoft.com/office/drawing/2014/main" id="{D76D6B28-0B49-51F4-BCDD-A4D8784A8E6C}"/>
+              </a:ext>
+            </a:extLst>
+          </p:cNvPr>
           <p:cNvSpPr txBox="1"/>
           <p:nvPr/>
         </p:nvSpPr>
         <p:spPr>
           <a:xfrm rot="16200000">
-            <a:off x="-5121960" y="5654640"/>
-            <a:ext cx="9360000" cy="883920"/>
-          </a:xfrm>
-          <a:prstGeom prst="rect">
-            <a:avLst/>
-          </a:prstGeom>
-          <a:noFill/>
-        </p:spPr>
-        <p:txBody>
-          <a:bodyPr wrap="none">
-            <a:noAutofit/>
-          </a:bodyPr>
-          <a:lstStyle/>
-          <a:p>
-            <a:r>
-              <a:rPr sz="4800">
-                <a:latin typeface="华康少女文字W5(P)"/>
-              </a:rPr>
-              <a:t>他连话都不讲</a:t>
-            </a:r>
-          </a:p>
-        </p:txBody>
-      </p:sp>
-      <p:sp>
-        <p:nvSpPr>
-          <p:cNvPr id="6" name="TextBox 5"/>
+            <a:off x="-3051162" y="1667505"/>
+            <a:ext cx="5760000" cy="724814"/>
+          </a:xfrm>
+          <a:prstGeom prst="rect">
+            <a:avLst/>
+          </a:prstGeom>
+          <a:noFill/>
+        </p:spPr>
+        <p:txBody>
+          <a:bodyPr wrap="none">
+            <a:noAutofit/>
+          </a:bodyPr>
+          <a:lstStyle/>
+          <a:p>
+            <a:r>
+              <a:rPr sz="3936" dirty="0" err="1">
+                <a:latin typeface="华康少女文字W5(P)"/>
+              </a:rPr>
+              <a:t>最高的境界了</a:t>
+            </a:r>
+            <a:endParaRPr sz="3936" dirty="0">
+              <a:latin typeface="华康少女文字W5(P)"/>
+            </a:endParaRPr>
+          </a:p>
+        </p:txBody>
+      </p:sp>
+      <p:sp>
+        <p:nvSpPr>
+          <p:cNvPr id="18" name="TextBox 4">
+            <a:extLst>
+              <a:ext uri="{FF2B5EF4-FFF2-40B4-BE49-F238E27FC236}">
+                <a16:creationId xmlns:a16="http://schemas.microsoft.com/office/drawing/2014/main" id="{02BFE870-6293-3011-F4C3-478EBEB19C54}"/>
+              </a:ext>
+            </a:extLst>
+          </p:cNvPr>
           <p:cNvSpPr txBox="1"/>
           <p:nvPr/>
         </p:nvSpPr>
         <p:spPr>
           <a:xfrm rot="16200000">
-            <a:off x="-5926327" y="5734192"/>
-            <a:ext cx="9360000" cy="724814"/>
-          </a:xfrm>
-          <a:prstGeom prst="rect">
-            <a:avLst/>
-          </a:prstGeom>
-          <a:noFill/>
-        </p:spPr>
-        <p:txBody>
-          <a:bodyPr wrap="none">
-            <a:noAutofit/>
-          </a:bodyPr>
-          <a:lstStyle/>
-          <a:p>
-            <a:r>
-              <a:rPr sz="3936">
-                <a:latin typeface="华康少女文字W5(P)"/>
-              </a:rPr>
-              <a:t>最高</a:t>
-            </a:r>
-            <a:r>
-              <a:rPr sz="3936">
-                <a:latin typeface="华康少女文字W5(P)"/>
-              </a:rPr>
-              <a:t>的境界了</a:t>
-            </a:r>
-          </a:p>
-        </p:txBody>
-      </p:sp>
-      <p:sp>
-        <p:nvSpPr>
-          <p:cNvPr id="7" name="TextBox 6"/>
+            <a:off x="-3710743" y="1732739"/>
+            <a:ext cx="5760000" cy="594347"/>
+          </a:xfrm>
+          <a:prstGeom prst="rect">
+            <a:avLst/>
+          </a:prstGeom>
+          <a:noFill/>
+        </p:spPr>
+        <p:txBody>
+          <a:bodyPr wrap="none">
+            <a:noAutofit/>
+          </a:bodyPr>
+          <a:lstStyle/>
+          <a:p>
+            <a:r>
+              <a:rPr sz="3227" dirty="0" err="1">
+                <a:latin typeface="华康少女文字W5(P)"/>
+              </a:rPr>
+              <a:t>不讲道理已经到了</a:t>
+            </a:r>
+            <a:endParaRPr sz="3227" dirty="0">
+              <a:latin typeface="华康少女文字W5(P)"/>
+            </a:endParaRPr>
+          </a:p>
+        </p:txBody>
+      </p:sp>
+      <p:sp>
+        <p:nvSpPr>
+          <p:cNvPr id="19" name="TextBox 5">
+            <a:extLst>
+              <a:ext uri="{FF2B5EF4-FFF2-40B4-BE49-F238E27FC236}">
+                <a16:creationId xmlns:a16="http://schemas.microsoft.com/office/drawing/2014/main" id="{11281BB2-6C68-3747-FCD4-0A490465A292}"/>
+              </a:ext>
+            </a:extLst>
+          </p:cNvPr>
           <p:cNvSpPr txBox="1"/>
           <p:nvPr/>
         </p:nvSpPr>
         <p:spPr>
           <a:xfrm rot="16200000">
-            <a:off x="-6585908" y="5799426"/>
-            <a:ext cx="9360000" cy="594347"/>
-          </a:xfrm>
-          <a:prstGeom prst="rect">
-            <a:avLst/>
-          </a:prstGeom>
-          <a:noFill/>
-        </p:spPr>
-        <p:txBody>
-          <a:bodyPr wrap="none">
-            <a:noAutofit/>
-          </a:bodyPr>
-          <a:lstStyle/>
-          <a:p>
-            <a:r>
-              <a:rPr sz="3227">
-                <a:latin typeface="华康少女文字W5(P)"/>
-              </a:rPr>
-              <a:t>不讲道理已经到了</a:t>
-            </a:r>
-          </a:p>
-        </p:txBody>
-      </p:sp>
-      <p:sp>
-        <p:nvSpPr>
-          <p:cNvPr id="8" name="TextBox 7"/>
-          <p:cNvSpPr txBox="1"/>
-          <p:nvPr/>
-        </p:nvSpPr>
-        <p:spPr>
-          <a:xfrm rot="16200000">
-            <a:off x="-7126764" y="5852917"/>
-            <a:ext cx="9360000" cy="487365"/>
-          </a:xfrm>
-          <a:prstGeom prst="rect">
-            <a:avLst/>
-          </a:prstGeom>
-          <a:noFill/>
-        </p:spPr>
-        <p:txBody>
-          <a:bodyPr wrap="none">
-            <a:noAutofit/>
-          </a:bodyPr>
-          <a:lstStyle/>
-          <a:p>
-            <a:r>
-              <a:rPr sz="2646">
+            <a:off x="-4251600" y="1786230"/>
+            <a:ext cx="5760000" cy="487365"/>
+          </a:xfrm>
+          <a:prstGeom prst="rect">
+            <a:avLst/>
+          </a:prstGeom>
+          <a:noFill/>
+        </p:spPr>
+        <p:txBody>
+          <a:bodyPr wrap="none">
+            <a:noAutofit/>
+          </a:bodyPr>
+          <a:lstStyle/>
+          <a:p>
+            <a:r>
+              <a:rPr sz="2646" dirty="0" err="1">
                 <a:latin typeface="华康少女文字W5(P)"/>
               </a:rPr>
               <a:t>我们家里那个</a:t>
             </a:r>
-          </a:p>
-        </p:txBody>
-      </p:sp>
-      <p:sp>
-        <p:nvSpPr>
-          <p:cNvPr id="9" name="TextBox 8"/>
-          <p:cNvSpPr txBox="1"/>
-          <p:nvPr/>
-        </p:nvSpPr>
-        <p:spPr>
-          <a:xfrm>
-            <a:off x="-12050447" y="5682479"/>
-            <a:ext cx="9360000" cy="883920"/>
-          </a:xfrm>
-          <a:prstGeom prst="rect">
-            <a:avLst/>
-          </a:prstGeom>
-          <a:noFill/>
-        </p:spPr>
-        <p:txBody>
-          <a:bodyPr wrap="none">
-            <a:noAutofit/>
-          </a:bodyPr>
-          <a:lstStyle/>
-          <a:p>
-            <a:r>
-              <a:rPr sz="4800">
+            <a:endParaRPr sz="2646" dirty="0">
+              <a:latin typeface="华康少女文字W5(P)"/>
+            </a:endParaRPr>
+          </a:p>
+        </p:txBody>
+      </p:sp>
+      <p:sp>
+        <p:nvSpPr>
+          <p:cNvPr id="20" name="TextBox 3">
+            <a:extLst>
+              <a:ext uri="{FF2B5EF4-FFF2-40B4-BE49-F238E27FC236}">
+                <a16:creationId xmlns:a16="http://schemas.microsoft.com/office/drawing/2014/main" id="{81C34876-8C67-031E-2240-0A2352ABE1FC}"/>
+              </a:ext>
+            </a:extLst>
+          </p:cNvPr>
+          <p:cNvSpPr txBox="1"/>
+          <p:nvPr/>
+        </p:nvSpPr>
+        <p:spPr>
+          <a:xfrm>
+            <a:off x="-3868996" y="1947953"/>
+            <a:ext cx="5760000" cy="883920"/>
+          </a:xfrm>
+          <a:prstGeom prst="rect">
+            <a:avLst/>
+          </a:prstGeom>
+          <a:noFill/>
+        </p:spPr>
+        <p:txBody>
+          <a:bodyPr wrap="none">
+            <a:noAutofit/>
+          </a:bodyPr>
+          <a:lstStyle/>
+          <a:p>
+            <a:r>
+              <a:rPr sz="4400" dirty="0" err="1">
                 <a:latin typeface="华康少女文字W5(P)"/>
               </a:rPr>
               <a:t>谁占上风</a:t>
             </a:r>
-          </a:p>
-        </p:txBody>
-      </p:sp>
-      <p:sp>
-        <p:nvSpPr>
-          <p:cNvPr id="10" name="TextBox 9"/>
-          <p:cNvSpPr txBox="1"/>
-          <p:nvPr/>
-        </p:nvSpPr>
-        <p:spPr>
-          <a:xfrm>
-            <a:off x="-12050447" y="4831665"/>
-            <a:ext cx="9360000" cy="724814"/>
-          </a:xfrm>
-          <a:prstGeom prst="rect">
-            <a:avLst/>
-          </a:prstGeom>
-          <a:noFill/>
-        </p:spPr>
-        <p:txBody>
-          <a:bodyPr wrap="none">
-            <a:noAutofit/>
-          </a:bodyPr>
-          <a:lstStyle/>
-          <a:p>
-            <a:r>
-              <a:rPr sz="3936">
+            <a:endParaRPr sz="4400" dirty="0">
+              <a:latin typeface="华康少女文字W5(P)"/>
+            </a:endParaRPr>
+          </a:p>
+        </p:txBody>
+      </p:sp>
+      <p:sp>
+        <p:nvSpPr>
+          <p:cNvPr id="21" name="TextBox 4">
+            <a:extLst>
+              <a:ext uri="{FF2B5EF4-FFF2-40B4-BE49-F238E27FC236}">
+                <a16:creationId xmlns:a16="http://schemas.microsoft.com/office/drawing/2014/main" id="{825F07D2-C978-3DD8-E68D-7C0A1D406481}"/>
+              </a:ext>
+            </a:extLst>
+          </p:cNvPr>
+          <p:cNvSpPr txBox="1"/>
+          <p:nvPr/>
+        </p:nvSpPr>
+        <p:spPr>
+          <a:xfrm>
+            <a:off x="-3868996" y="1223139"/>
+            <a:ext cx="5760000" cy="724814"/>
+          </a:xfrm>
+          <a:prstGeom prst="rect">
+            <a:avLst/>
+          </a:prstGeom>
+          <a:noFill/>
+        </p:spPr>
+        <p:txBody>
+          <a:bodyPr wrap="none">
+            <a:noAutofit/>
+          </a:bodyPr>
+          <a:lstStyle/>
+          <a:p>
+            <a:r>
+              <a:rPr sz="3600" dirty="0" err="1">
                 <a:latin typeface="华康少女文字W5(P)"/>
               </a:rPr>
               <a:t>谁</a:t>
             </a:r>
             <a:r>
-              <a:rPr sz="3936">
+              <a:rPr sz="3600" dirty="0" err="1">
+                <a:solidFill>
+                  <a:srgbClr val="FF0000"/>
+                </a:solidFill>
                 <a:latin typeface="文鼎霹雳体"/>
               </a:rPr>
               <a:t>不讲道理</a:t>
             </a:r>
-          </a:p>
-        </p:txBody>
-      </p:sp>
-      <p:sp>
-        <p:nvSpPr>
-          <p:cNvPr id="11" name="TextBox 10"/>
-          <p:cNvSpPr txBox="1"/>
-          <p:nvPr/>
-        </p:nvSpPr>
-        <p:spPr>
-          <a:xfrm>
-            <a:off x="-12050447" y="4111317"/>
-            <a:ext cx="9360000" cy="594347"/>
-          </a:xfrm>
-          <a:prstGeom prst="rect">
-            <a:avLst/>
-          </a:prstGeom>
-          <a:noFill/>
-        </p:spPr>
-        <p:txBody>
-          <a:bodyPr wrap="none">
-            <a:noAutofit/>
-          </a:bodyPr>
-          <a:lstStyle/>
-          <a:p>
-            <a:r>
-              <a:rPr sz="3227">
+            <a:endParaRPr sz="3600" dirty="0">
+              <a:solidFill>
+                <a:srgbClr val="FF0000"/>
+              </a:solidFill>
+              <a:latin typeface="文鼎霹雳体"/>
+            </a:endParaRPr>
+          </a:p>
+        </p:txBody>
+      </p:sp>
+      <p:sp>
+        <p:nvSpPr>
+          <p:cNvPr id="22" name="TextBox 5">
+            <a:extLst>
+              <a:ext uri="{FF2B5EF4-FFF2-40B4-BE49-F238E27FC236}">
+                <a16:creationId xmlns:a16="http://schemas.microsoft.com/office/drawing/2014/main" id="{67C49F96-F95C-6C74-9FEA-D9997BE059FE}"/>
+              </a:ext>
+            </a:extLst>
+          </p:cNvPr>
+          <p:cNvSpPr txBox="1"/>
+          <p:nvPr/>
+        </p:nvSpPr>
+        <p:spPr>
+          <a:xfrm>
+            <a:off x="-3874168" y="628792"/>
+            <a:ext cx="5760000" cy="594347"/>
+          </a:xfrm>
+          <a:prstGeom prst="rect">
+            <a:avLst/>
+          </a:prstGeom>
+          <a:noFill/>
+        </p:spPr>
+        <p:txBody>
+          <a:bodyPr wrap="none">
+            <a:noAutofit/>
+          </a:bodyPr>
+          <a:lstStyle/>
+          <a:p>
+            <a:r>
+              <a:rPr sz="3200" dirty="0" err="1">
                 <a:latin typeface="华康少女文字W5(P)"/>
               </a:rPr>
               <a:t>结婚之后嘛</a:t>
             </a:r>
-          </a:p>
-        </p:txBody>
-      </p:sp>
-      <p:sp>
-        <p:nvSpPr>
-          <p:cNvPr id="12" name="TextBox 11"/>
-          <p:cNvSpPr txBox="1"/>
-          <p:nvPr/>
-        </p:nvSpPr>
-        <p:spPr>
-          <a:xfrm rot="16200000">
-            <a:off x="-17172407" y="5654640"/>
-            <a:ext cx="9360000" cy="883920"/>
-          </a:xfrm>
-          <a:prstGeom prst="rect">
-            <a:avLst/>
-          </a:prstGeom>
-          <a:noFill/>
-        </p:spPr>
-        <p:txBody>
-          <a:bodyPr wrap="none">
-            <a:noAutofit/>
-          </a:bodyPr>
-          <a:lstStyle/>
-          <a:p>
-            <a:r>
-              <a:rPr sz="4800">
-                <a:latin typeface="华康少女文字W5(P)"/>
-              </a:rPr>
-              <a:t>她说</a:t>
-            </a:r>
-          </a:p>
-        </p:txBody>
-      </p:sp>
-      <p:sp>
-        <p:nvSpPr>
-          <p:cNvPr id="13" name="TextBox 12"/>
-          <p:cNvSpPr txBox="1"/>
-          <p:nvPr/>
-        </p:nvSpPr>
-        <p:spPr>
-          <a:xfrm rot="16200000">
-            <a:off x="-17976774" y="5734192"/>
-            <a:ext cx="9360000" cy="724814"/>
-          </a:xfrm>
-          <a:prstGeom prst="rect">
-            <a:avLst/>
-          </a:prstGeom>
-          <a:noFill/>
-        </p:spPr>
-        <p:txBody>
-          <a:bodyPr wrap="none">
-            <a:noAutofit/>
-          </a:bodyPr>
-          <a:lstStyle/>
-          <a:p>
-            <a:r>
-              <a:rPr sz="3936">
-                <a:latin typeface="华康少女文字W5(P)"/>
-              </a:rPr>
-              <a:t>我觉得</a:t>
-            </a:r>
-          </a:p>
-        </p:txBody>
-      </p:sp>
-      <p:sp>
-        <p:nvSpPr>
-          <p:cNvPr id="14" name="TextBox 13"/>
-          <p:cNvSpPr txBox="1"/>
-          <p:nvPr/>
-        </p:nvSpPr>
-        <p:spPr>
-          <a:xfrm rot="16200000">
-            <a:off x="-18636355" y="5799426"/>
-            <a:ext cx="9360000" cy="594347"/>
-          </a:xfrm>
-          <a:prstGeom prst="rect">
-            <a:avLst/>
-          </a:prstGeom>
-          <a:noFill/>
-        </p:spPr>
-        <p:txBody>
-          <a:bodyPr wrap="none">
-            <a:noAutofit/>
-          </a:bodyPr>
-          <a:lstStyle/>
-          <a:p>
-            <a:r>
-              <a:rPr sz="3227">
-                <a:latin typeface="华康少女文字W5(P)"/>
-              </a:rPr>
-              <a:t>讲得很对的</a:t>
-            </a:r>
-          </a:p>
-        </p:txBody>
-      </p:sp>
-      <p:sp>
-        <p:nvSpPr>
-          <p:cNvPr id="15" name="TextBox 14"/>
-          <p:cNvSpPr txBox="1"/>
-          <p:nvPr/>
-        </p:nvSpPr>
-        <p:spPr>
-          <a:xfrm rot="16200000">
-            <a:off x="-19177212" y="5852917"/>
-            <a:ext cx="9360000" cy="487365"/>
-          </a:xfrm>
-          <a:prstGeom prst="rect">
-            <a:avLst/>
-          </a:prstGeom>
-          <a:noFill/>
-        </p:spPr>
-        <p:txBody>
-          <a:bodyPr wrap="none">
-            <a:noAutofit/>
-          </a:bodyPr>
-          <a:lstStyle/>
-          <a:p>
-            <a:r>
-              <a:rPr sz="2646">
-                <a:solidFill>
-                  <a:srgbClr val="FF6B35"/>
-                </a:solidFill>
-                <a:latin typeface="华文行楷"/>
-              </a:rPr>
-              <a:t>张爱玲</a:t>
-            </a:r>
-            <a:r>
-              <a:rPr sz="2646">
-                <a:latin typeface="华康少女文字W5(P)"/>
-              </a:rPr>
-              <a:t>有一句话</a:t>
-            </a:r>
+            <a:endParaRPr sz="3200" dirty="0">
+              <a:latin typeface="华康少女文字W5(P)"/>
+            </a:endParaRPr>
           </a:p>
         </p:txBody>
       </p:sp>
@@ -4852,7 +4865,7 @@
 </file>
 
 <file path=ppt/slides/slide14.xml><?xml version="1.0" encoding="utf-8"?>
-<p:sld xmlns:a="http://schemas.openxmlformats.org/drawingml/2006/main" xmlns:p="http://schemas.openxmlformats.org/presentationml/2006/main" xmlns:r="http://schemas.openxmlformats.org/officeDocument/2006/relationships">
+<p:sld xmlns:a="http://schemas.openxmlformats.org/drawingml/2006/main" xmlns:r="http://schemas.openxmlformats.org/officeDocument/2006/relationships" xmlns:p="http://schemas.openxmlformats.org/presentationml/2006/main">
   <p:cSld>
     <p:spTree>
       <p:nvGrpSpPr>
@@ -4860,7 +4873,14 @@
         <p:cNvGrpSpPr/>
         <p:nvPr/>
       </p:nvGrpSpPr>
-      <p:grpSpPr/>
+      <p:grpSpPr>
+        <a:xfrm>
+          <a:off x="0" y="0"/>
+          <a:ext cx="0" cy="0"/>
+          <a:chOff x="0" y="0"/>
+          <a:chExt cx="0" cy="0"/>
+        </a:xfrm>
+      </p:grpSpPr>
       <p:pic>
         <p:nvPicPr>
           <p:cNvPr id="2" name="Picture 1" descr="image.jpg"/>
@@ -4894,7 +4914,132 @@
         <p:spPr>
           <a:xfrm>
             <a:off x="914400" y="5682479"/>
-            <a:ext cx="9360000" cy="883920"/>
+            <a:ext cx="5760000" cy="883920"/>
+          </a:xfrm>
+          <a:prstGeom prst="rect">
+            <a:avLst/>
+          </a:prstGeom>
+          <a:noFill/>
+        </p:spPr>
+        <p:txBody>
+          <a:bodyPr wrap="none">
+            <a:noAutofit/>
+          </a:bodyPr>
+          <a:lstStyle/>
+          <a:p>
+            <a:r>
+              <a:rPr sz="4800" dirty="0" err="1">
+                <a:latin typeface="华康少女文字W5(P)"/>
+              </a:rPr>
+              <a:t>直到你煮一碗</a:t>
+            </a:r>
+            <a:r>
+              <a:rPr sz="6600" dirty="0" err="1">
+                <a:solidFill>
+                  <a:schemeClr val="accent6">
+                    <a:lumMod val="75000"/>
+                  </a:schemeClr>
+                </a:solidFill>
+                <a:latin typeface="华康少女文字W5(P)"/>
+              </a:rPr>
+              <a:t>面</a:t>
+            </a:r>
+            <a:r>
+              <a:rPr sz="4800" dirty="0" err="1">
+                <a:latin typeface="华康少女文字W5(P)"/>
+              </a:rPr>
+              <a:t>给他</a:t>
+            </a:r>
+            <a:endParaRPr sz="4800" dirty="0">
+              <a:latin typeface="华康少女文字W5(P)"/>
+            </a:endParaRPr>
+          </a:p>
+        </p:txBody>
+      </p:sp>
+      <p:sp>
+        <p:nvSpPr>
+          <p:cNvPr id="4" name="TextBox 3"/>
+          <p:cNvSpPr txBox="1"/>
+          <p:nvPr/>
+        </p:nvSpPr>
+        <p:spPr>
+          <a:xfrm>
+            <a:off x="914400" y="4831665"/>
+            <a:ext cx="5760000" cy="724814"/>
+          </a:xfrm>
+          <a:prstGeom prst="rect">
+            <a:avLst/>
+          </a:prstGeom>
+          <a:noFill/>
+        </p:spPr>
+        <p:txBody>
+          <a:bodyPr wrap="none">
+            <a:noAutofit/>
+          </a:bodyPr>
+          <a:lstStyle/>
+          <a:p>
+            <a:r>
+              <a:rPr sz="3936" dirty="0" err="1">
+                <a:latin typeface="华康少女文字W5(P)"/>
+              </a:rPr>
+              <a:t>很忧郁的眼睛看着你</a:t>
+            </a:r>
+            <a:endParaRPr sz="3936" dirty="0">
+              <a:latin typeface="华康少女文字W5(P)"/>
+            </a:endParaRPr>
+          </a:p>
+        </p:txBody>
+      </p:sp>
+      <p:sp>
+        <p:nvSpPr>
+          <p:cNvPr id="5" name="TextBox 4"/>
+          <p:cNvSpPr txBox="1"/>
+          <p:nvPr/>
+        </p:nvSpPr>
+        <p:spPr>
+          <a:xfrm>
+            <a:off x="914400" y="4111317"/>
+            <a:ext cx="5760000" cy="594347"/>
+          </a:xfrm>
+          <a:prstGeom prst="rect">
+            <a:avLst/>
+          </a:prstGeom>
+          <a:noFill/>
+        </p:spPr>
+        <p:txBody>
+          <a:bodyPr wrap="none">
+            <a:noAutofit/>
+          </a:bodyPr>
+          <a:lstStyle/>
+          <a:p>
+            <a:r>
+              <a:rPr sz="3227" dirty="0" err="1">
+                <a:latin typeface="华康少女文字W5(P)"/>
+              </a:rPr>
+              <a:t>他就是拿一双</a:t>
+            </a:r>
+            <a:endParaRPr sz="3227" dirty="0">
+              <a:latin typeface="华康少女文字W5(P)"/>
+            </a:endParaRPr>
+          </a:p>
+        </p:txBody>
+      </p:sp>
+      <p:sp>
+        <p:nvSpPr>
+          <p:cNvPr id="17" name="TextBox 2">
+            <a:extLst>
+              <a:ext uri="{FF2B5EF4-FFF2-40B4-BE49-F238E27FC236}">
+                <a16:creationId xmlns:a16="http://schemas.microsoft.com/office/drawing/2014/main" id="{51C658CC-5D9B-DC44-2294-BB2809E03D92}"/>
+              </a:ext>
+            </a:extLst>
+          </p:cNvPr>
+          <p:cNvSpPr txBox="1"/>
+          <p:nvPr/>
+        </p:nvSpPr>
+        <p:spPr>
+          <a:xfrm rot="16200000">
+            <a:off x="-2235680" y="1029467"/>
+            <a:ext cx="5760000" cy="883920"/>
           </a:xfrm>
           <a:prstGeom prst="rect">
             <a:avLst/>
@@ -4911,444 +5056,260 @@
               <a:rPr sz="4800">
                 <a:latin typeface="华康少女文字W5(P)"/>
               </a:rPr>
-              <a:t>直到你煮一碗</a:t>
-            </a:r>
-            <a:r>
-              <a:rPr sz="5600">
-                <a:latin typeface="华康少女文字W5(P)"/>
-              </a:rPr>
-              <a:t>面</a:t>
-            </a:r>
-            <a:r>
-              <a:rPr sz="4800">
-                <a:latin typeface="华康少女文字W5(P)"/>
-              </a:rPr>
-              <a:t>给他</a:t>
-            </a:r>
-          </a:p>
-        </p:txBody>
-      </p:sp>
-      <p:sp>
-        <p:nvSpPr>
-          <p:cNvPr id="4" name="TextBox 3"/>
-          <p:cNvSpPr txBox="1"/>
-          <p:nvPr/>
-        </p:nvSpPr>
-        <p:spPr>
-          <a:xfrm>
-            <a:off x="914400" y="4831665"/>
-            <a:ext cx="9360000" cy="724814"/>
-          </a:xfrm>
-          <a:prstGeom prst="rect">
-            <a:avLst/>
-          </a:prstGeom>
-          <a:noFill/>
-        </p:spPr>
-        <p:txBody>
-          <a:bodyPr wrap="none">
-            <a:noAutofit/>
-          </a:bodyPr>
-          <a:lstStyle/>
-          <a:p>
-            <a:r>
-              <a:rPr sz="3936">
-                <a:latin typeface="华康少女文字W5(P)"/>
-              </a:rPr>
-              <a:t>很忧郁的眼睛看着你</a:t>
-            </a:r>
-          </a:p>
-        </p:txBody>
-      </p:sp>
-      <p:sp>
-        <p:nvSpPr>
-          <p:cNvPr id="5" name="TextBox 4"/>
-          <p:cNvSpPr txBox="1"/>
-          <p:nvPr/>
-        </p:nvSpPr>
-        <p:spPr>
-          <a:xfrm>
-            <a:off x="914400" y="4111317"/>
-            <a:ext cx="9360000" cy="594347"/>
-          </a:xfrm>
-          <a:prstGeom prst="rect">
-            <a:avLst/>
-          </a:prstGeom>
-          <a:noFill/>
-        </p:spPr>
-        <p:txBody>
-          <a:bodyPr wrap="none">
-            <a:noAutofit/>
-          </a:bodyPr>
-          <a:lstStyle/>
-          <a:p>
-            <a:r>
-              <a:rPr sz="3227">
-                <a:latin typeface="华康少女文字W5(P)"/>
-              </a:rPr>
-              <a:t>他就是拿一双</a:t>
-            </a:r>
-          </a:p>
-        </p:txBody>
-      </p:sp>
-      <p:sp>
-        <p:nvSpPr>
-          <p:cNvPr id="6" name="TextBox 5"/>
+              <a:t>他连话都不讲</a:t>
+            </a:r>
+          </a:p>
+        </p:txBody>
+      </p:sp>
+      <p:sp>
+        <p:nvSpPr>
+          <p:cNvPr id="18" name="TextBox 3">
+            <a:extLst>
+              <a:ext uri="{FF2B5EF4-FFF2-40B4-BE49-F238E27FC236}">
+                <a16:creationId xmlns:a16="http://schemas.microsoft.com/office/drawing/2014/main" id="{69F340A6-06F7-05B9-1EDC-CC803C18D8B8}"/>
+              </a:ext>
+            </a:extLst>
+          </p:cNvPr>
           <p:cNvSpPr txBox="1"/>
           <p:nvPr/>
         </p:nvSpPr>
         <p:spPr>
           <a:xfrm rot="16200000">
-            <a:off x="-5121960" y="5654640"/>
-            <a:ext cx="9360000" cy="883920"/>
-          </a:xfrm>
-          <a:prstGeom prst="rect">
-            <a:avLst/>
-          </a:prstGeom>
-          <a:noFill/>
-        </p:spPr>
-        <p:txBody>
-          <a:bodyPr wrap="none">
-            <a:noAutofit/>
-          </a:bodyPr>
-          <a:lstStyle/>
-          <a:p>
-            <a:r>
-              <a:rPr sz="4800">
-                <a:latin typeface="华康少女文字W5(P)"/>
-              </a:rPr>
-              <a:t>他连话都不讲</a:t>
-            </a:r>
-          </a:p>
-        </p:txBody>
-      </p:sp>
-      <p:sp>
-        <p:nvSpPr>
-          <p:cNvPr id="7" name="TextBox 6"/>
+            <a:off x="-3051162" y="1114056"/>
+            <a:ext cx="5760000" cy="724814"/>
+          </a:xfrm>
+          <a:prstGeom prst="rect">
+            <a:avLst/>
+          </a:prstGeom>
+          <a:noFill/>
+        </p:spPr>
+        <p:txBody>
+          <a:bodyPr wrap="none">
+            <a:noAutofit/>
+          </a:bodyPr>
+          <a:lstStyle/>
+          <a:p>
+            <a:r>
+              <a:rPr sz="3936" dirty="0" err="1">
+                <a:latin typeface="华康少女文字W5(P)"/>
+              </a:rPr>
+              <a:t>最高的境界了</a:t>
+            </a:r>
+            <a:endParaRPr sz="3936" dirty="0">
+              <a:latin typeface="华康少女文字W5(P)"/>
+            </a:endParaRPr>
+          </a:p>
+        </p:txBody>
+      </p:sp>
+      <p:sp>
+        <p:nvSpPr>
+          <p:cNvPr id="19" name="TextBox 4">
+            <a:extLst>
+              <a:ext uri="{FF2B5EF4-FFF2-40B4-BE49-F238E27FC236}">
+                <a16:creationId xmlns:a16="http://schemas.microsoft.com/office/drawing/2014/main" id="{50B28BFF-D4C7-7574-DF23-61A18DAE0C6E}"/>
+              </a:ext>
+            </a:extLst>
+          </p:cNvPr>
           <p:cNvSpPr txBox="1"/>
           <p:nvPr/>
         </p:nvSpPr>
         <p:spPr>
           <a:xfrm rot="16200000">
-            <a:off x="-5926327" y="5734192"/>
-            <a:ext cx="9360000" cy="724814"/>
-          </a:xfrm>
-          <a:prstGeom prst="rect">
-            <a:avLst/>
-          </a:prstGeom>
-          <a:noFill/>
-        </p:spPr>
-        <p:txBody>
-          <a:bodyPr wrap="none">
-            <a:noAutofit/>
-          </a:bodyPr>
-          <a:lstStyle/>
-          <a:p>
-            <a:r>
-              <a:rPr sz="3936">
-                <a:latin typeface="华康少女文字W5(P)"/>
-              </a:rPr>
-              <a:t>最高</a:t>
-            </a:r>
-            <a:r>
-              <a:rPr sz="3936">
-                <a:latin typeface="华康少女文字W5(P)"/>
-              </a:rPr>
-              <a:t>的境界了</a:t>
-            </a:r>
-          </a:p>
-        </p:txBody>
-      </p:sp>
-      <p:sp>
-        <p:nvSpPr>
-          <p:cNvPr id="8" name="TextBox 7"/>
+            <a:off x="-3710743" y="1179290"/>
+            <a:ext cx="5760000" cy="594347"/>
+          </a:xfrm>
+          <a:prstGeom prst="rect">
+            <a:avLst/>
+          </a:prstGeom>
+          <a:noFill/>
+        </p:spPr>
+        <p:txBody>
+          <a:bodyPr wrap="none">
+            <a:noAutofit/>
+          </a:bodyPr>
+          <a:lstStyle/>
+          <a:p>
+            <a:r>
+              <a:rPr sz="3227" dirty="0" err="1">
+                <a:latin typeface="华康少女文字W5(P)"/>
+              </a:rPr>
+              <a:t>不讲道理已经到了</a:t>
+            </a:r>
+            <a:endParaRPr sz="3227" dirty="0">
+              <a:latin typeface="华康少女文字W5(P)"/>
+            </a:endParaRPr>
+          </a:p>
+        </p:txBody>
+      </p:sp>
+      <p:sp>
+        <p:nvSpPr>
+          <p:cNvPr id="20" name="TextBox 5">
+            <a:extLst>
+              <a:ext uri="{FF2B5EF4-FFF2-40B4-BE49-F238E27FC236}">
+                <a16:creationId xmlns:a16="http://schemas.microsoft.com/office/drawing/2014/main" id="{6E43A641-E13B-904C-9FF4-940113AA51AD}"/>
+              </a:ext>
+            </a:extLst>
+          </p:cNvPr>
           <p:cNvSpPr txBox="1"/>
           <p:nvPr/>
         </p:nvSpPr>
         <p:spPr>
           <a:xfrm rot="16200000">
-            <a:off x="-6585908" y="5799426"/>
-            <a:ext cx="9360000" cy="594347"/>
-          </a:xfrm>
-          <a:prstGeom prst="rect">
-            <a:avLst/>
-          </a:prstGeom>
-          <a:noFill/>
-        </p:spPr>
-        <p:txBody>
-          <a:bodyPr wrap="none">
-            <a:noAutofit/>
-          </a:bodyPr>
-          <a:lstStyle/>
-          <a:p>
-            <a:r>
-              <a:rPr sz="3227">
-                <a:latin typeface="华康少女文字W5(P)"/>
-              </a:rPr>
-              <a:t>不讲道理已经到了</a:t>
-            </a:r>
-          </a:p>
-        </p:txBody>
-      </p:sp>
-      <p:sp>
-        <p:nvSpPr>
-          <p:cNvPr id="9" name="TextBox 8"/>
-          <p:cNvSpPr txBox="1"/>
-          <p:nvPr/>
-        </p:nvSpPr>
-        <p:spPr>
-          <a:xfrm rot="16200000">
-            <a:off x="-7126764" y="5852917"/>
-            <a:ext cx="9360000" cy="487365"/>
-          </a:xfrm>
-          <a:prstGeom prst="rect">
-            <a:avLst/>
-          </a:prstGeom>
-          <a:noFill/>
-        </p:spPr>
-        <p:txBody>
-          <a:bodyPr wrap="none">
-            <a:noAutofit/>
-          </a:bodyPr>
-          <a:lstStyle/>
-          <a:p>
-            <a:r>
-              <a:rPr sz="2646">
+            <a:off x="-4251600" y="1232781"/>
+            <a:ext cx="5760000" cy="487365"/>
+          </a:xfrm>
+          <a:prstGeom prst="rect">
+            <a:avLst/>
+          </a:prstGeom>
+          <a:noFill/>
+        </p:spPr>
+        <p:txBody>
+          <a:bodyPr wrap="none">
+            <a:noAutofit/>
+          </a:bodyPr>
+          <a:lstStyle/>
+          <a:p>
+            <a:r>
+              <a:rPr sz="2646" dirty="0" err="1">
                 <a:latin typeface="华康少女文字W5(P)"/>
               </a:rPr>
               <a:t>我们家里那个</a:t>
             </a:r>
-          </a:p>
-        </p:txBody>
-      </p:sp>
-      <p:sp>
-        <p:nvSpPr>
-          <p:cNvPr id="10" name="TextBox 9"/>
-          <p:cNvSpPr txBox="1"/>
-          <p:nvPr/>
-        </p:nvSpPr>
-        <p:spPr>
-          <a:xfrm>
-            <a:off x="-12050447" y="5682479"/>
-            <a:ext cx="9360000" cy="883920"/>
-          </a:xfrm>
-          <a:prstGeom prst="rect">
-            <a:avLst/>
-          </a:prstGeom>
-          <a:noFill/>
-        </p:spPr>
-        <p:txBody>
-          <a:bodyPr wrap="none">
-            <a:noAutofit/>
-          </a:bodyPr>
-          <a:lstStyle/>
-          <a:p>
-            <a:r>
-              <a:rPr sz="4800">
+            <a:endParaRPr sz="2646" dirty="0">
+              <a:latin typeface="华康少女文字W5(P)"/>
+            </a:endParaRPr>
+          </a:p>
+        </p:txBody>
+      </p:sp>
+      <p:sp>
+        <p:nvSpPr>
+          <p:cNvPr id="21" name="TextBox 3">
+            <a:extLst>
+              <a:ext uri="{FF2B5EF4-FFF2-40B4-BE49-F238E27FC236}">
+                <a16:creationId xmlns:a16="http://schemas.microsoft.com/office/drawing/2014/main" id="{4BAE6B26-3C42-65EC-6A07-AB9EA7EA32F7}"/>
+              </a:ext>
+            </a:extLst>
+          </p:cNvPr>
+          <p:cNvSpPr txBox="1"/>
+          <p:nvPr/>
+        </p:nvSpPr>
+        <p:spPr>
+          <a:xfrm>
+            <a:off x="-3868996" y="1394504"/>
+            <a:ext cx="5760000" cy="883920"/>
+          </a:xfrm>
+          <a:prstGeom prst="rect">
+            <a:avLst/>
+          </a:prstGeom>
+          <a:noFill/>
+        </p:spPr>
+        <p:txBody>
+          <a:bodyPr wrap="none">
+            <a:noAutofit/>
+          </a:bodyPr>
+          <a:lstStyle/>
+          <a:p>
+            <a:r>
+              <a:rPr sz="4400" dirty="0" err="1">
                 <a:latin typeface="华康少女文字W5(P)"/>
               </a:rPr>
               <a:t>谁占上风</a:t>
             </a:r>
-          </a:p>
-        </p:txBody>
-      </p:sp>
-      <p:sp>
-        <p:nvSpPr>
-          <p:cNvPr id="11" name="TextBox 10"/>
-          <p:cNvSpPr txBox="1"/>
-          <p:nvPr/>
-        </p:nvSpPr>
-        <p:spPr>
-          <a:xfrm>
-            <a:off x="-12050447" y="4831665"/>
-            <a:ext cx="9360000" cy="724814"/>
-          </a:xfrm>
-          <a:prstGeom prst="rect">
-            <a:avLst/>
-          </a:prstGeom>
-          <a:noFill/>
-        </p:spPr>
-        <p:txBody>
-          <a:bodyPr wrap="none">
-            <a:noAutofit/>
-          </a:bodyPr>
-          <a:lstStyle/>
-          <a:p>
-            <a:r>
-              <a:rPr sz="3936">
+            <a:endParaRPr sz="4400" dirty="0">
+              <a:latin typeface="华康少女文字W5(P)"/>
+            </a:endParaRPr>
+          </a:p>
+        </p:txBody>
+      </p:sp>
+      <p:sp>
+        <p:nvSpPr>
+          <p:cNvPr id="22" name="TextBox 4">
+            <a:extLst>
+              <a:ext uri="{FF2B5EF4-FFF2-40B4-BE49-F238E27FC236}">
+                <a16:creationId xmlns:a16="http://schemas.microsoft.com/office/drawing/2014/main" id="{8A868B03-7CD4-A516-80A6-727B6D36CA0F}"/>
+              </a:ext>
+            </a:extLst>
+          </p:cNvPr>
+          <p:cNvSpPr txBox="1"/>
+          <p:nvPr/>
+        </p:nvSpPr>
+        <p:spPr>
+          <a:xfrm>
+            <a:off x="-3868996" y="669690"/>
+            <a:ext cx="5760000" cy="724814"/>
+          </a:xfrm>
+          <a:prstGeom prst="rect">
+            <a:avLst/>
+          </a:prstGeom>
+          <a:noFill/>
+        </p:spPr>
+        <p:txBody>
+          <a:bodyPr wrap="none">
+            <a:noAutofit/>
+          </a:bodyPr>
+          <a:lstStyle/>
+          <a:p>
+            <a:r>
+              <a:rPr sz="3600" dirty="0" err="1">
                 <a:latin typeface="华康少女文字W5(P)"/>
               </a:rPr>
               <a:t>谁</a:t>
             </a:r>
             <a:r>
-              <a:rPr sz="3936">
+              <a:rPr sz="3600" dirty="0" err="1">
+                <a:solidFill>
+                  <a:srgbClr val="FF0000"/>
+                </a:solidFill>
                 <a:latin typeface="文鼎霹雳体"/>
               </a:rPr>
               <a:t>不讲道理</a:t>
             </a:r>
-          </a:p>
-        </p:txBody>
-      </p:sp>
-      <p:sp>
-        <p:nvSpPr>
-          <p:cNvPr id="12" name="TextBox 11"/>
-          <p:cNvSpPr txBox="1"/>
-          <p:nvPr/>
-        </p:nvSpPr>
-        <p:spPr>
-          <a:xfrm>
-            <a:off x="-12050447" y="4111317"/>
-            <a:ext cx="9360000" cy="594347"/>
-          </a:xfrm>
-          <a:prstGeom prst="rect">
-            <a:avLst/>
-          </a:prstGeom>
-          <a:noFill/>
-        </p:spPr>
-        <p:txBody>
-          <a:bodyPr wrap="none">
-            <a:noAutofit/>
-          </a:bodyPr>
-          <a:lstStyle/>
-          <a:p>
-            <a:r>
-              <a:rPr sz="3227">
+            <a:endParaRPr sz="3600" dirty="0">
+              <a:solidFill>
+                <a:srgbClr val="FF0000"/>
+              </a:solidFill>
+              <a:latin typeface="文鼎霹雳体"/>
+            </a:endParaRPr>
+          </a:p>
+        </p:txBody>
+      </p:sp>
+      <p:sp>
+        <p:nvSpPr>
+          <p:cNvPr id="23" name="TextBox 5">
+            <a:extLst>
+              <a:ext uri="{FF2B5EF4-FFF2-40B4-BE49-F238E27FC236}">
+                <a16:creationId xmlns:a16="http://schemas.microsoft.com/office/drawing/2014/main" id="{6AB2D4F6-1065-54FC-D83B-8A283B6FF468}"/>
+              </a:ext>
+            </a:extLst>
+          </p:cNvPr>
+          <p:cNvSpPr txBox="1"/>
+          <p:nvPr/>
+        </p:nvSpPr>
+        <p:spPr>
+          <a:xfrm>
+            <a:off x="-3874168" y="75343"/>
+            <a:ext cx="5760000" cy="594347"/>
+          </a:xfrm>
+          <a:prstGeom prst="rect">
+            <a:avLst/>
+          </a:prstGeom>
+          <a:noFill/>
+        </p:spPr>
+        <p:txBody>
+          <a:bodyPr wrap="none">
+            <a:noAutofit/>
+          </a:bodyPr>
+          <a:lstStyle/>
+          <a:p>
+            <a:r>
+              <a:rPr sz="3200" dirty="0" err="1">
                 <a:latin typeface="华康少女文字W5(P)"/>
               </a:rPr>
               <a:t>结婚之后嘛</a:t>
             </a:r>
-          </a:p>
-        </p:txBody>
-      </p:sp>
-      <p:sp>
-        <p:nvSpPr>
-          <p:cNvPr id="13" name="TextBox 12"/>
-          <p:cNvSpPr txBox="1"/>
-          <p:nvPr/>
-        </p:nvSpPr>
-        <p:spPr>
-          <a:xfrm rot="16200000">
-            <a:off x="-17172407" y="5654640"/>
-            <a:ext cx="9360000" cy="883920"/>
-          </a:xfrm>
-          <a:prstGeom prst="rect">
-            <a:avLst/>
-          </a:prstGeom>
-          <a:noFill/>
-        </p:spPr>
-        <p:txBody>
-          <a:bodyPr wrap="none">
-            <a:noAutofit/>
-          </a:bodyPr>
-          <a:lstStyle/>
-          <a:p>
-            <a:r>
-              <a:rPr sz="4800">
-                <a:latin typeface="华康少女文字W5(P)"/>
-              </a:rPr>
-              <a:t>她说</a:t>
-            </a:r>
-          </a:p>
-        </p:txBody>
-      </p:sp>
-      <p:sp>
-        <p:nvSpPr>
-          <p:cNvPr id="14" name="TextBox 13"/>
-          <p:cNvSpPr txBox="1"/>
-          <p:nvPr/>
-        </p:nvSpPr>
-        <p:spPr>
-          <a:xfrm rot="16200000">
-            <a:off x="-17976774" y="5734192"/>
-            <a:ext cx="9360000" cy="724814"/>
-          </a:xfrm>
-          <a:prstGeom prst="rect">
-            <a:avLst/>
-          </a:prstGeom>
-          <a:noFill/>
-        </p:spPr>
-        <p:txBody>
-          <a:bodyPr wrap="none">
-            <a:noAutofit/>
-          </a:bodyPr>
-          <a:lstStyle/>
-          <a:p>
-            <a:r>
-              <a:rPr sz="3936">
-                <a:latin typeface="华康少女文字W5(P)"/>
-              </a:rPr>
-              <a:t>我觉得</a:t>
-            </a:r>
-          </a:p>
-        </p:txBody>
-      </p:sp>
-      <p:sp>
-        <p:nvSpPr>
-          <p:cNvPr id="15" name="TextBox 14"/>
-          <p:cNvSpPr txBox="1"/>
-          <p:nvPr/>
-        </p:nvSpPr>
-        <p:spPr>
-          <a:xfrm rot="16200000">
-            <a:off x="-18636355" y="5799426"/>
-            <a:ext cx="9360000" cy="594347"/>
-          </a:xfrm>
-          <a:prstGeom prst="rect">
-            <a:avLst/>
-          </a:prstGeom>
-          <a:noFill/>
-        </p:spPr>
-        <p:txBody>
-          <a:bodyPr wrap="none">
-            <a:noAutofit/>
-          </a:bodyPr>
-          <a:lstStyle/>
-          <a:p>
-            <a:r>
-              <a:rPr sz="3227">
-                <a:latin typeface="华康少女文字W5(P)"/>
-              </a:rPr>
-              <a:t>讲得很对的</a:t>
-            </a:r>
-          </a:p>
-        </p:txBody>
-      </p:sp>
-      <p:sp>
-        <p:nvSpPr>
-          <p:cNvPr id="16" name="TextBox 15"/>
-          <p:cNvSpPr txBox="1"/>
-          <p:nvPr/>
-        </p:nvSpPr>
-        <p:spPr>
-          <a:xfrm rot="16200000">
-            <a:off x="-19177212" y="5852917"/>
-            <a:ext cx="9360000" cy="487365"/>
-          </a:xfrm>
-          <a:prstGeom prst="rect">
-            <a:avLst/>
-          </a:prstGeom>
-          <a:noFill/>
-        </p:spPr>
-        <p:txBody>
-          <a:bodyPr wrap="none">
-            <a:noAutofit/>
-          </a:bodyPr>
-          <a:lstStyle/>
-          <a:p>
-            <a:r>
-              <a:rPr sz="2646">
-                <a:solidFill>
-                  <a:srgbClr val="FF6B35"/>
-                </a:solidFill>
-                <a:latin typeface="华文行楷"/>
-              </a:rPr>
-              <a:t>张爱玲</a:t>
-            </a:r>
-            <a:r>
-              <a:rPr sz="2646">
-                <a:latin typeface="华康少女文字W5(P)"/>
-              </a:rPr>
-              <a:t>有一句话</a:t>
-            </a:r>
+            <a:endParaRPr sz="3200" dirty="0">
+              <a:latin typeface="华康少女文字W5(P)"/>
+            </a:endParaRPr>
           </a:p>
         </p:txBody>
       </p:sp>
@@ -5361,7 +5322,7 @@
 </file>
 
 <file path=ppt/slides/slide2.xml><?xml version="1.0" encoding="utf-8"?>
-<p:sld xmlns:a="http://schemas.openxmlformats.org/drawingml/2006/main" xmlns:p="http://schemas.openxmlformats.org/presentationml/2006/main" xmlns:r="http://schemas.openxmlformats.org/officeDocument/2006/relationships">
+<p:sld xmlns:a="http://schemas.openxmlformats.org/drawingml/2006/main" xmlns:r="http://schemas.openxmlformats.org/officeDocument/2006/relationships" xmlns:p="http://schemas.openxmlformats.org/presentationml/2006/main">
   <p:cSld>
     <p:spTree>
       <p:nvGrpSpPr>
@@ -5369,7 +5330,14 @@
         <p:cNvGrpSpPr/>
         <p:nvPr/>
       </p:nvGrpSpPr>
-      <p:grpSpPr/>
+      <p:grpSpPr>
+        <a:xfrm>
+          <a:off x="0" y="0"/>
+          <a:ext cx="0" cy="0"/>
+          <a:chOff x="0" y="0"/>
+          <a:chExt cx="0" cy="0"/>
+        </a:xfrm>
+      </p:grpSpPr>
       <p:pic>
         <p:nvPicPr>
           <p:cNvPr id="2" name="Picture 1" descr="image.jpg"/>
@@ -5403,25 +5371,28 @@
         <p:spPr>
           <a:xfrm>
             <a:off x="914400" y="5682479"/>
-            <a:ext cx="9360000" cy="883920"/>
-          </a:xfrm>
-          <a:prstGeom prst="rect">
-            <a:avLst/>
-          </a:prstGeom>
-          <a:noFill/>
-        </p:spPr>
-        <p:txBody>
-          <a:bodyPr wrap="none">
-            <a:noAutofit/>
-          </a:bodyPr>
-          <a:lstStyle/>
-          <a:p>
-            <a:r>
-              <a:rPr sz="4800">
+            <a:ext cx="5760000" cy="883920"/>
+          </a:xfrm>
+          <a:prstGeom prst="rect">
+            <a:avLst/>
+          </a:prstGeom>
+          <a:noFill/>
+        </p:spPr>
+        <p:txBody>
+          <a:bodyPr wrap="none">
+            <a:noAutofit/>
+          </a:bodyPr>
+          <a:lstStyle/>
+          <a:p>
+            <a:r>
+              <a:rPr sz="4800" dirty="0" err="1">
                 <a:latin typeface="华康少女文字W5(P)"/>
               </a:rPr>
               <a:t>讲得很对的</a:t>
             </a:r>
+            <a:endParaRPr sz="4800" dirty="0">
+              <a:latin typeface="华康少女文字W5(P)"/>
+            </a:endParaRPr>
           </a:p>
         </p:txBody>
       </p:sp>
@@ -5434,21 +5405,21 @@
         <p:spPr>
           <a:xfrm>
             <a:off x="914400" y="4831665"/>
-            <a:ext cx="9360000" cy="724814"/>
-          </a:xfrm>
-          <a:prstGeom prst="rect">
-            <a:avLst/>
-          </a:prstGeom>
-          <a:noFill/>
-        </p:spPr>
-        <p:txBody>
-          <a:bodyPr wrap="none">
-            <a:noAutofit/>
-          </a:bodyPr>
-          <a:lstStyle/>
-          <a:p>
-            <a:r>
-              <a:rPr sz="3936">
+            <a:ext cx="5760000" cy="724814"/>
+          </a:xfrm>
+          <a:prstGeom prst="rect">
+            <a:avLst/>
+          </a:prstGeom>
+          <a:noFill/>
+        </p:spPr>
+        <p:txBody>
+          <a:bodyPr wrap="none">
+            <a:noAutofit/>
+          </a:bodyPr>
+          <a:lstStyle/>
+          <a:p>
+            <a:r>
+              <a:rPr sz="3936" dirty="0" err="1">
                 <a:solidFill>
                   <a:srgbClr val="FF6B35"/>
                 </a:solidFill>
@@ -5457,11 +5428,14 @@
               <a:t>张爱玲</a:t>
             </a:r>
             <a:r>
-              <a:rPr sz="3936">
+              <a:rPr sz="3936" dirty="0" err="1">
                 <a:latin typeface="华康少女文字W5(P)"/>
               </a:rPr>
               <a:t>有一句话</a:t>
             </a:r>
+            <a:endParaRPr sz="3936" dirty="0">
+              <a:latin typeface="华康少女文字W5(P)"/>
+            </a:endParaRPr>
           </a:p>
         </p:txBody>
       </p:sp>
@@ -5474,7 +5448,7 @@
 </file>
 
 <file path=ppt/slides/slide3.xml><?xml version="1.0" encoding="utf-8"?>
-<p:sld xmlns:a="http://schemas.openxmlformats.org/drawingml/2006/main" xmlns:p="http://schemas.openxmlformats.org/presentationml/2006/main" xmlns:r="http://schemas.openxmlformats.org/officeDocument/2006/relationships">
+<p:sld xmlns:a="http://schemas.openxmlformats.org/drawingml/2006/main" xmlns:r="http://schemas.openxmlformats.org/officeDocument/2006/relationships" xmlns:p="http://schemas.openxmlformats.org/presentationml/2006/main">
   <p:cSld>
     <p:spTree>
       <p:nvGrpSpPr>
@@ -5482,7 +5456,14 @@
         <p:cNvGrpSpPr/>
         <p:nvPr/>
       </p:nvGrpSpPr>
-      <p:grpSpPr/>
+      <p:grpSpPr>
+        <a:xfrm>
+          <a:off x="0" y="0"/>
+          <a:ext cx="0" cy="0"/>
+          <a:chOff x="0" y="0"/>
+          <a:chExt cx="0" cy="0"/>
+        </a:xfrm>
+      </p:grpSpPr>
       <p:pic>
         <p:nvPicPr>
           <p:cNvPr id="2" name="Picture 1" descr="image.jpg"/>
@@ -5516,25 +5497,28 @@
         <p:spPr>
           <a:xfrm>
             <a:off x="914400" y="5682479"/>
-            <a:ext cx="9360000" cy="883920"/>
-          </a:xfrm>
-          <a:prstGeom prst="rect">
-            <a:avLst/>
-          </a:prstGeom>
-          <a:noFill/>
-        </p:spPr>
-        <p:txBody>
-          <a:bodyPr wrap="none">
-            <a:noAutofit/>
-          </a:bodyPr>
-          <a:lstStyle/>
-          <a:p>
-            <a:r>
-              <a:rPr sz="4800">
+            <a:ext cx="5760000" cy="883920"/>
+          </a:xfrm>
+          <a:prstGeom prst="rect">
+            <a:avLst/>
+          </a:prstGeom>
+          <a:noFill/>
+        </p:spPr>
+        <p:txBody>
+          <a:bodyPr wrap="none">
+            <a:noAutofit/>
+          </a:bodyPr>
+          <a:lstStyle/>
+          <a:p>
+            <a:r>
+              <a:rPr sz="4800" dirty="0" err="1">
                 <a:latin typeface="华康少女文字W5(P)"/>
               </a:rPr>
               <a:t>我觉得</a:t>
             </a:r>
+            <a:endParaRPr sz="4800" dirty="0">
+              <a:latin typeface="华康少女文字W5(P)"/>
+            </a:endParaRPr>
           </a:p>
         </p:txBody>
       </p:sp>
@@ -5547,25 +5531,28 @@
         <p:spPr>
           <a:xfrm>
             <a:off x="914400" y="4831665"/>
-            <a:ext cx="9360000" cy="724814"/>
-          </a:xfrm>
-          <a:prstGeom prst="rect">
-            <a:avLst/>
-          </a:prstGeom>
-          <a:noFill/>
-        </p:spPr>
-        <p:txBody>
-          <a:bodyPr wrap="none">
-            <a:noAutofit/>
-          </a:bodyPr>
-          <a:lstStyle/>
-          <a:p>
-            <a:r>
-              <a:rPr sz="3936">
+            <a:ext cx="5760000" cy="724814"/>
+          </a:xfrm>
+          <a:prstGeom prst="rect">
+            <a:avLst/>
+          </a:prstGeom>
+          <a:noFill/>
+        </p:spPr>
+        <p:txBody>
+          <a:bodyPr wrap="none">
+            <a:noAutofit/>
+          </a:bodyPr>
+          <a:lstStyle/>
+          <a:p>
+            <a:r>
+              <a:rPr sz="3936" dirty="0" err="1">
                 <a:latin typeface="华康少女文字W5(P)"/>
               </a:rPr>
               <a:t>讲得很对的</a:t>
             </a:r>
+            <a:endParaRPr sz="3936" dirty="0">
+              <a:latin typeface="华康少女文字W5(P)"/>
+            </a:endParaRPr>
           </a:p>
         </p:txBody>
       </p:sp>
@@ -5578,21 +5565,21 @@
         <p:spPr>
           <a:xfrm>
             <a:off x="914400" y="4111317"/>
-            <a:ext cx="9360000" cy="594347"/>
-          </a:xfrm>
-          <a:prstGeom prst="rect">
-            <a:avLst/>
-          </a:prstGeom>
-          <a:noFill/>
-        </p:spPr>
-        <p:txBody>
-          <a:bodyPr wrap="none">
-            <a:noAutofit/>
-          </a:bodyPr>
-          <a:lstStyle/>
-          <a:p>
-            <a:r>
-              <a:rPr sz="3227">
+            <a:ext cx="5760000" cy="594347"/>
+          </a:xfrm>
+          <a:prstGeom prst="rect">
+            <a:avLst/>
+          </a:prstGeom>
+          <a:noFill/>
+        </p:spPr>
+        <p:txBody>
+          <a:bodyPr wrap="none">
+            <a:noAutofit/>
+          </a:bodyPr>
+          <a:lstStyle/>
+          <a:p>
+            <a:r>
+              <a:rPr sz="3227" dirty="0" err="1">
                 <a:solidFill>
                   <a:srgbClr val="FF6B35"/>
                 </a:solidFill>
@@ -5601,11 +5588,14 @@
               <a:t>张爱玲</a:t>
             </a:r>
             <a:r>
-              <a:rPr sz="3227">
+              <a:rPr sz="3227" dirty="0" err="1">
                 <a:latin typeface="华康少女文字W5(P)"/>
               </a:rPr>
               <a:t>有一句话</a:t>
             </a:r>
+            <a:endParaRPr sz="3227" dirty="0">
+              <a:latin typeface="华康少女文字W5(P)"/>
+            </a:endParaRPr>
           </a:p>
         </p:txBody>
       </p:sp>
@@ -5618,7 +5608,7 @@
 </file>
 
 <file path=ppt/slides/slide4.xml><?xml version="1.0" encoding="utf-8"?>
-<p:sld xmlns:a="http://schemas.openxmlformats.org/drawingml/2006/main" xmlns:p="http://schemas.openxmlformats.org/presentationml/2006/main" xmlns:r="http://schemas.openxmlformats.org/officeDocument/2006/relationships">
+<p:sld xmlns:a="http://schemas.openxmlformats.org/drawingml/2006/main" xmlns:r="http://schemas.openxmlformats.org/officeDocument/2006/relationships" xmlns:p="http://schemas.openxmlformats.org/presentationml/2006/main">
   <p:cSld>
     <p:spTree>
       <p:nvGrpSpPr>
@@ -5626,7 +5616,14 @@
         <p:cNvGrpSpPr/>
         <p:nvPr/>
       </p:nvGrpSpPr>
-      <p:grpSpPr/>
+      <p:grpSpPr>
+        <a:xfrm>
+          <a:off x="0" y="0"/>
+          <a:ext cx="0" cy="0"/>
+          <a:chOff x="0" y="0"/>
+          <a:chExt cx="0" cy="0"/>
+        </a:xfrm>
+      </p:grpSpPr>
       <p:pic>
         <p:nvPicPr>
           <p:cNvPr id="2" name="Picture 1" descr="image.jpg"/>
@@ -5659,26 +5656,29 @@
         </p:nvSpPr>
         <p:spPr>
           <a:xfrm>
-            <a:off x="914400" y="5682479"/>
-            <a:ext cx="9360000" cy="883920"/>
-          </a:xfrm>
-          <a:prstGeom prst="rect">
-            <a:avLst/>
-          </a:prstGeom>
-          <a:noFill/>
-        </p:spPr>
-        <p:txBody>
-          <a:bodyPr wrap="none">
-            <a:noAutofit/>
-          </a:bodyPr>
-          <a:lstStyle/>
-          <a:p>
-            <a:r>
-              <a:rPr sz="4800">
+            <a:off x="914399" y="5682479"/>
+            <a:ext cx="5760000" cy="883920"/>
+          </a:xfrm>
+          <a:prstGeom prst="rect">
+            <a:avLst/>
+          </a:prstGeom>
+          <a:noFill/>
+        </p:spPr>
+        <p:txBody>
+          <a:bodyPr wrap="none">
+            <a:noAutofit/>
+          </a:bodyPr>
+          <a:lstStyle/>
+          <a:p>
+            <a:r>
+              <a:rPr sz="4800" dirty="0" err="1">
                 <a:latin typeface="华康少女文字W5(P)"/>
               </a:rPr>
               <a:t>她说</a:t>
             </a:r>
+            <a:endParaRPr sz="4800" dirty="0">
+              <a:latin typeface="华康少女文字W5(P)"/>
+            </a:endParaRPr>
           </a:p>
         </p:txBody>
       </p:sp>
@@ -5690,26 +5690,29 @@
         </p:nvSpPr>
         <p:spPr>
           <a:xfrm>
-            <a:off x="914400" y="4831665"/>
-            <a:ext cx="9360000" cy="724814"/>
-          </a:xfrm>
-          <a:prstGeom prst="rect">
-            <a:avLst/>
-          </a:prstGeom>
-          <a:noFill/>
-        </p:spPr>
-        <p:txBody>
-          <a:bodyPr wrap="none">
-            <a:noAutofit/>
-          </a:bodyPr>
-          <a:lstStyle/>
-          <a:p>
-            <a:r>
-              <a:rPr sz="3936">
+            <a:off x="914399" y="4831665"/>
+            <a:ext cx="5760000" cy="724814"/>
+          </a:xfrm>
+          <a:prstGeom prst="rect">
+            <a:avLst/>
+          </a:prstGeom>
+          <a:noFill/>
+        </p:spPr>
+        <p:txBody>
+          <a:bodyPr wrap="none">
+            <a:noAutofit/>
+          </a:bodyPr>
+          <a:lstStyle/>
+          <a:p>
+            <a:r>
+              <a:rPr sz="3936" dirty="0" err="1">
                 <a:latin typeface="华康少女文字W5(P)"/>
               </a:rPr>
               <a:t>我觉得</a:t>
             </a:r>
+            <a:endParaRPr sz="3936" dirty="0">
+              <a:latin typeface="华康少女文字W5(P)"/>
+            </a:endParaRPr>
           </a:p>
         </p:txBody>
       </p:sp>
@@ -5722,25 +5725,28 @@
         <p:spPr>
           <a:xfrm>
             <a:off x="914400" y="4111317"/>
-            <a:ext cx="9360000" cy="594347"/>
-          </a:xfrm>
-          <a:prstGeom prst="rect">
-            <a:avLst/>
-          </a:prstGeom>
-          <a:noFill/>
-        </p:spPr>
-        <p:txBody>
-          <a:bodyPr wrap="none">
-            <a:noAutofit/>
-          </a:bodyPr>
-          <a:lstStyle/>
-          <a:p>
-            <a:r>
-              <a:rPr sz="3227">
+            <a:ext cx="5760000" cy="594347"/>
+          </a:xfrm>
+          <a:prstGeom prst="rect">
+            <a:avLst/>
+          </a:prstGeom>
+          <a:noFill/>
+        </p:spPr>
+        <p:txBody>
+          <a:bodyPr wrap="none">
+            <a:noAutofit/>
+          </a:bodyPr>
+          <a:lstStyle/>
+          <a:p>
+            <a:r>
+              <a:rPr sz="3227" dirty="0" err="1">
                 <a:latin typeface="华康少女文字W5(P)"/>
               </a:rPr>
               <a:t>讲得很对的</a:t>
             </a:r>
+            <a:endParaRPr sz="3227" dirty="0">
+              <a:latin typeface="华康少女文字W5(P)"/>
+            </a:endParaRPr>
           </a:p>
         </p:txBody>
       </p:sp>
@@ -5752,22 +5758,22 @@
         </p:nvSpPr>
         <p:spPr>
           <a:xfrm>
-            <a:off x="914400" y="3497952"/>
-            <a:ext cx="9360000" cy="487365"/>
-          </a:xfrm>
-          <a:prstGeom prst="rect">
-            <a:avLst/>
-          </a:prstGeom>
-          <a:noFill/>
-        </p:spPr>
-        <p:txBody>
-          <a:bodyPr wrap="none">
-            <a:noAutofit/>
-          </a:bodyPr>
-          <a:lstStyle/>
-          <a:p>
-            <a:r>
-              <a:rPr sz="2646">
+            <a:off x="914399" y="3497952"/>
+            <a:ext cx="5760000" cy="487365"/>
+          </a:xfrm>
+          <a:prstGeom prst="rect">
+            <a:avLst/>
+          </a:prstGeom>
+          <a:noFill/>
+        </p:spPr>
+        <p:txBody>
+          <a:bodyPr wrap="none">
+            <a:noAutofit/>
+          </a:bodyPr>
+          <a:lstStyle/>
+          <a:p>
+            <a:r>
+              <a:rPr sz="2646" dirty="0" err="1">
                 <a:solidFill>
                   <a:srgbClr val="FF6B35"/>
                 </a:solidFill>
@@ -5776,11 +5782,14 @@
               <a:t>张爱玲</a:t>
             </a:r>
             <a:r>
-              <a:rPr sz="2646">
+              <a:rPr sz="2646" dirty="0" err="1">
                 <a:latin typeface="华康少女文字W5(P)"/>
               </a:rPr>
               <a:t>有一句话</a:t>
             </a:r>
+            <a:endParaRPr sz="2646" dirty="0">
+              <a:latin typeface="华康少女文字W5(P)"/>
+            </a:endParaRPr>
           </a:p>
         </p:txBody>
       </p:sp>
@@ -5793,7 +5802,7 @@
 </file>
 
 <file path=ppt/slides/slide5.xml><?xml version="1.0" encoding="utf-8"?>
-<p:sld xmlns:a="http://schemas.openxmlformats.org/drawingml/2006/main" xmlns:p="http://schemas.openxmlformats.org/presentationml/2006/main" xmlns:r="http://schemas.openxmlformats.org/officeDocument/2006/relationships">
+<p:sld xmlns:a="http://schemas.openxmlformats.org/drawingml/2006/main" xmlns:r="http://schemas.openxmlformats.org/officeDocument/2006/relationships" xmlns:p="http://schemas.openxmlformats.org/presentationml/2006/main">
   <p:cSld>
     <p:spTree>
       <p:nvGrpSpPr>
@@ -5801,7 +5810,14 @@
         <p:cNvGrpSpPr/>
         <p:nvPr/>
       </p:nvGrpSpPr>
-      <p:grpSpPr/>
+      <p:grpSpPr>
+        <a:xfrm>
+          <a:off x="0" y="0"/>
+          <a:ext cx="0" cy="0"/>
+          <a:chOff x="0" y="0"/>
+          <a:chExt cx="0" cy="0"/>
+        </a:xfrm>
+      </p:grpSpPr>
       <p:pic>
         <p:nvPicPr>
           <p:cNvPr id="2" name="Picture 1" descr="image.jpg"/>
@@ -5835,25 +5851,28 @@
         <p:spPr>
           <a:xfrm>
             <a:off x="914400" y="5682479"/>
-            <a:ext cx="9360000" cy="883920"/>
-          </a:xfrm>
-          <a:prstGeom prst="rect">
-            <a:avLst/>
-          </a:prstGeom>
-          <a:noFill/>
-        </p:spPr>
-        <p:txBody>
-          <a:bodyPr wrap="none">
-            <a:noAutofit/>
-          </a:bodyPr>
-          <a:lstStyle/>
-          <a:p>
-            <a:r>
-              <a:rPr sz="4800">
+            <a:ext cx="5760000" cy="883920"/>
+          </a:xfrm>
+          <a:prstGeom prst="rect">
+            <a:avLst/>
+          </a:prstGeom>
+          <a:noFill/>
+        </p:spPr>
+        <p:txBody>
+          <a:bodyPr wrap="none">
+            <a:noAutofit/>
+          </a:bodyPr>
+          <a:lstStyle/>
+          <a:p>
+            <a:r>
+              <a:rPr sz="4800" dirty="0" err="1">
                 <a:latin typeface="华康少女文字W5(P)"/>
               </a:rPr>
               <a:t>结婚之后嘛</a:t>
             </a:r>
+            <a:endParaRPr sz="4800" dirty="0">
+              <a:latin typeface="华康少女文字W5(P)"/>
+            </a:endParaRPr>
           </a:p>
         </p:txBody>
       </p:sp>
@@ -5865,26 +5884,29 @@
         </p:nvSpPr>
         <p:spPr>
           <a:xfrm rot="16200000">
-            <a:off x="-5121960" y="5654640"/>
-            <a:ext cx="9360000" cy="883920"/>
-          </a:xfrm>
-          <a:prstGeom prst="rect">
-            <a:avLst/>
-          </a:prstGeom>
-          <a:noFill/>
-        </p:spPr>
-        <p:txBody>
-          <a:bodyPr wrap="none">
-            <a:noAutofit/>
-          </a:bodyPr>
-          <a:lstStyle/>
-          <a:p>
-            <a:r>
-              <a:rPr sz="4800">
+            <a:off x="-2407560" y="2603670"/>
+            <a:ext cx="5760000" cy="883920"/>
+          </a:xfrm>
+          <a:prstGeom prst="rect">
+            <a:avLst/>
+          </a:prstGeom>
+          <a:noFill/>
+        </p:spPr>
+        <p:txBody>
+          <a:bodyPr wrap="none">
+            <a:noAutofit/>
+          </a:bodyPr>
+          <a:lstStyle/>
+          <a:p>
+            <a:r>
+              <a:rPr sz="4800" dirty="0" err="1">
                 <a:latin typeface="华康少女文字W5(P)"/>
               </a:rPr>
               <a:t>她说</a:t>
             </a:r>
+            <a:endParaRPr sz="4800" dirty="0">
+              <a:latin typeface="华康少女文字W5(P)"/>
+            </a:endParaRPr>
           </a:p>
         </p:txBody>
       </p:sp>
@@ -5896,26 +5918,29 @@
         </p:nvSpPr>
         <p:spPr>
           <a:xfrm rot="16200000">
-            <a:off x="-5926327" y="5734192"/>
-            <a:ext cx="9360000" cy="724814"/>
-          </a:xfrm>
-          <a:prstGeom prst="rect">
-            <a:avLst/>
-          </a:prstGeom>
-          <a:noFill/>
-        </p:spPr>
-        <p:txBody>
-          <a:bodyPr wrap="none">
-            <a:noAutofit/>
-          </a:bodyPr>
-          <a:lstStyle/>
-          <a:p>
-            <a:r>
-              <a:rPr sz="3936">
+            <a:off x="-3211927" y="2683222"/>
+            <a:ext cx="5760000" cy="724814"/>
+          </a:xfrm>
+          <a:prstGeom prst="rect">
+            <a:avLst/>
+          </a:prstGeom>
+          <a:noFill/>
+        </p:spPr>
+        <p:txBody>
+          <a:bodyPr wrap="none">
+            <a:noAutofit/>
+          </a:bodyPr>
+          <a:lstStyle/>
+          <a:p>
+            <a:r>
+              <a:rPr sz="3936" dirty="0" err="1">
                 <a:latin typeface="华康少女文字W5(P)"/>
               </a:rPr>
               <a:t>我觉得</a:t>
             </a:r>
+            <a:endParaRPr sz="3936" dirty="0">
+              <a:latin typeface="华康少女文字W5(P)"/>
+            </a:endParaRPr>
           </a:p>
         </p:txBody>
       </p:sp>
@@ -5927,26 +5952,29 @@
         </p:nvSpPr>
         <p:spPr>
           <a:xfrm rot="16200000">
-            <a:off x="-6585908" y="5799426"/>
-            <a:ext cx="9360000" cy="594347"/>
-          </a:xfrm>
-          <a:prstGeom prst="rect">
-            <a:avLst/>
-          </a:prstGeom>
-          <a:noFill/>
-        </p:spPr>
-        <p:txBody>
-          <a:bodyPr wrap="none">
-            <a:noAutofit/>
-          </a:bodyPr>
-          <a:lstStyle/>
-          <a:p>
-            <a:r>
-              <a:rPr sz="3227">
+            <a:off x="-3871508" y="2748456"/>
+            <a:ext cx="5760000" cy="594347"/>
+          </a:xfrm>
+          <a:prstGeom prst="rect">
+            <a:avLst/>
+          </a:prstGeom>
+          <a:noFill/>
+        </p:spPr>
+        <p:txBody>
+          <a:bodyPr wrap="none">
+            <a:noAutofit/>
+          </a:bodyPr>
+          <a:lstStyle/>
+          <a:p>
+            <a:r>
+              <a:rPr sz="3227" dirty="0" err="1">
                 <a:latin typeface="华康少女文字W5(P)"/>
               </a:rPr>
               <a:t>讲得很对的</a:t>
             </a:r>
+            <a:endParaRPr sz="3227" dirty="0">
+              <a:latin typeface="华康少女文字W5(P)"/>
+            </a:endParaRPr>
           </a:p>
         </p:txBody>
       </p:sp>
@@ -5958,22 +5986,22 @@
         </p:nvSpPr>
         <p:spPr>
           <a:xfrm rot="16200000">
-            <a:off x="-7126764" y="5852917"/>
-            <a:ext cx="9360000" cy="487365"/>
-          </a:xfrm>
-          <a:prstGeom prst="rect">
-            <a:avLst/>
-          </a:prstGeom>
-          <a:noFill/>
-        </p:spPr>
-        <p:txBody>
-          <a:bodyPr wrap="none">
-            <a:noAutofit/>
-          </a:bodyPr>
-          <a:lstStyle/>
-          <a:p>
-            <a:r>
-              <a:rPr sz="2646">
+            <a:off x="-4412364" y="2801947"/>
+            <a:ext cx="5760000" cy="487365"/>
+          </a:xfrm>
+          <a:prstGeom prst="rect">
+            <a:avLst/>
+          </a:prstGeom>
+          <a:noFill/>
+        </p:spPr>
+        <p:txBody>
+          <a:bodyPr wrap="none">
+            <a:noAutofit/>
+          </a:bodyPr>
+          <a:lstStyle/>
+          <a:p>
+            <a:r>
+              <a:rPr sz="2646" dirty="0" err="1">
                 <a:solidFill>
                   <a:srgbClr val="FF6B35"/>
                 </a:solidFill>
@@ -5982,11 +6010,14 @@
               <a:t>张爱玲</a:t>
             </a:r>
             <a:r>
-              <a:rPr sz="2646">
+              <a:rPr sz="2646" dirty="0" err="1">
                 <a:latin typeface="华康少女文字W5(P)"/>
               </a:rPr>
               <a:t>有一句话</a:t>
             </a:r>
+            <a:endParaRPr sz="2646" dirty="0">
+              <a:latin typeface="华康少女文字W5(P)"/>
+            </a:endParaRPr>
           </a:p>
         </p:txBody>
       </p:sp>
@@ -5999,7 +6030,7 @@
 </file>
 
 <file path=ppt/slides/slide6.xml><?xml version="1.0" encoding="utf-8"?>
-<p:sld xmlns:a="http://schemas.openxmlformats.org/drawingml/2006/main" xmlns:p="http://schemas.openxmlformats.org/presentationml/2006/main" xmlns:r="http://schemas.openxmlformats.org/officeDocument/2006/relationships">
+<p:sld xmlns:a="http://schemas.openxmlformats.org/drawingml/2006/main" xmlns:r="http://schemas.openxmlformats.org/officeDocument/2006/relationships" xmlns:p="http://schemas.openxmlformats.org/presentationml/2006/main">
   <p:cSld>
     <p:spTree>
       <p:nvGrpSpPr>
@@ -6007,7 +6038,14 @@
         <p:cNvGrpSpPr/>
         <p:nvPr/>
       </p:nvGrpSpPr>
-      <p:grpSpPr/>
+      <p:grpSpPr>
+        <a:xfrm>
+          <a:off x="0" y="0"/>
+          <a:ext cx="0" cy="0"/>
+          <a:chOff x="0" y="0"/>
+          <a:chExt cx="0" cy="0"/>
+        </a:xfrm>
+      </p:grpSpPr>
       <p:pic>
         <p:nvPicPr>
           <p:cNvPr id="2" name="Picture 1" descr="image.jpg"/>
@@ -6040,32 +6078,41 @@
         </p:nvSpPr>
         <p:spPr>
           <a:xfrm>
-            <a:off x="914400" y="5682479"/>
-            <a:ext cx="9360000" cy="883920"/>
-          </a:xfrm>
-          <a:prstGeom prst="rect">
-            <a:avLst/>
-          </a:prstGeom>
-          <a:noFill/>
-        </p:spPr>
-        <p:txBody>
-          <a:bodyPr wrap="none">
-            <a:noAutofit/>
-          </a:bodyPr>
-          <a:lstStyle/>
-          <a:p>
-            <a:r>
-              <a:rPr sz="4800">
+            <a:off x="914399" y="5682479"/>
+            <a:ext cx="5760000" cy="883920"/>
+          </a:xfrm>
+          <a:prstGeom prst="rect">
+            <a:avLst/>
+          </a:prstGeom>
+          <a:noFill/>
+        </p:spPr>
+        <p:txBody>
+          <a:bodyPr wrap="none">
+            <a:noAutofit/>
+          </a:bodyPr>
+          <a:lstStyle/>
+          <a:p>
+            <a:r>
+              <a:rPr sz="4800" dirty="0" err="1">
                 <a:latin typeface="华康少女文字W5(P)"/>
               </a:rPr>
               <a:t>谁</a:t>
             </a:r>
             <a:r>
-              <a:rPr sz="4800">
+              <a:rPr sz="4800" dirty="0" err="1">
+                <a:solidFill>
+                  <a:srgbClr val="FF0000"/>
+                </a:solidFill>
                 <a:latin typeface="文鼎霹雳体"/>
               </a:rPr>
               <a:t>不讲道理</a:t>
             </a:r>
+            <a:endParaRPr sz="4800" dirty="0">
+              <a:solidFill>
+                <a:srgbClr val="FF0000"/>
+              </a:solidFill>
+              <a:latin typeface="文鼎霹雳体"/>
+            </a:endParaRPr>
           </a:p>
         </p:txBody>
       </p:sp>
@@ -6077,146 +6124,182 @@
         </p:nvSpPr>
         <p:spPr>
           <a:xfrm>
-            <a:off x="914400" y="4831665"/>
-            <a:ext cx="9360000" cy="724814"/>
-          </a:xfrm>
-          <a:prstGeom prst="rect">
-            <a:avLst/>
-          </a:prstGeom>
-          <a:noFill/>
-        </p:spPr>
-        <p:txBody>
-          <a:bodyPr wrap="none">
-            <a:noAutofit/>
-          </a:bodyPr>
-          <a:lstStyle/>
-          <a:p>
-            <a:r>
-              <a:rPr sz="3936">
+            <a:off x="914399" y="4831665"/>
+            <a:ext cx="5760000" cy="724814"/>
+          </a:xfrm>
+          <a:prstGeom prst="rect">
+            <a:avLst/>
+          </a:prstGeom>
+          <a:noFill/>
+        </p:spPr>
+        <p:txBody>
+          <a:bodyPr wrap="none">
+            <a:noAutofit/>
+          </a:bodyPr>
+          <a:lstStyle/>
+          <a:p>
+            <a:r>
+              <a:rPr sz="3936" dirty="0" err="1">
                 <a:latin typeface="华康少女文字W5(P)"/>
               </a:rPr>
               <a:t>结婚之后嘛</a:t>
             </a:r>
-          </a:p>
-        </p:txBody>
-      </p:sp>
-      <p:sp>
-        <p:nvSpPr>
-          <p:cNvPr id="5" name="TextBox 4"/>
+            <a:endParaRPr sz="3936" dirty="0">
+              <a:latin typeface="华康少女文字W5(P)"/>
+            </a:endParaRPr>
+          </a:p>
+        </p:txBody>
+      </p:sp>
+      <p:sp>
+        <p:nvSpPr>
+          <p:cNvPr id="13" name="TextBox 3">
+            <a:extLst>
+              <a:ext uri="{FF2B5EF4-FFF2-40B4-BE49-F238E27FC236}">
+                <a16:creationId xmlns:a16="http://schemas.microsoft.com/office/drawing/2014/main" id="{7C5066CC-CF65-E3CC-CF2A-A9B0B59535C7}"/>
+              </a:ext>
+            </a:extLst>
+          </p:cNvPr>
           <p:cNvSpPr txBox="1"/>
           <p:nvPr/>
         </p:nvSpPr>
         <p:spPr>
           <a:xfrm rot="16200000">
-            <a:off x="-5121960" y="5654640"/>
-            <a:ext cx="9360000" cy="883920"/>
-          </a:xfrm>
-          <a:prstGeom prst="rect">
-            <a:avLst/>
-          </a:prstGeom>
-          <a:noFill/>
-        </p:spPr>
-        <p:txBody>
-          <a:bodyPr wrap="none">
-            <a:noAutofit/>
-          </a:bodyPr>
-          <a:lstStyle/>
-          <a:p>
-            <a:r>
-              <a:rPr sz="4800">
+            <a:off x="-2407560" y="1596281"/>
+            <a:ext cx="5760000" cy="883920"/>
+          </a:xfrm>
+          <a:prstGeom prst="rect">
+            <a:avLst/>
+          </a:prstGeom>
+          <a:noFill/>
+        </p:spPr>
+        <p:txBody>
+          <a:bodyPr wrap="none">
+            <a:noAutofit/>
+          </a:bodyPr>
+          <a:lstStyle/>
+          <a:p>
+            <a:r>
+              <a:rPr sz="4800" dirty="0" err="1">
                 <a:latin typeface="华康少女文字W5(P)"/>
               </a:rPr>
               <a:t>她说</a:t>
             </a:r>
-          </a:p>
-        </p:txBody>
-      </p:sp>
-      <p:sp>
-        <p:nvSpPr>
-          <p:cNvPr id="6" name="TextBox 5"/>
+            <a:endParaRPr sz="4800" dirty="0">
+              <a:latin typeface="华康少女文字W5(P)"/>
+            </a:endParaRPr>
+          </a:p>
+        </p:txBody>
+      </p:sp>
+      <p:sp>
+        <p:nvSpPr>
+          <p:cNvPr id="14" name="TextBox 4">
+            <a:extLst>
+              <a:ext uri="{FF2B5EF4-FFF2-40B4-BE49-F238E27FC236}">
+                <a16:creationId xmlns:a16="http://schemas.microsoft.com/office/drawing/2014/main" id="{B3A2F60E-594F-962F-8400-6E7050879601}"/>
+              </a:ext>
+            </a:extLst>
+          </p:cNvPr>
           <p:cNvSpPr txBox="1"/>
           <p:nvPr/>
         </p:nvSpPr>
         <p:spPr>
           <a:xfrm rot="16200000">
-            <a:off x="-5926327" y="5734192"/>
-            <a:ext cx="9360000" cy="724814"/>
-          </a:xfrm>
-          <a:prstGeom prst="rect">
-            <a:avLst/>
-          </a:prstGeom>
-          <a:noFill/>
-        </p:spPr>
-        <p:txBody>
-          <a:bodyPr wrap="none">
-            <a:noAutofit/>
-          </a:bodyPr>
-          <a:lstStyle/>
-          <a:p>
-            <a:r>
-              <a:rPr sz="3936">
+            <a:off x="-3211927" y="1675833"/>
+            <a:ext cx="5760000" cy="724814"/>
+          </a:xfrm>
+          <a:prstGeom prst="rect">
+            <a:avLst/>
+          </a:prstGeom>
+          <a:noFill/>
+        </p:spPr>
+        <p:txBody>
+          <a:bodyPr wrap="none">
+            <a:noAutofit/>
+          </a:bodyPr>
+          <a:lstStyle/>
+          <a:p>
+            <a:r>
+              <a:rPr sz="3936" dirty="0" err="1">
                 <a:latin typeface="华康少女文字W5(P)"/>
               </a:rPr>
               <a:t>我觉得</a:t>
             </a:r>
-          </a:p>
-        </p:txBody>
-      </p:sp>
-      <p:sp>
-        <p:nvSpPr>
-          <p:cNvPr id="7" name="TextBox 6"/>
+            <a:endParaRPr sz="3936" dirty="0">
+              <a:latin typeface="华康少女文字W5(P)"/>
+            </a:endParaRPr>
+          </a:p>
+        </p:txBody>
+      </p:sp>
+      <p:sp>
+        <p:nvSpPr>
+          <p:cNvPr id="15" name="TextBox 5">
+            <a:extLst>
+              <a:ext uri="{FF2B5EF4-FFF2-40B4-BE49-F238E27FC236}">
+                <a16:creationId xmlns:a16="http://schemas.microsoft.com/office/drawing/2014/main" id="{2D660372-2814-74D5-0807-629208924454}"/>
+              </a:ext>
+            </a:extLst>
+          </p:cNvPr>
           <p:cNvSpPr txBox="1"/>
           <p:nvPr/>
         </p:nvSpPr>
         <p:spPr>
           <a:xfrm rot="16200000">
-            <a:off x="-6585908" y="5799426"/>
-            <a:ext cx="9360000" cy="594347"/>
-          </a:xfrm>
-          <a:prstGeom prst="rect">
-            <a:avLst/>
-          </a:prstGeom>
-          <a:noFill/>
-        </p:spPr>
-        <p:txBody>
-          <a:bodyPr wrap="none">
-            <a:noAutofit/>
-          </a:bodyPr>
-          <a:lstStyle/>
-          <a:p>
-            <a:r>
-              <a:rPr sz="3227">
+            <a:off x="-3871508" y="1741067"/>
+            <a:ext cx="5760000" cy="594347"/>
+          </a:xfrm>
+          <a:prstGeom prst="rect">
+            <a:avLst/>
+          </a:prstGeom>
+          <a:noFill/>
+        </p:spPr>
+        <p:txBody>
+          <a:bodyPr wrap="none">
+            <a:noAutofit/>
+          </a:bodyPr>
+          <a:lstStyle/>
+          <a:p>
+            <a:r>
+              <a:rPr sz="3227" dirty="0" err="1">
                 <a:latin typeface="华康少女文字W5(P)"/>
               </a:rPr>
               <a:t>讲得很对的</a:t>
             </a:r>
-          </a:p>
-        </p:txBody>
-      </p:sp>
-      <p:sp>
-        <p:nvSpPr>
-          <p:cNvPr id="8" name="TextBox 7"/>
+            <a:endParaRPr sz="3227" dirty="0">
+              <a:latin typeface="华康少女文字W5(P)"/>
+            </a:endParaRPr>
+          </a:p>
+        </p:txBody>
+      </p:sp>
+      <p:sp>
+        <p:nvSpPr>
+          <p:cNvPr id="16" name="TextBox 6">
+            <a:extLst>
+              <a:ext uri="{FF2B5EF4-FFF2-40B4-BE49-F238E27FC236}">
+                <a16:creationId xmlns:a16="http://schemas.microsoft.com/office/drawing/2014/main" id="{528F71F9-FF2B-2E16-D110-77DDCAEC4FC4}"/>
+              </a:ext>
+            </a:extLst>
+          </p:cNvPr>
           <p:cNvSpPr txBox="1"/>
           <p:nvPr/>
         </p:nvSpPr>
         <p:spPr>
           <a:xfrm rot="16200000">
-            <a:off x="-7126764" y="5852917"/>
-            <a:ext cx="9360000" cy="487365"/>
-          </a:xfrm>
-          <a:prstGeom prst="rect">
-            <a:avLst/>
-          </a:prstGeom>
-          <a:noFill/>
-        </p:spPr>
-        <p:txBody>
-          <a:bodyPr wrap="none">
-            <a:noAutofit/>
-          </a:bodyPr>
-          <a:lstStyle/>
-          <a:p>
-            <a:r>
-              <a:rPr sz="2646">
+            <a:off x="-4412364" y="1794558"/>
+            <a:ext cx="5760000" cy="487365"/>
+          </a:xfrm>
+          <a:prstGeom prst="rect">
+            <a:avLst/>
+          </a:prstGeom>
+          <a:noFill/>
+        </p:spPr>
+        <p:txBody>
+          <a:bodyPr wrap="none">
+            <a:noAutofit/>
+          </a:bodyPr>
+          <a:lstStyle/>
+          <a:p>
+            <a:r>
+              <a:rPr sz="2646" dirty="0" err="1">
                 <a:solidFill>
                   <a:srgbClr val="FF6B35"/>
                 </a:solidFill>
@@ -6225,11 +6308,14 @@
               <a:t>张爱玲</a:t>
             </a:r>
             <a:r>
-              <a:rPr sz="2646">
+              <a:rPr sz="2646" dirty="0" err="1">
                 <a:latin typeface="华康少女文字W5(P)"/>
               </a:rPr>
               <a:t>有一句话</a:t>
             </a:r>
+            <a:endParaRPr sz="2646" dirty="0">
+              <a:latin typeface="华康少女文字W5(P)"/>
+            </a:endParaRPr>
           </a:p>
         </p:txBody>
       </p:sp>
@@ -6242,7 +6328,7 @@
 </file>
 
 <file path=ppt/slides/slide7.xml><?xml version="1.0" encoding="utf-8"?>
-<p:sld xmlns:a="http://schemas.openxmlformats.org/drawingml/2006/main" xmlns:p="http://schemas.openxmlformats.org/presentationml/2006/main" xmlns:r="http://schemas.openxmlformats.org/officeDocument/2006/relationships">
+<p:sld xmlns:a="http://schemas.openxmlformats.org/drawingml/2006/main" xmlns:r="http://schemas.openxmlformats.org/officeDocument/2006/relationships" xmlns:p="http://schemas.openxmlformats.org/presentationml/2006/main">
   <p:cSld>
     <p:spTree>
       <p:nvGrpSpPr>
@@ -6250,7 +6336,14 @@
         <p:cNvGrpSpPr/>
         <p:nvPr/>
       </p:nvGrpSpPr>
-      <p:grpSpPr/>
+      <p:grpSpPr>
+        <a:xfrm>
+          <a:off x="0" y="0"/>
+          <a:ext cx="0" cy="0"/>
+          <a:chOff x="0" y="0"/>
+          <a:chExt cx="0" cy="0"/>
+        </a:xfrm>
+      </p:grpSpPr>
       <p:pic>
         <p:nvPicPr>
           <p:cNvPr id="2" name="Picture 1" descr="image.jpg"/>
@@ -6283,26 +6376,29 @@
         </p:nvSpPr>
         <p:spPr>
           <a:xfrm>
-            <a:off x="914400" y="5682479"/>
-            <a:ext cx="9360000" cy="883920"/>
-          </a:xfrm>
-          <a:prstGeom prst="rect">
-            <a:avLst/>
-          </a:prstGeom>
-          <a:noFill/>
-        </p:spPr>
-        <p:txBody>
-          <a:bodyPr wrap="none">
-            <a:noAutofit/>
-          </a:bodyPr>
-          <a:lstStyle/>
-          <a:p>
-            <a:r>
-              <a:rPr sz="4800">
+            <a:off x="914399" y="5682479"/>
+            <a:ext cx="5760000" cy="883920"/>
+          </a:xfrm>
+          <a:prstGeom prst="rect">
+            <a:avLst/>
+          </a:prstGeom>
+          <a:noFill/>
+        </p:spPr>
+        <p:txBody>
+          <a:bodyPr wrap="none">
+            <a:noAutofit/>
+          </a:bodyPr>
+          <a:lstStyle/>
+          <a:p>
+            <a:r>
+              <a:rPr sz="4800" dirty="0" err="1">
                 <a:latin typeface="华康少女文字W5(P)"/>
               </a:rPr>
               <a:t>谁占上风</a:t>
             </a:r>
+            <a:endParaRPr sz="4800" dirty="0">
+              <a:latin typeface="华康少女文字W5(P)"/>
+            </a:endParaRPr>
           </a:p>
         </p:txBody>
       </p:sp>
@@ -6314,32 +6410,41 @@
         </p:nvSpPr>
         <p:spPr>
           <a:xfrm>
-            <a:off x="914400" y="4831665"/>
-            <a:ext cx="9360000" cy="724814"/>
-          </a:xfrm>
-          <a:prstGeom prst="rect">
-            <a:avLst/>
-          </a:prstGeom>
-          <a:noFill/>
-        </p:spPr>
-        <p:txBody>
-          <a:bodyPr wrap="none">
-            <a:noAutofit/>
-          </a:bodyPr>
-          <a:lstStyle/>
-          <a:p>
-            <a:r>
-              <a:rPr sz="3936">
+            <a:off x="914399" y="4831665"/>
+            <a:ext cx="5760000" cy="724814"/>
+          </a:xfrm>
+          <a:prstGeom prst="rect">
+            <a:avLst/>
+          </a:prstGeom>
+          <a:noFill/>
+        </p:spPr>
+        <p:txBody>
+          <a:bodyPr wrap="none">
+            <a:noAutofit/>
+          </a:bodyPr>
+          <a:lstStyle/>
+          <a:p>
+            <a:r>
+              <a:rPr sz="3936" dirty="0" err="1">
                 <a:latin typeface="华康少女文字W5(P)"/>
               </a:rPr>
               <a:t>谁</a:t>
             </a:r>
             <a:r>
-              <a:rPr sz="3936">
+              <a:rPr sz="3936" dirty="0" err="1">
+                <a:solidFill>
+                  <a:srgbClr val="FF0000"/>
+                </a:solidFill>
                 <a:latin typeface="文鼎霹雳体"/>
               </a:rPr>
               <a:t>不讲道理</a:t>
             </a:r>
+            <a:endParaRPr sz="3936" dirty="0">
+              <a:solidFill>
+                <a:srgbClr val="FF0000"/>
+              </a:solidFill>
+              <a:latin typeface="文鼎霹雳体"/>
+            </a:endParaRPr>
           </a:p>
         </p:txBody>
       </p:sp>
@@ -6351,146 +6456,182 @@
         </p:nvSpPr>
         <p:spPr>
           <a:xfrm>
-            <a:off x="914400" y="4111317"/>
-            <a:ext cx="9360000" cy="594347"/>
-          </a:xfrm>
-          <a:prstGeom prst="rect">
-            <a:avLst/>
-          </a:prstGeom>
-          <a:noFill/>
-        </p:spPr>
-        <p:txBody>
-          <a:bodyPr wrap="none">
-            <a:noAutofit/>
-          </a:bodyPr>
-          <a:lstStyle/>
-          <a:p>
-            <a:r>
-              <a:rPr sz="3227">
+            <a:off x="914399" y="4111317"/>
+            <a:ext cx="5760000" cy="594347"/>
+          </a:xfrm>
+          <a:prstGeom prst="rect">
+            <a:avLst/>
+          </a:prstGeom>
+          <a:noFill/>
+        </p:spPr>
+        <p:txBody>
+          <a:bodyPr wrap="none">
+            <a:noAutofit/>
+          </a:bodyPr>
+          <a:lstStyle/>
+          <a:p>
+            <a:r>
+              <a:rPr sz="3227" dirty="0" err="1">
                 <a:latin typeface="华康少女文字W5(P)"/>
               </a:rPr>
               <a:t>结婚之后嘛</a:t>
             </a:r>
-          </a:p>
-        </p:txBody>
-      </p:sp>
-      <p:sp>
-        <p:nvSpPr>
-          <p:cNvPr id="6" name="TextBox 5"/>
+            <a:endParaRPr sz="3227" dirty="0">
+              <a:latin typeface="华康少女文字W5(P)"/>
+            </a:endParaRPr>
+          </a:p>
+        </p:txBody>
+      </p:sp>
+      <p:sp>
+        <p:nvSpPr>
+          <p:cNvPr id="14" name="TextBox 3">
+            <a:extLst>
+              <a:ext uri="{FF2B5EF4-FFF2-40B4-BE49-F238E27FC236}">
+                <a16:creationId xmlns:a16="http://schemas.microsoft.com/office/drawing/2014/main" id="{7DBA7850-AF35-5D4C-6213-D60CEE8518A3}"/>
+              </a:ext>
+            </a:extLst>
+          </p:cNvPr>
           <p:cNvSpPr txBox="1"/>
           <p:nvPr/>
         </p:nvSpPr>
         <p:spPr>
           <a:xfrm rot="16200000">
-            <a:off x="-5121960" y="5654640"/>
-            <a:ext cx="9360000" cy="883920"/>
-          </a:xfrm>
-          <a:prstGeom prst="rect">
-            <a:avLst/>
-          </a:prstGeom>
-          <a:noFill/>
-        </p:spPr>
-        <p:txBody>
-          <a:bodyPr wrap="none">
-            <a:noAutofit/>
-          </a:bodyPr>
-          <a:lstStyle/>
-          <a:p>
-            <a:r>
-              <a:rPr sz="4800">
+            <a:off x="-2407560" y="883363"/>
+            <a:ext cx="5760000" cy="883920"/>
+          </a:xfrm>
+          <a:prstGeom prst="rect">
+            <a:avLst/>
+          </a:prstGeom>
+          <a:noFill/>
+        </p:spPr>
+        <p:txBody>
+          <a:bodyPr wrap="none">
+            <a:noAutofit/>
+          </a:bodyPr>
+          <a:lstStyle/>
+          <a:p>
+            <a:r>
+              <a:rPr sz="4800" dirty="0" err="1">
                 <a:latin typeface="华康少女文字W5(P)"/>
               </a:rPr>
               <a:t>她说</a:t>
             </a:r>
-          </a:p>
-        </p:txBody>
-      </p:sp>
-      <p:sp>
-        <p:nvSpPr>
-          <p:cNvPr id="7" name="TextBox 6"/>
+            <a:endParaRPr sz="4800" dirty="0">
+              <a:latin typeface="华康少女文字W5(P)"/>
+            </a:endParaRPr>
+          </a:p>
+        </p:txBody>
+      </p:sp>
+      <p:sp>
+        <p:nvSpPr>
+          <p:cNvPr id="15" name="TextBox 4">
+            <a:extLst>
+              <a:ext uri="{FF2B5EF4-FFF2-40B4-BE49-F238E27FC236}">
+                <a16:creationId xmlns:a16="http://schemas.microsoft.com/office/drawing/2014/main" id="{1BD4313B-0331-54D5-BF20-851B023DA15A}"/>
+              </a:ext>
+            </a:extLst>
+          </p:cNvPr>
           <p:cNvSpPr txBox="1"/>
           <p:nvPr/>
         </p:nvSpPr>
         <p:spPr>
           <a:xfrm rot="16200000">
-            <a:off x="-5926327" y="5734192"/>
-            <a:ext cx="9360000" cy="724814"/>
-          </a:xfrm>
-          <a:prstGeom prst="rect">
-            <a:avLst/>
-          </a:prstGeom>
-          <a:noFill/>
-        </p:spPr>
-        <p:txBody>
-          <a:bodyPr wrap="none">
-            <a:noAutofit/>
-          </a:bodyPr>
-          <a:lstStyle/>
-          <a:p>
-            <a:r>
-              <a:rPr sz="3936">
+            <a:off x="-3211927" y="962915"/>
+            <a:ext cx="5760000" cy="724814"/>
+          </a:xfrm>
+          <a:prstGeom prst="rect">
+            <a:avLst/>
+          </a:prstGeom>
+          <a:noFill/>
+        </p:spPr>
+        <p:txBody>
+          <a:bodyPr wrap="none">
+            <a:noAutofit/>
+          </a:bodyPr>
+          <a:lstStyle/>
+          <a:p>
+            <a:r>
+              <a:rPr sz="3936" dirty="0" err="1">
                 <a:latin typeface="华康少女文字W5(P)"/>
               </a:rPr>
               <a:t>我觉得</a:t>
             </a:r>
-          </a:p>
-        </p:txBody>
-      </p:sp>
-      <p:sp>
-        <p:nvSpPr>
-          <p:cNvPr id="8" name="TextBox 7"/>
+            <a:endParaRPr sz="3936" dirty="0">
+              <a:latin typeface="华康少女文字W5(P)"/>
+            </a:endParaRPr>
+          </a:p>
+        </p:txBody>
+      </p:sp>
+      <p:sp>
+        <p:nvSpPr>
+          <p:cNvPr id="16" name="TextBox 5">
+            <a:extLst>
+              <a:ext uri="{FF2B5EF4-FFF2-40B4-BE49-F238E27FC236}">
+                <a16:creationId xmlns:a16="http://schemas.microsoft.com/office/drawing/2014/main" id="{B36725BD-E230-C2E0-4267-8B47C6AEF5F0}"/>
+              </a:ext>
+            </a:extLst>
+          </p:cNvPr>
           <p:cNvSpPr txBox="1"/>
           <p:nvPr/>
         </p:nvSpPr>
         <p:spPr>
           <a:xfrm rot="16200000">
-            <a:off x="-6585908" y="5799426"/>
-            <a:ext cx="9360000" cy="594347"/>
-          </a:xfrm>
-          <a:prstGeom prst="rect">
-            <a:avLst/>
-          </a:prstGeom>
-          <a:noFill/>
-        </p:spPr>
-        <p:txBody>
-          <a:bodyPr wrap="none">
-            <a:noAutofit/>
-          </a:bodyPr>
-          <a:lstStyle/>
-          <a:p>
-            <a:r>
-              <a:rPr sz="3227">
+            <a:off x="-3871508" y="1028149"/>
+            <a:ext cx="5760000" cy="594347"/>
+          </a:xfrm>
+          <a:prstGeom prst="rect">
+            <a:avLst/>
+          </a:prstGeom>
+          <a:noFill/>
+        </p:spPr>
+        <p:txBody>
+          <a:bodyPr wrap="none">
+            <a:noAutofit/>
+          </a:bodyPr>
+          <a:lstStyle/>
+          <a:p>
+            <a:r>
+              <a:rPr sz="3227" dirty="0" err="1">
                 <a:latin typeface="华康少女文字W5(P)"/>
               </a:rPr>
               <a:t>讲得很对的</a:t>
             </a:r>
-          </a:p>
-        </p:txBody>
-      </p:sp>
-      <p:sp>
-        <p:nvSpPr>
-          <p:cNvPr id="9" name="TextBox 8"/>
+            <a:endParaRPr sz="3227" dirty="0">
+              <a:latin typeface="华康少女文字W5(P)"/>
+            </a:endParaRPr>
+          </a:p>
+        </p:txBody>
+      </p:sp>
+      <p:sp>
+        <p:nvSpPr>
+          <p:cNvPr id="17" name="TextBox 6">
+            <a:extLst>
+              <a:ext uri="{FF2B5EF4-FFF2-40B4-BE49-F238E27FC236}">
+                <a16:creationId xmlns:a16="http://schemas.microsoft.com/office/drawing/2014/main" id="{4F48EAB3-1BED-36CC-1BA8-2F0BD538C546}"/>
+              </a:ext>
+            </a:extLst>
+          </p:cNvPr>
           <p:cNvSpPr txBox="1"/>
           <p:nvPr/>
         </p:nvSpPr>
         <p:spPr>
           <a:xfrm rot="16200000">
-            <a:off x="-7126764" y="5852917"/>
-            <a:ext cx="9360000" cy="487365"/>
-          </a:xfrm>
-          <a:prstGeom prst="rect">
-            <a:avLst/>
-          </a:prstGeom>
-          <a:noFill/>
-        </p:spPr>
-        <p:txBody>
-          <a:bodyPr wrap="none">
-            <a:noAutofit/>
-          </a:bodyPr>
-          <a:lstStyle/>
-          <a:p>
-            <a:r>
-              <a:rPr sz="2646">
+            <a:off x="-4412364" y="1081640"/>
+            <a:ext cx="5760000" cy="487365"/>
+          </a:xfrm>
+          <a:prstGeom prst="rect">
+            <a:avLst/>
+          </a:prstGeom>
+          <a:noFill/>
+        </p:spPr>
+        <p:txBody>
+          <a:bodyPr wrap="none">
+            <a:noAutofit/>
+          </a:bodyPr>
+          <a:lstStyle/>
+          <a:p>
+            <a:r>
+              <a:rPr sz="2646" dirty="0" err="1">
                 <a:solidFill>
                   <a:srgbClr val="FF6B35"/>
                 </a:solidFill>
@@ -6499,11 +6640,14 @@
               <a:t>张爱玲</a:t>
             </a:r>
             <a:r>
-              <a:rPr sz="2646">
+              <a:rPr sz="2646" dirty="0" err="1">
                 <a:latin typeface="华康少女文字W5(P)"/>
               </a:rPr>
               <a:t>有一句话</a:t>
             </a:r>
+            <a:endParaRPr sz="2646" dirty="0">
+              <a:latin typeface="华康少女文字W5(P)"/>
+            </a:endParaRPr>
           </a:p>
         </p:txBody>
       </p:sp>
@@ -6516,7 +6660,7 @@
 </file>
 
 <file path=ppt/slides/slide8.xml><?xml version="1.0" encoding="utf-8"?>
-<p:sld xmlns:a="http://schemas.openxmlformats.org/drawingml/2006/main" xmlns:p="http://schemas.openxmlformats.org/presentationml/2006/main" xmlns:r="http://schemas.openxmlformats.org/officeDocument/2006/relationships">
+<p:sld xmlns:a="http://schemas.openxmlformats.org/drawingml/2006/main" xmlns:r="http://schemas.openxmlformats.org/officeDocument/2006/relationships" xmlns:p="http://schemas.openxmlformats.org/presentationml/2006/main">
   <p:cSld>
     <p:spTree>
       <p:nvGrpSpPr>
@@ -6524,7 +6668,14 @@
         <p:cNvGrpSpPr/>
         <p:nvPr/>
       </p:nvGrpSpPr>
-      <p:grpSpPr/>
+      <p:grpSpPr>
+        <a:xfrm>
+          <a:off x="0" y="0"/>
+          <a:ext cx="0" cy="0"/>
+          <a:chOff x="0" y="0"/>
+          <a:chExt cx="0" cy="0"/>
+        </a:xfrm>
+      </p:grpSpPr>
       <p:pic>
         <p:nvPicPr>
           <p:cNvPr id="2" name="Picture 1" descr="image.jpg"/>
@@ -6558,7 +6709,155 @@
         <p:spPr>
           <a:xfrm>
             <a:off x="914400" y="5682479"/>
-            <a:ext cx="9360000" cy="883920"/>
+            <a:ext cx="5760000" cy="883920"/>
+          </a:xfrm>
+          <a:prstGeom prst="rect">
+            <a:avLst/>
+          </a:prstGeom>
+          <a:noFill/>
+        </p:spPr>
+        <p:txBody>
+          <a:bodyPr wrap="none">
+            <a:noAutofit/>
+          </a:bodyPr>
+          <a:lstStyle/>
+          <a:p>
+            <a:r>
+              <a:rPr sz="4800" dirty="0" err="1">
+                <a:latin typeface="华康少女文字W5(P)"/>
+              </a:rPr>
+              <a:t>我们家里那个</a:t>
+            </a:r>
+            <a:endParaRPr sz="4800" dirty="0">
+              <a:latin typeface="华康少女文字W5(P)"/>
+            </a:endParaRPr>
+          </a:p>
+        </p:txBody>
+      </p:sp>
+      <p:sp>
+        <p:nvSpPr>
+          <p:cNvPr id="4" name="TextBox 3"/>
+          <p:cNvSpPr txBox="1"/>
+          <p:nvPr/>
+        </p:nvSpPr>
+        <p:spPr>
+          <a:xfrm rot="5400000">
+            <a:off x="2139387" y="5760932"/>
+            <a:ext cx="5760000" cy="883920"/>
+          </a:xfrm>
+          <a:prstGeom prst="rect">
+            <a:avLst/>
+          </a:prstGeom>
+          <a:noFill/>
+        </p:spPr>
+        <p:txBody>
+          <a:bodyPr wrap="none">
+            <a:noAutofit/>
+          </a:bodyPr>
+          <a:lstStyle/>
+          <a:p>
+            <a:r>
+              <a:rPr sz="4800" dirty="0" err="1">
+                <a:latin typeface="华康少女文字W5(P)"/>
+              </a:rPr>
+              <a:t>谁占上风</a:t>
+            </a:r>
+            <a:endParaRPr sz="4800" dirty="0">
+              <a:latin typeface="华康少女文字W5(P)"/>
+            </a:endParaRPr>
+          </a:p>
+        </p:txBody>
+      </p:sp>
+      <p:sp>
+        <p:nvSpPr>
+          <p:cNvPr id="5" name="TextBox 4"/>
+          <p:cNvSpPr txBox="1"/>
+          <p:nvPr/>
+        </p:nvSpPr>
+        <p:spPr>
+          <a:xfrm rot="5400000">
+            <a:off x="2943754" y="5840484"/>
+            <a:ext cx="5760000" cy="724814"/>
+          </a:xfrm>
+          <a:prstGeom prst="rect">
+            <a:avLst/>
+          </a:prstGeom>
+          <a:noFill/>
+        </p:spPr>
+        <p:txBody>
+          <a:bodyPr wrap="none">
+            <a:noAutofit/>
+          </a:bodyPr>
+          <a:lstStyle/>
+          <a:p>
+            <a:r>
+              <a:rPr sz="3936" dirty="0" err="1">
+                <a:latin typeface="华康少女文字W5(P)"/>
+              </a:rPr>
+              <a:t>谁</a:t>
+            </a:r>
+            <a:r>
+              <a:rPr sz="3936" dirty="0" err="1">
+                <a:solidFill>
+                  <a:srgbClr val="FF0000"/>
+                </a:solidFill>
+                <a:latin typeface="文鼎霹雳体"/>
+              </a:rPr>
+              <a:t>不讲道理</a:t>
+            </a:r>
+            <a:endParaRPr sz="3936" dirty="0">
+              <a:solidFill>
+                <a:srgbClr val="FF0000"/>
+              </a:solidFill>
+              <a:latin typeface="文鼎霹雳体"/>
+            </a:endParaRPr>
+          </a:p>
+        </p:txBody>
+      </p:sp>
+      <p:sp>
+        <p:nvSpPr>
+          <p:cNvPr id="6" name="TextBox 5"/>
+          <p:cNvSpPr txBox="1"/>
+          <p:nvPr/>
+        </p:nvSpPr>
+        <p:spPr>
+          <a:xfrm rot="5400000">
+            <a:off x="3603335" y="5905718"/>
+            <a:ext cx="5760000" cy="594347"/>
+          </a:xfrm>
+          <a:prstGeom prst="rect">
+            <a:avLst/>
+          </a:prstGeom>
+          <a:noFill/>
+        </p:spPr>
+        <p:txBody>
+          <a:bodyPr wrap="none">
+            <a:noAutofit/>
+          </a:bodyPr>
+          <a:lstStyle/>
+          <a:p>
+            <a:r>
+              <a:rPr sz="3227" dirty="0" err="1">
+                <a:latin typeface="华康少女文字W5(P)"/>
+              </a:rPr>
+              <a:t>结婚之后嘛</a:t>
+            </a:r>
+            <a:endParaRPr sz="3227" dirty="0">
+              <a:latin typeface="华康少女文字W5(P)"/>
+            </a:endParaRPr>
+          </a:p>
+        </p:txBody>
+      </p:sp>
+      <p:sp>
+        <p:nvSpPr>
+          <p:cNvPr id="7" name="TextBox 6"/>
+          <p:cNvSpPr txBox="1"/>
+          <p:nvPr/>
+        </p:nvSpPr>
+        <p:spPr>
+          <a:xfrm>
+            <a:off x="6649569" y="2547375"/>
+            <a:ext cx="5760000" cy="883920"/>
           </a:xfrm>
           <a:prstGeom prst="rect">
             <a:avLst/>
@@ -6575,52 +6874,21 @@
               <a:rPr sz="4800">
                 <a:latin typeface="华康少女文字W5(P)"/>
               </a:rPr>
-              <a:t>我们家里那个</a:t>
-            </a:r>
-          </a:p>
-        </p:txBody>
-      </p:sp>
-      <p:sp>
-        <p:nvSpPr>
-          <p:cNvPr id="4" name="TextBox 3"/>
-          <p:cNvSpPr txBox="1"/>
-          <p:nvPr/>
-        </p:nvSpPr>
-        <p:spPr>
-          <a:xfrm rot="5400000">
-            <a:off x="2619960" y="5654640"/>
-            <a:ext cx="9360000" cy="883920"/>
-          </a:xfrm>
-          <a:prstGeom prst="rect">
-            <a:avLst/>
-          </a:prstGeom>
-          <a:noFill/>
-        </p:spPr>
-        <p:txBody>
-          <a:bodyPr wrap="none">
-            <a:noAutofit/>
-          </a:bodyPr>
-          <a:lstStyle/>
-          <a:p>
-            <a:r>
-              <a:rPr sz="4800">
-                <a:latin typeface="华康少女文字W5(P)"/>
-              </a:rPr>
-              <a:t>谁占上风</a:t>
-            </a:r>
-          </a:p>
-        </p:txBody>
-      </p:sp>
-      <p:sp>
-        <p:nvSpPr>
-          <p:cNvPr id="5" name="TextBox 4"/>
-          <p:cNvSpPr txBox="1"/>
-          <p:nvPr/>
-        </p:nvSpPr>
-        <p:spPr>
-          <a:xfrm rot="5400000">
-            <a:off x="3424327" y="5734192"/>
-            <a:ext cx="9360000" cy="724814"/>
+              <a:t>她说</a:t>
+            </a:r>
+          </a:p>
+        </p:txBody>
+      </p:sp>
+      <p:sp>
+        <p:nvSpPr>
+          <p:cNvPr id="8" name="TextBox 7"/>
+          <p:cNvSpPr txBox="1"/>
+          <p:nvPr/>
+        </p:nvSpPr>
+        <p:spPr>
+          <a:xfrm>
+            <a:off x="6649569" y="1696561"/>
+            <a:ext cx="5760000" cy="724814"/>
           </a:xfrm>
           <a:prstGeom prst="rect">
             <a:avLst/>
@@ -6637,105 +6905,6 @@
               <a:rPr sz="3936">
                 <a:latin typeface="华康少女文字W5(P)"/>
               </a:rPr>
-              <a:t>谁</a:t>
-            </a:r>
-            <a:r>
-              <a:rPr sz="3936">
-                <a:latin typeface="文鼎霹雳体"/>
-              </a:rPr>
-              <a:t>不讲道理</a:t>
-            </a:r>
-          </a:p>
-        </p:txBody>
-      </p:sp>
-      <p:sp>
-        <p:nvSpPr>
-          <p:cNvPr id="6" name="TextBox 5"/>
-          <p:cNvSpPr txBox="1"/>
-          <p:nvPr/>
-        </p:nvSpPr>
-        <p:spPr>
-          <a:xfrm rot="5400000">
-            <a:off x="4083908" y="5799426"/>
-            <a:ext cx="9360000" cy="594347"/>
-          </a:xfrm>
-          <a:prstGeom prst="rect">
-            <a:avLst/>
-          </a:prstGeom>
-          <a:noFill/>
-        </p:spPr>
-        <p:txBody>
-          <a:bodyPr wrap="none">
-            <a:noAutofit/>
-          </a:bodyPr>
-          <a:lstStyle/>
-          <a:p>
-            <a:r>
-              <a:rPr sz="3227">
-                <a:latin typeface="华康少女文字W5(P)"/>
-              </a:rPr>
-              <a:t>结婚之后嘛</a:t>
-            </a:r>
-          </a:p>
-        </p:txBody>
-      </p:sp>
-      <p:sp>
-        <p:nvSpPr>
-          <p:cNvPr id="7" name="TextBox 6"/>
-          <p:cNvSpPr txBox="1"/>
-          <p:nvPr/>
-        </p:nvSpPr>
-        <p:spPr>
-          <a:xfrm>
-            <a:off x="9061082" y="5682479"/>
-            <a:ext cx="9360000" cy="883920"/>
-          </a:xfrm>
-          <a:prstGeom prst="rect">
-            <a:avLst/>
-          </a:prstGeom>
-          <a:noFill/>
-        </p:spPr>
-        <p:txBody>
-          <a:bodyPr wrap="none">
-            <a:noAutofit/>
-          </a:bodyPr>
-          <a:lstStyle/>
-          <a:p>
-            <a:r>
-              <a:rPr sz="4800">
-                <a:latin typeface="华康少女文字W5(P)"/>
-              </a:rPr>
-              <a:t>她说</a:t>
-            </a:r>
-          </a:p>
-        </p:txBody>
-      </p:sp>
-      <p:sp>
-        <p:nvSpPr>
-          <p:cNvPr id="8" name="TextBox 7"/>
-          <p:cNvSpPr txBox="1"/>
-          <p:nvPr/>
-        </p:nvSpPr>
-        <p:spPr>
-          <a:xfrm>
-            <a:off x="9061082" y="4831665"/>
-            <a:ext cx="9360000" cy="724814"/>
-          </a:xfrm>
-          <a:prstGeom prst="rect">
-            <a:avLst/>
-          </a:prstGeom>
-          <a:noFill/>
-        </p:spPr>
-        <p:txBody>
-          <a:bodyPr wrap="none">
-            <a:noAutofit/>
-          </a:bodyPr>
-          <a:lstStyle/>
-          <a:p>
-            <a:r>
-              <a:rPr sz="3936">
-                <a:latin typeface="华康少女文字W5(P)"/>
-              </a:rPr>
               <a:t>我觉得</a:t>
             </a:r>
           </a:p>
@@ -6749,26 +6918,29 @@
         </p:nvSpPr>
         <p:spPr>
           <a:xfrm>
-            <a:off x="9061082" y="4111317"/>
-            <a:ext cx="9360000" cy="594347"/>
-          </a:xfrm>
-          <a:prstGeom prst="rect">
-            <a:avLst/>
-          </a:prstGeom>
-          <a:noFill/>
-        </p:spPr>
-        <p:txBody>
-          <a:bodyPr wrap="none">
-            <a:noAutofit/>
-          </a:bodyPr>
-          <a:lstStyle/>
-          <a:p>
-            <a:r>
-              <a:rPr sz="3227">
+            <a:off x="6649569" y="976213"/>
+            <a:ext cx="5760000" cy="594347"/>
+          </a:xfrm>
+          <a:prstGeom prst="rect">
+            <a:avLst/>
+          </a:prstGeom>
+          <a:noFill/>
+        </p:spPr>
+        <p:txBody>
+          <a:bodyPr wrap="none">
+            <a:noAutofit/>
+          </a:bodyPr>
+          <a:lstStyle/>
+          <a:p>
+            <a:r>
+              <a:rPr sz="3227" dirty="0" err="1">
                 <a:latin typeface="华康少女文字W5(P)"/>
               </a:rPr>
               <a:t>讲得很对的</a:t>
             </a:r>
+            <a:endParaRPr sz="3227" dirty="0">
+              <a:latin typeface="华康少女文字W5(P)"/>
+            </a:endParaRPr>
           </a:p>
         </p:txBody>
       </p:sp>
@@ -6780,22 +6952,22 @@
         </p:nvSpPr>
         <p:spPr>
           <a:xfrm>
-            <a:off x="9061082" y="3497952"/>
-            <a:ext cx="9360000" cy="487365"/>
-          </a:xfrm>
-          <a:prstGeom prst="rect">
-            <a:avLst/>
-          </a:prstGeom>
-          <a:noFill/>
-        </p:spPr>
-        <p:txBody>
-          <a:bodyPr wrap="none">
-            <a:noAutofit/>
-          </a:bodyPr>
-          <a:lstStyle/>
-          <a:p>
-            <a:r>
-              <a:rPr sz="2646">
+            <a:off x="6649568" y="362848"/>
+            <a:ext cx="5760000" cy="487365"/>
+          </a:xfrm>
+          <a:prstGeom prst="rect">
+            <a:avLst/>
+          </a:prstGeom>
+          <a:noFill/>
+        </p:spPr>
+        <p:txBody>
+          <a:bodyPr wrap="none">
+            <a:noAutofit/>
+          </a:bodyPr>
+          <a:lstStyle/>
+          <a:p>
+            <a:r>
+              <a:rPr sz="2646" dirty="0" err="1">
                 <a:solidFill>
                   <a:srgbClr val="FF6B35"/>
                 </a:solidFill>
@@ -6804,11 +6976,14 @@
               <a:t>张爱玲</a:t>
             </a:r>
             <a:r>
-              <a:rPr sz="2646">
+              <a:rPr sz="2646" dirty="0" err="1">
                 <a:latin typeface="华康少女文字W5(P)"/>
               </a:rPr>
               <a:t>有一句话</a:t>
             </a:r>
+            <a:endParaRPr sz="2646" dirty="0">
+              <a:latin typeface="华康少女文字W5(P)"/>
+            </a:endParaRPr>
           </a:p>
         </p:txBody>
       </p:sp>
@@ -6821,7 +6996,7 @@
 </file>
 
 <file path=ppt/slides/slide9.xml><?xml version="1.0" encoding="utf-8"?>
-<p:sld xmlns:a="http://schemas.openxmlformats.org/drawingml/2006/main" xmlns:p="http://schemas.openxmlformats.org/presentationml/2006/main" xmlns:r="http://schemas.openxmlformats.org/officeDocument/2006/relationships">
+<p:sld xmlns:a="http://schemas.openxmlformats.org/drawingml/2006/main" xmlns:r="http://schemas.openxmlformats.org/officeDocument/2006/relationships" xmlns:p="http://schemas.openxmlformats.org/presentationml/2006/main">
   <p:cSld>
     <p:spTree>
       <p:nvGrpSpPr>
@@ -6829,7 +7004,14 @@
         <p:cNvGrpSpPr/>
         <p:nvPr/>
       </p:nvGrpSpPr>
-      <p:grpSpPr/>
+      <p:grpSpPr>
+        <a:xfrm>
+          <a:off x="0" y="0"/>
+          <a:ext cx="0" cy="0"/>
+          <a:chOff x="0" y="0"/>
+          <a:chExt cx="0" cy="0"/>
+        </a:xfrm>
+      </p:grpSpPr>
       <p:pic>
         <p:nvPicPr>
           <p:cNvPr id="2" name="Picture 1" descr="image.jpg"/>
@@ -6863,7 +7045,7 @@
         <p:spPr>
           <a:xfrm>
             <a:off x="914400" y="5682479"/>
-            <a:ext cx="9360000" cy="883920"/>
+            <a:ext cx="5760000" cy="883920"/>
           </a:xfrm>
           <a:prstGeom prst="rect">
             <a:avLst/>
@@ -6894,7 +7076,216 @@
         <p:spPr>
           <a:xfrm>
             <a:off x="914400" y="4831665"/>
-            <a:ext cx="9360000" cy="724814"/>
+            <a:ext cx="5760000" cy="724814"/>
+          </a:xfrm>
+          <a:prstGeom prst="rect">
+            <a:avLst/>
+          </a:prstGeom>
+          <a:noFill/>
+        </p:spPr>
+        <p:txBody>
+          <a:bodyPr wrap="none">
+            <a:noAutofit/>
+          </a:bodyPr>
+          <a:lstStyle/>
+          <a:p>
+            <a:r>
+              <a:rPr sz="3936" dirty="0" err="1">
+                <a:latin typeface="华康少女文字W5(P)"/>
+              </a:rPr>
+              <a:t>我们家里那个</a:t>
+            </a:r>
+            <a:endParaRPr sz="3936" dirty="0">
+              <a:latin typeface="华康少女文字W5(P)"/>
+            </a:endParaRPr>
+          </a:p>
+        </p:txBody>
+      </p:sp>
+      <p:sp>
+        <p:nvSpPr>
+          <p:cNvPr id="12" name="TextBox 3">
+            <a:extLst>
+              <a:ext uri="{FF2B5EF4-FFF2-40B4-BE49-F238E27FC236}">
+                <a16:creationId xmlns:a16="http://schemas.microsoft.com/office/drawing/2014/main" id="{D54041BF-9711-B393-E090-66FD9B04D2CE}"/>
+              </a:ext>
+            </a:extLst>
+          </p:cNvPr>
+          <p:cNvSpPr txBox="1"/>
+          <p:nvPr/>
+        </p:nvSpPr>
+        <p:spPr>
+          <a:xfrm rot="5400000">
+            <a:off x="1534946" y="4831034"/>
+            <a:ext cx="5760000" cy="883920"/>
+          </a:xfrm>
+          <a:prstGeom prst="rect">
+            <a:avLst/>
+          </a:prstGeom>
+          <a:noFill/>
+        </p:spPr>
+        <p:txBody>
+          <a:bodyPr wrap="none">
+            <a:noAutofit/>
+          </a:bodyPr>
+          <a:lstStyle/>
+          <a:p>
+            <a:r>
+              <a:rPr sz="4800" dirty="0" err="1">
+                <a:latin typeface="华康少女文字W5(P)"/>
+              </a:rPr>
+              <a:t>谁占上风</a:t>
+            </a:r>
+            <a:endParaRPr sz="4800" dirty="0">
+              <a:latin typeface="华康少女文字W5(P)"/>
+            </a:endParaRPr>
+          </a:p>
+        </p:txBody>
+      </p:sp>
+      <p:sp>
+        <p:nvSpPr>
+          <p:cNvPr id="13" name="TextBox 4">
+            <a:extLst>
+              <a:ext uri="{FF2B5EF4-FFF2-40B4-BE49-F238E27FC236}">
+                <a16:creationId xmlns:a16="http://schemas.microsoft.com/office/drawing/2014/main" id="{21A199D4-249A-6ED6-AC9C-D2382D475650}"/>
+              </a:ext>
+            </a:extLst>
+          </p:cNvPr>
+          <p:cNvSpPr txBox="1"/>
+          <p:nvPr/>
+        </p:nvSpPr>
+        <p:spPr>
+          <a:xfrm rot="5400000">
+            <a:off x="2339313" y="4910586"/>
+            <a:ext cx="5760000" cy="724814"/>
+          </a:xfrm>
+          <a:prstGeom prst="rect">
+            <a:avLst/>
+          </a:prstGeom>
+          <a:noFill/>
+        </p:spPr>
+        <p:txBody>
+          <a:bodyPr wrap="none">
+            <a:noAutofit/>
+          </a:bodyPr>
+          <a:lstStyle/>
+          <a:p>
+            <a:r>
+              <a:rPr sz="3936" dirty="0" err="1">
+                <a:latin typeface="华康少女文字W5(P)"/>
+              </a:rPr>
+              <a:t>谁</a:t>
+            </a:r>
+            <a:r>
+              <a:rPr sz="3936" dirty="0" err="1">
+                <a:solidFill>
+                  <a:srgbClr val="FF0000"/>
+                </a:solidFill>
+                <a:latin typeface="文鼎霹雳体"/>
+              </a:rPr>
+              <a:t>不讲道理</a:t>
+            </a:r>
+            <a:endParaRPr sz="3936" dirty="0">
+              <a:solidFill>
+                <a:srgbClr val="FF0000"/>
+              </a:solidFill>
+              <a:latin typeface="文鼎霹雳体"/>
+            </a:endParaRPr>
+          </a:p>
+        </p:txBody>
+      </p:sp>
+      <p:sp>
+        <p:nvSpPr>
+          <p:cNvPr id="14" name="TextBox 5">
+            <a:extLst>
+              <a:ext uri="{FF2B5EF4-FFF2-40B4-BE49-F238E27FC236}">
+                <a16:creationId xmlns:a16="http://schemas.microsoft.com/office/drawing/2014/main" id="{F8CFDC30-2C84-DB7F-058C-E6634A32096B}"/>
+              </a:ext>
+            </a:extLst>
+          </p:cNvPr>
+          <p:cNvSpPr txBox="1"/>
+          <p:nvPr/>
+        </p:nvSpPr>
+        <p:spPr>
+          <a:xfrm rot="5400000">
+            <a:off x="2998894" y="4975820"/>
+            <a:ext cx="5760000" cy="594347"/>
+          </a:xfrm>
+          <a:prstGeom prst="rect">
+            <a:avLst/>
+          </a:prstGeom>
+          <a:noFill/>
+        </p:spPr>
+        <p:txBody>
+          <a:bodyPr wrap="none">
+            <a:noAutofit/>
+          </a:bodyPr>
+          <a:lstStyle/>
+          <a:p>
+            <a:r>
+              <a:rPr sz="3227" dirty="0" err="1">
+                <a:latin typeface="华康少女文字W5(P)"/>
+              </a:rPr>
+              <a:t>结婚之后嘛</a:t>
+            </a:r>
+            <a:endParaRPr sz="3227" dirty="0">
+              <a:latin typeface="华康少女文字W5(P)"/>
+            </a:endParaRPr>
+          </a:p>
+        </p:txBody>
+      </p:sp>
+      <p:sp>
+        <p:nvSpPr>
+          <p:cNvPr id="15" name="TextBox 6">
+            <a:extLst>
+              <a:ext uri="{FF2B5EF4-FFF2-40B4-BE49-F238E27FC236}">
+                <a16:creationId xmlns:a16="http://schemas.microsoft.com/office/drawing/2014/main" id="{166ECF9D-6055-ADC2-18DE-2CF8D3A012EC}"/>
+              </a:ext>
+            </a:extLst>
+          </p:cNvPr>
+          <p:cNvSpPr txBox="1"/>
+          <p:nvPr/>
+        </p:nvSpPr>
+        <p:spPr>
+          <a:xfrm>
+            <a:off x="6060626" y="1508991"/>
+            <a:ext cx="5760000" cy="883920"/>
+          </a:xfrm>
+          <a:prstGeom prst="rect">
+            <a:avLst/>
+          </a:prstGeom>
+          <a:noFill/>
+        </p:spPr>
+        <p:txBody>
+          <a:bodyPr wrap="none">
+            <a:noAutofit/>
+          </a:bodyPr>
+          <a:lstStyle/>
+          <a:p>
+            <a:r>
+              <a:rPr sz="4800">
+                <a:latin typeface="华康少女文字W5(P)"/>
+              </a:rPr>
+              <a:t>她说</a:t>
+            </a:r>
+          </a:p>
+        </p:txBody>
+      </p:sp>
+      <p:sp>
+        <p:nvSpPr>
+          <p:cNvPr id="16" name="TextBox 7">
+            <a:extLst>
+              <a:ext uri="{FF2B5EF4-FFF2-40B4-BE49-F238E27FC236}">
+                <a16:creationId xmlns:a16="http://schemas.microsoft.com/office/drawing/2014/main" id="{AC147C27-EF9C-F900-6C2D-1133D8F8499D}"/>
+              </a:ext>
+            </a:extLst>
+          </p:cNvPr>
+          <p:cNvSpPr txBox="1"/>
+          <p:nvPr/>
+        </p:nvSpPr>
+        <p:spPr>
+          <a:xfrm>
+            <a:off x="6060626" y="658177"/>
+            <a:ext cx="5760000" cy="724814"/>
           </a:xfrm>
           <a:prstGeom prst="rect">
             <a:avLst/>
@@ -6911,167 +7302,6 @@
               <a:rPr sz="3936">
                 <a:latin typeface="华康少女文字W5(P)"/>
               </a:rPr>
-              <a:t>我们家里那个</a:t>
-            </a:r>
-          </a:p>
-        </p:txBody>
-      </p:sp>
-      <p:sp>
-        <p:nvSpPr>
-          <p:cNvPr id="5" name="TextBox 4"/>
-          <p:cNvSpPr txBox="1"/>
-          <p:nvPr/>
-        </p:nvSpPr>
-        <p:spPr>
-          <a:xfrm rot="5400000">
-            <a:off x="2619960" y="5654640"/>
-            <a:ext cx="9360000" cy="883920"/>
-          </a:xfrm>
-          <a:prstGeom prst="rect">
-            <a:avLst/>
-          </a:prstGeom>
-          <a:noFill/>
-        </p:spPr>
-        <p:txBody>
-          <a:bodyPr wrap="none">
-            <a:noAutofit/>
-          </a:bodyPr>
-          <a:lstStyle/>
-          <a:p>
-            <a:r>
-              <a:rPr sz="4800">
-                <a:latin typeface="华康少女文字W5(P)"/>
-              </a:rPr>
-              <a:t>谁占上风</a:t>
-            </a:r>
-          </a:p>
-        </p:txBody>
-      </p:sp>
-      <p:sp>
-        <p:nvSpPr>
-          <p:cNvPr id="6" name="TextBox 5"/>
-          <p:cNvSpPr txBox="1"/>
-          <p:nvPr/>
-        </p:nvSpPr>
-        <p:spPr>
-          <a:xfrm rot="5400000">
-            <a:off x="3424327" y="5734192"/>
-            <a:ext cx="9360000" cy="724814"/>
-          </a:xfrm>
-          <a:prstGeom prst="rect">
-            <a:avLst/>
-          </a:prstGeom>
-          <a:noFill/>
-        </p:spPr>
-        <p:txBody>
-          <a:bodyPr wrap="none">
-            <a:noAutofit/>
-          </a:bodyPr>
-          <a:lstStyle/>
-          <a:p>
-            <a:r>
-              <a:rPr sz="3936">
-                <a:latin typeface="华康少女文字W5(P)"/>
-              </a:rPr>
-              <a:t>谁</a:t>
-            </a:r>
-            <a:r>
-              <a:rPr sz="3936">
-                <a:latin typeface="文鼎霹雳体"/>
-              </a:rPr>
-              <a:t>不讲道理</a:t>
-            </a:r>
-          </a:p>
-        </p:txBody>
-      </p:sp>
-      <p:sp>
-        <p:nvSpPr>
-          <p:cNvPr id="7" name="TextBox 6"/>
-          <p:cNvSpPr txBox="1"/>
-          <p:nvPr/>
-        </p:nvSpPr>
-        <p:spPr>
-          <a:xfrm rot="5400000">
-            <a:off x="4083908" y="5799426"/>
-            <a:ext cx="9360000" cy="594347"/>
-          </a:xfrm>
-          <a:prstGeom prst="rect">
-            <a:avLst/>
-          </a:prstGeom>
-          <a:noFill/>
-        </p:spPr>
-        <p:txBody>
-          <a:bodyPr wrap="none">
-            <a:noAutofit/>
-          </a:bodyPr>
-          <a:lstStyle/>
-          <a:p>
-            <a:r>
-              <a:rPr sz="3227">
-                <a:latin typeface="华康少女文字W5(P)"/>
-              </a:rPr>
-              <a:t>结婚之后嘛</a:t>
-            </a:r>
-          </a:p>
-        </p:txBody>
-      </p:sp>
-      <p:sp>
-        <p:nvSpPr>
-          <p:cNvPr id="8" name="TextBox 7"/>
-          <p:cNvSpPr txBox="1"/>
-          <p:nvPr/>
-        </p:nvSpPr>
-        <p:spPr>
-          <a:xfrm>
-            <a:off x="9061082" y="5682479"/>
-            <a:ext cx="9360000" cy="883920"/>
-          </a:xfrm>
-          <a:prstGeom prst="rect">
-            <a:avLst/>
-          </a:prstGeom>
-          <a:noFill/>
-        </p:spPr>
-        <p:txBody>
-          <a:bodyPr wrap="none">
-            <a:noAutofit/>
-          </a:bodyPr>
-          <a:lstStyle/>
-          <a:p>
-            <a:r>
-              <a:rPr sz="4800">
-                <a:latin typeface="华康少女文字W5(P)"/>
-              </a:rPr>
-              <a:t>她说</a:t>
-            </a:r>
-          </a:p>
-        </p:txBody>
-      </p:sp>
-      <p:sp>
-        <p:nvSpPr>
-          <p:cNvPr id="9" name="TextBox 8"/>
-          <p:cNvSpPr txBox="1"/>
-          <p:nvPr/>
-        </p:nvSpPr>
-        <p:spPr>
-          <a:xfrm>
-            <a:off x="9061082" y="4831665"/>
-            <a:ext cx="9360000" cy="724814"/>
-          </a:xfrm>
-          <a:prstGeom prst="rect">
-            <a:avLst/>
-          </a:prstGeom>
-          <a:noFill/>
-        </p:spPr>
-        <p:txBody>
-          <a:bodyPr wrap="none">
-            <a:noAutofit/>
-          </a:bodyPr>
-          <a:lstStyle/>
-          <a:p>
-            <a:r>
-              <a:rPr sz="3936">
-                <a:latin typeface="华康少女文字W5(P)"/>
-              </a:rPr>
               <a:t>我觉得</a:t>
             </a:r>
           </a:p>
@@ -7079,59 +7309,74 @@
       </p:sp>
       <p:sp>
         <p:nvSpPr>
-          <p:cNvPr id="10" name="TextBox 9"/>
-          <p:cNvSpPr txBox="1"/>
-          <p:nvPr/>
-        </p:nvSpPr>
-        <p:spPr>
-          <a:xfrm>
-            <a:off x="9061082" y="4111317"/>
-            <a:ext cx="9360000" cy="594347"/>
-          </a:xfrm>
-          <a:prstGeom prst="rect">
-            <a:avLst/>
-          </a:prstGeom>
-          <a:noFill/>
-        </p:spPr>
-        <p:txBody>
-          <a:bodyPr wrap="none">
-            <a:noAutofit/>
-          </a:bodyPr>
-          <a:lstStyle/>
-          <a:p>
-            <a:r>
-              <a:rPr sz="3227">
+          <p:cNvPr id="17" name="TextBox 8">
+            <a:extLst>
+              <a:ext uri="{FF2B5EF4-FFF2-40B4-BE49-F238E27FC236}">
+                <a16:creationId xmlns:a16="http://schemas.microsoft.com/office/drawing/2014/main" id="{AFBCFE0F-5B84-A080-F975-6D017864C475}"/>
+              </a:ext>
+            </a:extLst>
+          </p:cNvPr>
+          <p:cNvSpPr txBox="1"/>
+          <p:nvPr/>
+        </p:nvSpPr>
+        <p:spPr>
+          <a:xfrm>
+            <a:off x="6060626" y="-62171"/>
+            <a:ext cx="5760000" cy="594347"/>
+          </a:xfrm>
+          <a:prstGeom prst="rect">
+            <a:avLst/>
+          </a:prstGeom>
+          <a:noFill/>
+        </p:spPr>
+        <p:txBody>
+          <a:bodyPr wrap="none">
+            <a:noAutofit/>
+          </a:bodyPr>
+          <a:lstStyle/>
+          <a:p>
+            <a:r>
+              <a:rPr sz="3227" dirty="0" err="1">
                 <a:latin typeface="华康少女文字W5(P)"/>
               </a:rPr>
               <a:t>讲得很对的</a:t>
             </a:r>
-          </a:p>
-        </p:txBody>
-      </p:sp>
-      <p:sp>
-        <p:nvSpPr>
-          <p:cNvPr id="11" name="TextBox 10"/>
-          <p:cNvSpPr txBox="1"/>
-          <p:nvPr/>
-        </p:nvSpPr>
-        <p:spPr>
-          <a:xfrm>
-            <a:off x="9061082" y="3497952"/>
-            <a:ext cx="9360000" cy="487365"/>
-          </a:xfrm>
-          <a:prstGeom prst="rect">
-            <a:avLst/>
-          </a:prstGeom>
-          <a:noFill/>
-        </p:spPr>
-        <p:txBody>
-          <a:bodyPr wrap="none">
-            <a:noAutofit/>
-          </a:bodyPr>
-          <a:lstStyle/>
-          <a:p>
-            <a:r>
-              <a:rPr sz="2646">
+            <a:endParaRPr sz="3227" dirty="0">
+              <a:latin typeface="华康少女文字W5(P)"/>
+            </a:endParaRPr>
+          </a:p>
+        </p:txBody>
+      </p:sp>
+      <p:sp>
+        <p:nvSpPr>
+          <p:cNvPr id="18" name="TextBox 9">
+            <a:extLst>
+              <a:ext uri="{FF2B5EF4-FFF2-40B4-BE49-F238E27FC236}">
+                <a16:creationId xmlns:a16="http://schemas.microsoft.com/office/drawing/2014/main" id="{D70F442C-5EE8-0604-7802-AD8A52227511}"/>
+              </a:ext>
+            </a:extLst>
+          </p:cNvPr>
+          <p:cNvSpPr txBox="1"/>
+          <p:nvPr/>
+        </p:nvSpPr>
+        <p:spPr>
+          <a:xfrm>
+            <a:off x="6060625" y="-675536"/>
+            <a:ext cx="5760000" cy="487365"/>
+          </a:xfrm>
+          <a:prstGeom prst="rect">
+            <a:avLst/>
+          </a:prstGeom>
+          <a:noFill/>
+        </p:spPr>
+        <p:txBody>
+          <a:bodyPr wrap="none">
+            <a:noAutofit/>
+          </a:bodyPr>
+          <a:lstStyle/>
+          <a:p>
+            <a:r>
+              <a:rPr sz="2646" dirty="0" err="1">
                 <a:solidFill>
                   <a:srgbClr val="FF6B35"/>
                 </a:solidFill>
@@ -7140,11 +7385,14 @@
               <a:t>张爱玲</a:t>
             </a:r>
             <a:r>
-              <a:rPr sz="2646">
+              <a:rPr sz="2646" dirty="0" err="1">
                 <a:latin typeface="华康少女文字W5(P)"/>
               </a:rPr>
               <a:t>有一句话</a:t>
             </a:r>
+            <a:endParaRPr sz="2646" dirty="0">
+              <a:latin typeface="华康少女文字W5(P)"/>
+            </a:endParaRPr>
           </a:p>
         </p:txBody>
       </p:sp>
